--- a/Bridging Physically Based Rendering and Diffusion Models with Stochastic Differential Equation.pptx
+++ b/Bridging Physically Based Rendering and Diffusion Models with Stochastic Differential Equation.pptx
@@ -7,11 +7,16 @@
     <p:sldMasterId id="2147483660" r:id="rId3"/>
   </p:sldMasterIdLst>
   <p:notesMasterIdLst>
-    <p:notesMasterId r:id="rId6"/>
+    <p:notesMasterId r:id="rId11"/>
   </p:notesMasterIdLst>
   <p:sldIdLst>
     <p:sldId id="256" r:id="rId4"/>
     <p:sldId id="257" r:id="rId5"/>
+    <p:sldId id="258" r:id="rId6"/>
+    <p:sldId id="259" r:id="rId7"/>
+    <p:sldId id="261" r:id="rId8"/>
+    <p:sldId id="260" r:id="rId9"/>
+    <p:sldId id="262" r:id="rId10"/>
   </p:sldIdLst>
   <p:sldSz cx="12192000" cy="6858000"/>
   <p:notesSz cx="6858000" cy="9144000"/>
@@ -629,6 +634,90 @@
     <p:extLst>
       <p:ext uri="{BB962C8B-B14F-4D97-AF65-F5344CB8AC3E}">
         <p14:creationId xmlns:p14="http://schemas.microsoft.com/office/powerpoint/2010/main" val="3193451758"/>
+      </p:ext>
+    </p:extLst>
+  </p:cSld>
+  <p:clrMapOvr>
+    <a:masterClrMapping/>
+  </p:clrMapOvr>
+</p:notes>
+</file>
+
+<file path=ppt/notesSlides/notesSlide2.xml><?xml version="1.0" encoding="utf-8"?>
+<p:notes xmlns:a="http://schemas.openxmlformats.org/drawingml/2006/main" xmlns:r="http://schemas.openxmlformats.org/officeDocument/2006/relationships" xmlns:p="http://schemas.openxmlformats.org/presentationml/2006/main">
+  <p:cSld>
+    <p:spTree>
+      <p:nvGrpSpPr>
+        <p:cNvPr id="1" name=""/>
+        <p:cNvGrpSpPr/>
+        <p:nvPr/>
+      </p:nvGrpSpPr>
+      <p:grpSpPr>
+        <a:xfrm>
+          <a:off x="0" y="0"/>
+          <a:ext cx="0" cy="0"/>
+          <a:chOff x="0" y="0"/>
+          <a:chExt cx="0" cy="0"/>
+        </a:xfrm>
+      </p:grpSpPr>
+      <p:sp>
+        <p:nvSpPr>
+          <p:cNvPr id="2" name="スライド イメージ プレースホルダー 1"/>
+          <p:cNvSpPr>
+            <a:spLocks noGrp="1" noRot="1" noChangeAspect="1"/>
+          </p:cNvSpPr>
+          <p:nvPr>
+            <p:ph type="sldImg"/>
+          </p:nvPr>
+        </p:nvSpPr>
+        <p:spPr/>
+      </p:sp>
+      <p:sp>
+        <p:nvSpPr>
+          <p:cNvPr id="3" name="ノート プレースホルダー 2"/>
+          <p:cNvSpPr>
+            <a:spLocks noGrp="1"/>
+          </p:cNvSpPr>
+          <p:nvPr>
+            <p:ph type="body" idx="1"/>
+          </p:nvPr>
+        </p:nvSpPr>
+        <p:spPr/>
+        <p:txBody>
+          <a:bodyPr/>
+          <a:lstStyle/>
+          <a:p>
+            <a:endParaRPr kumimoji="1" lang="ja-JP" altLang="en-US" dirty="0"/>
+          </a:p>
+        </p:txBody>
+      </p:sp>
+      <p:sp>
+        <p:nvSpPr>
+          <p:cNvPr id="4" name="スライド番号プレースホルダー 3"/>
+          <p:cNvSpPr>
+            <a:spLocks noGrp="1"/>
+          </p:cNvSpPr>
+          <p:nvPr>
+            <p:ph type="sldNum" sz="quarter" idx="5"/>
+          </p:nvPr>
+        </p:nvSpPr>
+        <p:spPr/>
+        <p:txBody>
+          <a:bodyPr/>
+          <a:lstStyle/>
+          <a:p>
+            <a:fld id="{30F7A929-EBF4-4CA4-850E-F885218E0812}" type="slidenum">
+              <a:rPr kumimoji="1" lang="ja-JP" altLang="en-US" smtClean="0"/>
+              <a:t>5</a:t>
+            </a:fld>
+            <a:endParaRPr kumimoji="1" lang="ja-JP" altLang="en-US"/>
+          </a:p>
+        </p:txBody>
+      </p:sp>
+    </p:spTree>
+    <p:extLst>
+      <p:ext uri="{BB962C8B-B14F-4D97-AF65-F5344CB8AC3E}">
+        <p14:creationId xmlns:p14="http://schemas.microsoft.com/office/powerpoint/2010/main" val="1436809706"/>
       </p:ext>
     </p:extLst>
   </p:cSld>
@@ -9567,8 +9656,8 @@
         </p:nvSpPr>
         <p:spPr>
           <a:xfrm>
-            <a:off x="6666671" y="6455584"/>
-            <a:ext cx="5469007" cy="369332"/>
+            <a:off x="4352925" y="6455584"/>
+            <a:ext cx="7782753" cy="369332"/>
           </a:xfrm>
           <a:prstGeom prst="rect">
             <a:avLst/>
@@ -9613,7 +9702,7 @@
                 <a:ea typeface="Calibri" panose="020F0502020204030204" pitchFamily="34" charset="0"/>
                 <a:cs typeface="Calibri" panose="020F0502020204030204" pitchFamily="34" charset="0"/>
               </a:rPr>
-              <a:t>* All figures in this slide are quoted from the same paper</a:t>
+              <a:t>* All figures without annotation in this slide are quoted from the same paper</a:t>
             </a:r>
             <a:endParaRPr kumimoji="1" lang="ja-JP" altLang="en-US" sz="1800" b="0" i="0" u="none" strike="noStrike" kern="1200" cap="none" spc="0" normalizeH="0" baseline="0" noProof="0" dirty="0">
               <a:ln>
@@ -9712,7 +9801,30 @@
           <a:bodyPr/>
           <a:lstStyle/>
           <a:p>
-            <a:endParaRPr kumimoji="1" lang="ja-JP" altLang="en-US"/>
+            <a:r>
+              <a:rPr lang="en-US" altLang="ja-JP" dirty="0"/>
+              <a:t>Represent MC rendering as a </a:t>
+            </a:r>
+            <a:r>
+              <a:rPr lang="en-US" altLang="ja-JP" b="1" dirty="0"/>
+              <a:t>time step in a diffusion model</a:t>
+            </a:r>
+            <a:br>
+              <a:rPr lang="en-US" altLang="ja-JP" dirty="0"/>
+            </a:br>
+            <a:r>
+              <a:rPr lang="ja-JP" altLang="en-US" dirty="0"/>
+              <a:t>→ </a:t>
+            </a:r>
+            <a:r>
+              <a:rPr lang="en-US" altLang="ja-JP" dirty="0"/>
+              <a:t>Achieve denoising, </a:t>
+            </a:r>
+            <a:r>
+              <a:rPr lang="en-US" altLang="ja-JP" b="1" dirty="0"/>
+              <a:t>physically plausible image generation and editing</a:t>
+            </a:r>
+            <a:endParaRPr kumimoji="1" lang="ja-JP" altLang="en-US" b="1" dirty="0"/>
           </a:p>
         </p:txBody>
       </p:sp>
@@ -9749,10 +9861,4990 @@
           </a:p>
         </p:txBody>
       </p:sp>
+      <p:pic>
+        <p:nvPicPr>
+          <p:cNvPr id="6" name="図 5">
+            <a:extLst>
+              <a:ext uri="{FF2B5EF4-FFF2-40B4-BE49-F238E27FC236}">
+                <a16:creationId xmlns:a16="http://schemas.microsoft.com/office/drawing/2014/main" id="{889226B2-EAB9-AB20-B948-A426EE89E3A0}"/>
+              </a:ext>
+            </a:extLst>
+          </p:cNvPr>
+          <p:cNvPicPr>
+            <a:picLocks noChangeAspect="1"/>
+          </p:cNvPicPr>
+          <p:nvPr/>
+        </p:nvPicPr>
+        <p:blipFill>
+          <a:blip r:embed="rId2"/>
+          <a:stretch>
+            <a:fillRect/>
+          </a:stretch>
+        </p:blipFill>
+        <p:spPr>
+          <a:xfrm>
+            <a:off x="2196654" y="2248346"/>
+            <a:ext cx="7798692" cy="3904989"/>
+          </a:xfrm>
+          <a:prstGeom prst="rect">
+            <a:avLst/>
+          </a:prstGeom>
+        </p:spPr>
+      </p:pic>
+      <p:sp>
+        <p:nvSpPr>
+          <p:cNvPr id="8" name="テキスト ボックス 7">
+            <a:extLst>
+              <a:ext uri="{FF2B5EF4-FFF2-40B4-BE49-F238E27FC236}">
+                <a16:creationId xmlns:a16="http://schemas.microsoft.com/office/drawing/2014/main" id="{B30913F9-35ED-8065-1B93-6CE02A92E49A}"/>
+              </a:ext>
+            </a:extLst>
+          </p:cNvPr>
+          <p:cNvSpPr txBox="1"/>
+          <p:nvPr/>
+        </p:nvSpPr>
+        <p:spPr>
+          <a:xfrm>
+            <a:off x="3048000" y="6134970"/>
+            <a:ext cx="6096000" cy="646331"/>
+          </a:xfrm>
+          <a:prstGeom prst="rect">
+            <a:avLst/>
+          </a:prstGeom>
+          <a:noFill/>
+        </p:spPr>
+        <p:txBody>
+          <a:bodyPr wrap="square">
+            <a:spAutoFit/>
+          </a:bodyPr>
+          <a:lstStyle/>
+          <a:p>
+            <a:pPr algn="ctr"/>
+            <a:r>
+              <a:rPr lang="ja-JP" altLang="en-US" dirty="0">
+                <a:latin typeface="Calibri" panose="020F0502020204030204" pitchFamily="34" charset="0"/>
+                <a:cs typeface="Calibri" panose="020F0502020204030204" pitchFamily="34" charset="0"/>
+              </a:rPr>
+              <a:t>Comparison of convergence behavior in ray tracing and denoising behavior in the diffusion model</a:t>
+            </a:r>
+          </a:p>
+        </p:txBody>
+      </p:sp>
     </p:spTree>
     <p:extLst>
       <p:ext uri="{BB962C8B-B14F-4D97-AF65-F5344CB8AC3E}">
         <p14:creationId xmlns:p14="http://schemas.microsoft.com/office/powerpoint/2010/main" val="283016703"/>
+      </p:ext>
+    </p:extLst>
+  </p:cSld>
+  <p:clrMapOvr>
+    <a:masterClrMapping/>
+  </p:clrMapOvr>
+</p:sld>
+</file>
+
+<file path=ppt/slides/slide3.xml><?xml version="1.0" encoding="utf-8"?>
+<p:sld xmlns:a="http://schemas.openxmlformats.org/drawingml/2006/main" xmlns:r="http://schemas.openxmlformats.org/officeDocument/2006/relationships" xmlns:p="http://schemas.openxmlformats.org/presentationml/2006/main">
+  <p:cSld>
+    <p:spTree>
+      <p:nvGrpSpPr>
+        <p:cNvPr id="1" name="">
+          <a:extLst>
+            <a:ext uri="{FF2B5EF4-FFF2-40B4-BE49-F238E27FC236}">
+              <a16:creationId xmlns:a16="http://schemas.microsoft.com/office/drawing/2014/main" id="{8688F18F-849B-D3F2-187D-929791FB119C}"/>
+            </a:ext>
+          </a:extLst>
+        </p:cNvPr>
+        <p:cNvGrpSpPr/>
+        <p:nvPr/>
+      </p:nvGrpSpPr>
+      <p:grpSpPr>
+        <a:xfrm>
+          <a:off x="0" y="0"/>
+          <a:ext cx="0" cy="0"/>
+          <a:chOff x="0" y="0"/>
+          <a:chExt cx="0" cy="0"/>
+        </a:xfrm>
+      </p:grpSpPr>
+      <p:sp>
+        <p:nvSpPr>
+          <p:cNvPr id="2" name="タイトル 1">
+            <a:extLst>
+              <a:ext uri="{FF2B5EF4-FFF2-40B4-BE49-F238E27FC236}">
+                <a16:creationId xmlns:a16="http://schemas.microsoft.com/office/drawing/2014/main" id="{856484CC-660D-682D-6948-1769FFE4DC84}"/>
+              </a:ext>
+            </a:extLst>
+          </p:cNvPr>
+          <p:cNvSpPr>
+            <a:spLocks noGrp="1"/>
+          </p:cNvSpPr>
+          <p:nvPr>
+            <p:ph type="title"/>
+          </p:nvPr>
+        </p:nvSpPr>
+        <p:spPr/>
+        <p:txBody>
+          <a:bodyPr/>
+          <a:lstStyle/>
+          <a:p>
+            <a:r>
+              <a:rPr kumimoji="1" lang="en-US" altLang="ja-JP" dirty="0"/>
+              <a:t>Background</a:t>
+            </a:r>
+            <a:endParaRPr kumimoji="1" lang="ja-JP" altLang="en-US" dirty="0"/>
+          </a:p>
+        </p:txBody>
+      </p:sp>
+      <p:sp>
+        <p:nvSpPr>
+          <p:cNvPr id="3" name="コンテンツ プレースホルダー 2">
+            <a:extLst>
+              <a:ext uri="{FF2B5EF4-FFF2-40B4-BE49-F238E27FC236}">
+                <a16:creationId xmlns:a16="http://schemas.microsoft.com/office/drawing/2014/main" id="{6AA99E40-A723-8D21-F42A-EAB553496AC4}"/>
+              </a:ext>
+            </a:extLst>
+          </p:cNvPr>
+          <p:cNvSpPr>
+            <a:spLocks noGrp="1"/>
+          </p:cNvSpPr>
+          <p:nvPr>
+            <p:ph idx="1"/>
+          </p:nvPr>
+        </p:nvSpPr>
+        <p:spPr>
+          <a:xfrm>
+            <a:off x="250135" y="1362072"/>
+            <a:ext cx="11762910" cy="1224109"/>
+          </a:xfrm>
+        </p:spPr>
+        <p:txBody>
+          <a:bodyPr>
+            <a:normAutofit fontScale="92500"/>
+          </a:bodyPr>
+          <a:lstStyle/>
+          <a:p>
+            <a:r>
+              <a:rPr lang="en-US" altLang="ja-JP" dirty="0"/>
+              <a:t>Diffusion model: Generative AI model, consisting of </a:t>
+            </a:r>
+          </a:p>
+          <a:p>
+            <a:pPr marL="971550" lvl="1" indent="-514350">
+              <a:buFont typeface="+mj-lt"/>
+              <a:buAutoNum type="arabicPeriod"/>
+            </a:pPr>
+            <a:r>
+              <a:rPr lang="en-US" altLang="ja-JP" dirty="0"/>
+              <a:t>Forward diffusion: Add Gaussian noise to the source image and destroy it</a:t>
+            </a:r>
+          </a:p>
+          <a:p>
+            <a:pPr marL="971550" lvl="1" indent="-514350">
+              <a:buFont typeface="+mj-lt"/>
+              <a:buAutoNum type="arabicPeriod"/>
+            </a:pPr>
+            <a:r>
+              <a:rPr lang="en-US" altLang="ja-JP" b="1" dirty="0"/>
+              <a:t>Reverse diffusion</a:t>
+            </a:r>
+            <a:r>
+              <a:rPr lang="en-US" altLang="ja-JP" sz="2200" b="1" dirty="0"/>
+              <a:t> </a:t>
+            </a:r>
+            <a:r>
+              <a:rPr lang="en-US" altLang="ja-JP" dirty="0"/>
+              <a:t>: Denoise images covered in Gaussian noise and restore the original images</a:t>
+            </a:r>
+            <a:endParaRPr kumimoji="1" lang="ja-JP" altLang="en-US" b="1" dirty="0"/>
+          </a:p>
+        </p:txBody>
+      </p:sp>
+      <p:sp>
+        <p:nvSpPr>
+          <p:cNvPr id="4" name="スライド番号プレースホルダー 3">
+            <a:extLst>
+              <a:ext uri="{FF2B5EF4-FFF2-40B4-BE49-F238E27FC236}">
+                <a16:creationId xmlns:a16="http://schemas.microsoft.com/office/drawing/2014/main" id="{2DE6175C-D860-F3CB-73DA-230F08E4B7AF}"/>
+              </a:ext>
+            </a:extLst>
+          </p:cNvPr>
+          <p:cNvSpPr>
+            <a:spLocks noGrp="1"/>
+          </p:cNvSpPr>
+          <p:nvPr>
+            <p:ph type="sldNum" sz="quarter" idx="12"/>
+          </p:nvPr>
+        </p:nvSpPr>
+        <p:spPr/>
+        <p:txBody>
+          <a:bodyPr/>
+          <a:lstStyle/>
+          <a:p>
+            <a:fld id="{05A07A33-D779-4A79-A49C-E26576C728D8}" type="slidenum">
+              <a:rPr lang="ja-JP" altLang="en-US" smtClean="0"/>
+              <a:pPr/>
+              <a:t>3</a:t>
+            </a:fld>
+            <a:endParaRPr lang="ja-JP" altLang="en-US" dirty="0">
+              <a:latin typeface="Calibri" panose="020F0502020204030204" pitchFamily="34" charset="0"/>
+              <a:cs typeface="Calibri" panose="020F0502020204030204" pitchFamily="34" charset="0"/>
+            </a:endParaRPr>
+          </a:p>
+        </p:txBody>
+      </p:sp>
+      <p:sp>
+        <p:nvSpPr>
+          <p:cNvPr id="8" name="テキスト ボックス 7">
+            <a:extLst>
+              <a:ext uri="{FF2B5EF4-FFF2-40B4-BE49-F238E27FC236}">
+                <a16:creationId xmlns:a16="http://schemas.microsoft.com/office/drawing/2014/main" id="{7623ED1F-3AEA-6158-2749-1A09F695AF6B}"/>
+              </a:ext>
+            </a:extLst>
+          </p:cNvPr>
+          <p:cNvSpPr txBox="1"/>
+          <p:nvPr/>
+        </p:nvSpPr>
+        <p:spPr>
+          <a:xfrm>
+            <a:off x="683557" y="6134724"/>
+            <a:ext cx="6096000" cy="584775"/>
+          </a:xfrm>
+          <a:prstGeom prst="rect">
+            <a:avLst/>
+          </a:prstGeom>
+          <a:noFill/>
+        </p:spPr>
+        <p:txBody>
+          <a:bodyPr wrap="square">
+            <a:spAutoFit/>
+          </a:bodyPr>
+          <a:lstStyle/>
+          <a:p>
+            <a:pPr algn="ctr"/>
+            <a:r>
+              <a:rPr lang="en-US" altLang="ja-JP" dirty="0">
+                <a:latin typeface="Calibri" panose="020F0502020204030204" pitchFamily="34" charset="0"/>
+                <a:cs typeface="Calibri" panose="020F0502020204030204" pitchFamily="34" charset="0"/>
+              </a:rPr>
+              <a:t>Summary image of diffusion model</a:t>
+            </a:r>
+            <a:br>
+              <a:rPr lang="en-US" altLang="ja-JP" dirty="0">
+                <a:latin typeface="Calibri" panose="020F0502020204030204" pitchFamily="34" charset="0"/>
+                <a:cs typeface="Calibri" panose="020F0502020204030204" pitchFamily="34" charset="0"/>
+              </a:rPr>
+            </a:br>
+            <a:r>
+              <a:rPr lang="en-US" altLang="ja-JP" sz="1400" dirty="0">
+                <a:latin typeface="Calibri" panose="020F0502020204030204" pitchFamily="34" charset="0"/>
+                <a:cs typeface="Calibri" panose="020F0502020204030204" pitchFamily="34" charset="0"/>
+              </a:rPr>
+              <a:t>(quoted from “</a:t>
+            </a:r>
+            <a:r>
+              <a:rPr lang="en-US" altLang="ja-JP" sz="1400" dirty="0">
+                <a:latin typeface="Calibri" panose="020F0502020204030204" pitchFamily="34" charset="0"/>
+                <a:cs typeface="Calibri" panose="020F0502020204030204" pitchFamily="34" charset="0"/>
+                <a:hlinkClick r:id="rId2"/>
+              </a:rPr>
+              <a:t>What are Diffusion Models?</a:t>
+            </a:r>
+            <a:r>
+              <a:rPr lang="en-US" altLang="ja-JP" sz="1400" dirty="0">
+                <a:latin typeface="Calibri" panose="020F0502020204030204" pitchFamily="34" charset="0"/>
+                <a:cs typeface="Calibri" panose="020F0502020204030204" pitchFamily="34" charset="0"/>
+              </a:rPr>
+              <a:t>”)</a:t>
+            </a:r>
+            <a:endParaRPr lang="ja-JP" altLang="en-US" dirty="0">
+              <a:latin typeface="Calibri" panose="020F0502020204030204" pitchFamily="34" charset="0"/>
+              <a:cs typeface="Calibri" panose="020F0502020204030204" pitchFamily="34" charset="0"/>
+            </a:endParaRPr>
+          </a:p>
+        </p:txBody>
+      </p:sp>
+      <p:pic>
+        <p:nvPicPr>
+          <p:cNvPr id="10" name="図 9">
+            <a:extLst>
+              <a:ext uri="{FF2B5EF4-FFF2-40B4-BE49-F238E27FC236}">
+                <a16:creationId xmlns:a16="http://schemas.microsoft.com/office/drawing/2014/main" id="{871D39F8-2A31-7B62-F638-21F5090001A4}"/>
+              </a:ext>
+            </a:extLst>
+          </p:cNvPr>
+          <p:cNvPicPr>
+            <a:picLocks noChangeAspect="1"/>
+          </p:cNvPicPr>
+          <p:nvPr/>
+        </p:nvPicPr>
+        <p:blipFill>
+          <a:blip r:embed="rId3"/>
+          <a:stretch>
+            <a:fillRect/>
+          </a:stretch>
+        </p:blipFill>
+        <p:spPr>
+          <a:xfrm>
+            <a:off x="250135" y="2671488"/>
+            <a:ext cx="6962843" cy="3472761"/>
+          </a:xfrm>
+          <a:prstGeom prst="rect">
+            <a:avLst/>
+          </a:prstGeom>
+        </p:spPr>
+      </p:pic>
+      <p:sp>
+        <p:nvSpPr>
+          <p:cNvPr id="11" name="コンテンツ プレースホルダー 2">
+            <a:extLst>
+              <a:ext uri="{FF2B5EF4-FFF2-40B4-BE49-F238E27FC236}">
+                <a16:creationId xmlns:a16="http://schemas.microsoft.com/office/drawing/2014/main" id="{92ADB8BA-1F39-1F7B-814C-0F01FFFC7F5E}"/>
+              </a:ext>
+            </a:extLst>
+          </p:cNvPr>
+          <p:cNvSpPr txBox="1">
+            <a:spLocks/>
+          </p:cNvSpPr>
+          <p:nvPr/>
+        </p:nvSpPr>
+        <p:spPr>
+          <a:xfrm>
+            <a:off x="7212978" y="2671488"/>
+            <a:ext cx="5121897" cy="3700737"/>
+          </a:xfrm>
+          <a:prstGeom prst="rect">
+            <a:avLst/>
+          </a:prstGeom>
+        </p:spPr>
+        <p:txBody>
+          <a:bodyPr vert="horz" lIns="91440" tIns="45720" rIns="91440" bIns="45720" rtlCol="0">
+            <a:normAutofit/>
+          </a:bodyPr>
+          <a:lstStyle>
+            <a:lvl1pPr marL="228600" indent="-228600" algn="l" defTabSz="914400" rtl="0" eaLnBrk="1" latinLnBrk="0" hangingPunct="1">
+              <a:lnSpc>
+                <a:spcPct val="90000"/>
+              </a:lnSpc>
+              <a:spcBef>
+                <a:spcPts val="1000"/>
+              </a:spcBef>
+              <a:buFont typeface="Arial" panose="020B0604020202020204" pitchFamily="34" charset="0"/>
+              <a:buChar char="•"/>
+              <a:defRPr kumimoji="1" sz="2800" kern="1200">
+                <a:solidFill>
+                  <a:schemeClr val="tx1"/>
+                </a:solidFill>
+                <a:latin typeface="Calibri" panose="020F0502020204030204" pitchFamily="34" charset="0"/>
+                <a:ea typeface="+mn-ea"/>
+                <a:cs typeface="Calibri" panose="020F0502020204030204" pitchFamily="34" charset="0"/>
+              </a:defRPr>
+            </a:lvl1pPr>
+            <a:lvl2pPr marL="685800" indent="-228600" algn="l" defTabSz="914400" rtl="0" eaLnBrk="1" latinLnBrk="0" hangingPunct="1">
+              <a:lnSpc>
+                <a:spcPct val="90000"/>
+              </a:lnSpc>
+              <a:spcBef>
+                <a:spcPts val="500"/>
+              </a:spcBef>
+              <a:buFont typeface="Arial" panose="020B0604020202020204" pitchFamily="34" charset="0"/>
+              <a:buChar char="•"/>
+              <a:defRPr kumimoji="1" sz="2400" kern="1200">
+                <a:solidFill>
+                  <a:schemeClr val="tx1"/>
+                </a:solidFill>
+                <a:latin typeface="Calibri" panose="020F0502020204030204" pitchFamily="34" charset="0"/>
+                <a:ea typeface="+mn-ea"/>
+                <a:cs typeface="Calibri" panose="020F0502020204030204" pitchFamily="34" charset="0"/>
+              </a:defRPr>
+            </a:lvl2pPr>
+            <a:lvl3pPr marL="1143000" indent="-228600" algn="l" defTabSz="914400" rtl="0" eaLnBrk="1" latinLnBrk="0" hangingPunct="1">
+              <a:lnSpc>
+                <a:spcPct val="90000"/>
+              </a:lnSpc>
+              <a:spcBef>
+                <a:spcPts val="500"/>
+              </a:spcBef>
+              <a:buFont typeface="Arial" panose="020B0604020202020204" pitchFamily="34" charset="0"/>
+              <a:buChar char="•"/>
+              <a:defRPr kumimoji="1" sz="2000" kern="1200">
+                <a:solidFill>
+                  <a:schemeClr val="tx1"/>
+                </a:solidFill>
+                <a:latin typeface="Calibri" panose="020F0502020204030204" pitchFamily="34" charset="0"/>
+                <a:ea typeface="+mn-ea"/>
+                <a:cs typeface="Calibri" panose="020F0502020204030204" pitchFamily="34" charset="0"/>
+              </a:defRPr>
+            </a:lvl3pPr>
+            <a:lvl4pPr marL="1600200" indent="-228600" algn="l" defTabSz="914400" rtl="0" eaLnBrk="1" latinLnBrk="0" hangingPunct="1">
+              <a:lnSpc>
+                <a:spcPct val="90000"/>
+              </a:lnSpc>
+              <a:spcBef>
+                <a:spcPts val="500"/>
+              </a:spcBef>
+              <a:buFont typeface="Arial" panose="020B0604020202020204" pitchFamily="34" charset="0"/>
+              <a:buChar char="•"/>
+              <a:defRPr kumimoji="1" sz="1800" kern="1200">
+                <a:solidFill>
+                  <a:schemeClr val="tx1"/>
+                </a:solidFill>
+                <a:latin typeface="Calibri" panose="020F0502020204030204" pitchFamily="34" charset="0"/>
+                <a:ea typeface="+mn-ea"/>
+                <a:cs typeface="Calibri" panose="020F0502020204030204" pitchFamily="34" charset="0"/>
+              </a:defRPr>
+            </a:lvl4pPr>
+            <a:lvl5pPr marL="2057400" indent="-228600" algn="l" defTabSz="914400" rtl="0" eaLnBrk="1" latinLnBrk="0" hangingPunct="1">
+              <a:lnSpc>
+                <a:spcPct val="90000"/>
+              </a:lnSpc>
+              <a:spcBef>
+                <a:spcPts val="500"/>
+              </a:spcBef>
+              <a:buFont typeface="Arial" panose="020B0604020202020204" pitchFamily="34" charset="0"/>
+              <a:buChar char="•"/>
+              <a:defRPr kumimoji="1" sz="1800" kern="1200">
+                <a:solidFill>
+                  <a:schemeClr val="tx1"/>
+                </a:solidFill>
+                <a:latin typeface="Calibri" panose="020F0502020204030204" pitchFamily="34" charset="0"/>
+                <a:ea typeface="+mn-ea"/>
+                <a:cs typeface="Calibri" panose="020F0502020204030204" pitchFamily="34" charset="0"/>
+              </a:defRPr>
+            </a:lvl5pPr>
+            <a:lvl6pPr marL="2514600" indent="-228600" algn="l" defTabSz="914400" rtl="0" eaLnBrk="1" latinLnBrk="0" hangingPunct="1">
+              <a:lnSpc>
+                <a:spcPct val="90000"/>
+              </a:lnSpc>
+              <a:spcBef>
+                <a:spcPts val="500"/>
+              </a:spcBef>
+              <a:buFont typeface="Arial" panose="020B0604020202020204" pitchFamily="34" charset="0"/>
+              <a:buChar char="•"/>
+              <a:defRPr kumimoji="1" sz="1800" kern="1200">
+                <a:solidFill>
+                  <a:schemeClr val="tx1"/>
+                </a:solidFill>
+                <a:latin typeface="+mn-lt"/>
+                <a:ea typeface="+mn-ea"/>
+                <a:cs typeface="+mn-cs"/>
+              </a:defRPr>
+            </a:lvl6pPr>
+            <a:lvl7pPr marL="2971800" indent="-228600" algn="l" defTabSz="914400" rtl="0" eaLnBrk="1" latinLnBrk="0" hangingPunct="1">
+              <a:lnSpc>
+                <a:spcPct val="90000"/>
+              </a:lnSpc>
+              <a:spcBef>
+                <a:spcPts val="500"/>
+              </a:spcBef>
+              <a:buFont typeface="Arial" panose="020B0604020202020204" pitchFamily="34" charset="0"/>
+              <a:buChar char="•"/>
+              <a:defRPr kumimoji="1" sz="1800" kern="1200">
+                <a:solidFill>
+                  <a:schemeClr val="tx1"/>
+                </a:solidFill>
+                <a:latin typeface="+mn-lt"/>
+                <a:ea typeface="+mn-ea"/>
+                <a:cs typeface="+mn-cs"/>
+              </a:defRPr>
+            </a:lvl7pPr>
+            <a:lvl8pPr marL="3429000" indent="-228600" algn="l" defTabSz="914400" rtl="0" eaLnBrk="1" latinLnBrk="0" hangingPunct="1">
+              <a:lnSpc>
+                <a:spcPct val="90000"/>
+              </a:lnSpc>
+              <a:spcBef>
+                <a:spcPts val="500"/>
+              </a:spcBef>
+              <a:buFont typeface="Arial" panose="020B0604020202020204" pitchFamily="34" charset="0"/>
+              <a:buChar char="•"/>
+              <a:defRPr kumimoji="1" sz="1800" kern="1200">
+                <a:solidFill>
+                  <a:schemeClr val="tx1"/>
+                </a:solidFill>
+                <a:latin typeface="+mn-lt"/>
+                <a:ea typeface="+mn-ea"/>
+                <a:cs typeface="+mn-cs"/>
+              </a:defRPr>
+            </a:lvl8pPr>
+            <a:lvl9pPr marL="3886200" indent="-228600" algn="l" defTabSz="914400" rtl="0" eaLnBrk="1" latinLnBrk="0" hangingPunct="1">
+              <a:lnSpc>
+                <a:spcPct val="90000"/>
+              </a:lnSpc>
+              <a:spcBef>
+                <a:spcPts val="500"/>
+              </a:spcBef>
+              <a:buFont typeface="Arial" panose="020B0604020202020204" pitchFamily="34" charset="0"/>
+              <a:buChar char="•"/>
+              <a:defRPr kumimoji="1" sz="1800" kern="1200">
+                <a:solidFill>
+                  <a:schemeClr val="tx1"/>
+                </a:solidFill>
+                <a:latin typeface="+mn-lt"/>
+                <a:ea typeface="+mn-ea"/>
+                <a:cs typeface="+mn-cs"/>
+              </a:defRPr>
+            </a:lvl9pPr>
+          </a:lstStyle>
+          <a:p>
+            <a:r>
+              <a:rPr lang="en-US" altLang="ja-JP" sz="2400" dirty="0"/>
+              <a:t>Each of these stages is called </a:t>
+            </a:r>
+            <a:br>
+              <a:rPr lang="en-US" altLang="ja-JP" sz="2400" dirty="0"/>
+            </a:br>
+            <a:r>
+              <a:rPr lang="en-US" altLang="ja-JP" sz="2400" dirty="0"/>
+              <a:t>“</a:t>
+            </a:r>
+            <a:r>
+              <a:rPr lang="en-US" altLang="ja-JP" sz="2400" b="1" dirty="0"/>
+              <a:t>time step</a:t>
+            </a:r>
+            <a:r>
+              <a:rPr lang="en-US" altLang="ja-JP" sz="2400" dirty="0"/>
+              <a:t>”</a:t>
+            </a:r>
+            <a:br>
+              <a:rPr lang="en-US" altLang="ja-JP" sz="2400" dirty="0"/>
+            </a:br>
+            <a:endParaRPr lang="en-US" altLang="ja-JP" sz="2400" dirty="0"/>
+          </a:p>
+          <a:p>
+            <a:r>
+              <a:rPr lang="en-US" altLang="ja-JP" sz="2400" dirty="0"/>
+              <a:t>In MC rendering as well, </a:t>
+            </a:r>
+            <a:br>
+              <a:rPr lang="en-US" altLang="ja-JP" sz="2400" dirty="0"/>
+            </a:br>
+            <a:r>
+              <a:rPr lang="en-US" altLang="ja-JP" sz="2400" dirty="0"/>
+              <a:t>the results converge as </a:t>
+            </a:r>
+            <a:br>
+              <a:rPr lang="en-US" altLang="ja-JP" sz="2400" dirty="0"/>
+            </a:br>
+            <a:r>
+              <a:rPr lang="en-US" altLang="ja-JP" sz="2400" dirty="0"/>
+              <a:t>time progresses (</a:t>
+            </a:r>
+            <a:r>
+              <a:rPr lang="en-US" altLang="ja-JP" sz="2400" dirty="0" err="1"/>
+              <a:t>spp</a:t>
+            </a:r>
+            <a:r>
+              <a:rPr lang="en-US" altLang="ja-JP" sz="2400" dirty="0"/>
+              <a:t> increases)</a:t>
+            </a:r>
+            <a:br>
+              <a:rPr lang="en-US" altLang="ja-JP" sz="2400" dirty="0"/>
+            </a:br>
+            <a:endParaRPr lang="en-US" altLang="ja-JP" sz="2400" dirty="0"/>
+          </a:p>
+          <a:p>
+            <a:r>
+              <a:rPr lang="en-US" altLang="ja-JP" sz="2400" dirty="0"/>
+              <a:t>They unified the convergence of </a:t>
+            </a:r>
+            <a:br>
+              <a:rPr lang="en-US" altLang="ja-JP" sz="2400" dirty="0"/>
+            </a:br>
+            <a:r>
+              <a:rPr lang="en-US" altLang="ja-JP" sz="2400" dirty="0"/>
+              <a:t>both sides by expressing it as a </a:t>
+            </a:r>
+            <a:r>
+              <a:rPr lang="en-US" altLang="ja-JP" sz="2400" b="1" dirty="0"/>
+              <a:t>differential equation</a:t>
+            </a:r>
+            <a:endParaRPr lang="en-US" altLang="ja-JP" sz="2400" dirty="0"/>
+          </a:p>
+        </p:txBody>
+      </p:sp>
+    </p:spTree>
+    <p:extLst>
+      <p:ext uri="{BB962C8B-B14F-4D97-AF65-F5344CB8AC3E}">
+        <p14:creationId xmlns:p14="http://schemas.microsoft.com/office/powerpoint/2010/main" val="31196704"/>
+      </p:ext>
+    </p:extLst>
+  </p:cSld>
+  <p:clrMapOvr>
+    <a:masterClrMapping/>
+  </p:clrMapOvr>
+</p:sld>
+</file>
+
+<file path=ppt/slides/slide4.xml><?xml version="1.0" encoding="utf-8"?>
+<p:sld xmlns:a="http://schemas.openxmlformats.org/drawingml/2006/main" xmlns:r="http://schemas.openxmlformats.org/officeDocument/2006/relationships" xmlns:p="http://schemas.openxmlformats.org/presentationml/2006/main">
+  <p:cSld>
+    <p:spTree>
+      <p:nvGrpSpPr>
+        <p:cNvPr id="1" name="">
+          <a:extLst>
+            <a:ext uri="{FF2B5EF4-FFF2-40B4-BE49-F238E27FC236}">
+              <a16:creationId xmlns:a16="http://schemas.microsoft.com/office/drawing/2014/main" id="{EEB61B00-442E-3151-76CC-016C7CA43313}"/>
+            </a:ext>
+          </a:extLst>
+        </p:cNvPr>
+        <p:cNvGrpSpPr/>
+        <p:nvPr/>
+      </p:nvGrpSpPr>
+      <p:grpSpPr>
+        <a:xfrm>
+          <a:off x="0" y="0"/>
+          <a:ext cx="0" cy="0"/>
+          <a:chOff x="0" y="0"/>
+          <a:chExt cx="0" cy="0"/>
+        </a:xfrm>
+      </p:grpSpPr>
+      <p:sp>
+        <p:nvSpPr>
+          <p:cNvPr id="2" name="タイトル 1">
+            <a:extLst>
+              <a:ext uri="{FF2B5EF4-FFF2-40B4-BE49-F238E27FC236}">
+                <a16:creationId xmlns:a16="http://schemas.microsoft.com/office/drawing/2014/main" id="{D006D25A-AC28-E150-7DE1-61F4B9383295}"/>
+              </a:ext>
+            </a:extLst>
+          </p:cNvPr>
+          <p:cNvSpPr>
+            <a:spLocks noGrp="1"/>
+          </p:cNvSpPr>
+          <p:nvPr>
+            <p:ph type="title"/>
+          </p:nvPr>
+        </p:nvSpPr>
+        <p:spPr/>
+        <p:txBody>
+          <a:bodyPr/>
+          <a:lstStyle/>
+          <a:p>
+            <a:r>
+              <a:rPr kumimoji="1" lang="en-US" altLang="ja-JP" dirty="0"/>
+              <a:t>Overview</a:t>
+            </a:r>
+            <a:endParaRPr kumimoji="1" lang="ja-JP" altLang="en-US" dirty="0"/>
+          </a:p>
+        </p:txBody>
+      </p:sp>
+      <mc:AlternateContent xmlns:mc="http://schemas.openxmlformats.org/markup-compatibility/2006">
+        <mc:Choice xmlns:a14="http://schemas.microsoft.com/office/drawing/2010/main" Requires="a14">
+          <p:sp>
+            <p:nvSpPr>
+              <p:cNvPr id="3" name="コンテンツ プレースホルダー 2">
+                <a:extLst>
+                  <a:ext uri="{FF2B5EF4-FFF2-40B4-BE49-F238E27FC236}">
+                    <a16:creationId xmlns:a16="http://schemas.microsoft.com/office/drawing/2014/main" id="{494E1B60-098B-032E-452F-D828730F5DD6}"/>
+                  </a:ext>
+                </a:extLst>
+              </p:cNvPr>
+              <p:cNvSpPr>
+                <a:spLocks noGrp="1"/>
+              </p:cNvSpPr>
+              <p:nvPr>
+                <p:ph idx="1"/>
+              </p:nvPr>
+            </p:nvSpPr>
+            <p:spPr>
+              <a:xfrm>
+                <a:off x="214544" y="4317477"/>
+                <a:ext cx="11977456" cy="2292874"/>
+              </a:xfrm>
+            </p:spPr>
+            <p:txBody>
+              <a:bodyPr>
+                <a:normAutofit fontScale="92500" lnSpcReduction="10000"/>
+              </a:bodyPr>
+              <a:lstStyle/>
+              <a:p>
+                <a:pPr marL="514350" indent="-514350">
+                  <a:buFont typeface="+mj-lt"/>
+                  <a:buAutoNum type="arabicPeriod"/>
+                </a:pPr>
+                <a:r>
+                  <a:rPr lang="en-US" altLang="ja-JP" u="sng" dirty="0"/>
+                  <a:t>MC-SDE</a:t>
+                </a:r>
+                <a:r>
+                  <a:rPr lang="en-US" altLang="ja-JP" dirty="0"/>
+                  <a:t>: Modeling the convergence of MC path tracing as “SDE”</a:t>
+                </a:r>
+                <a:br>
+                  <a:rPr lang="en-US" altLang="ja-JP" dirty="0"/>
+                </a:br>
+                <a:r>
+                  <a:rPr lang="en-US" altLang="ja-JP" dirty="0"/>
+                  <a:t>	           (Stochastic</a:t>
+                </a:r>
+                <a:r>
+                  <a:rPr lang="ja-JP" altLang="en-US" dirty="0"/>
+                  <a:t> </a:t>
+                </a:r>
+                <a:r>
+                  <a:rPr lang="en-US" altLang="ja-JP" dirty="0"/>
+                  <a:t>Differential Equation)</a:t>
+                </a:r>
+              </a:p>
+              <a:p>
+                <a:pPr marL="514350" indent="-514350">
+                  <a:buFont typeface="+mj-lt"/>
+                  <a:buAutoNum type="arabicPeriod"/>
+                </a:pPr>
+                <a:r>
+                  <a:rPr lang="en-US" altLang="ja-JP" u="sng" dirty="0"/>
+                  <a:t>Time mapping</a:t>
+                </a:r>
+                <a:r>
+                  <a:rPr lang="en-US" altLang="ja-JP" dirty="0"/>
+                  <a:t>: Calculate the correspondence between the </a:t>
+                </a:r>
+                <a:br>
+                  <a:rPr lang="en-US" altLang="ja-JP" dirty="0"/>
+                </a:br>
+                <a:r>
+                  <a:rPr lang="en-US" altLang="ja-JP" dirty="0"/>
+                  <a:t>		</a:t>
+                </a:r>
+                <a:r>
+                  <a:rPr lang="ja-JP" altLang="en-US" dirty="0"/>
+                  <a:t>　　 </a:t>
+                </a:r>
+                <a:r>
+                  <a:rPr lang="en-US" altLang="ja-JP" b="1" dirty="0"/>
+                  <a:t>“sample count </a:t>
+                </a:r>
+                <a14:m>
+                  <m:oMath xmlns:m="http://schemas.openxmlformats.org/officeDocument/2006/math">
+                    <m:r>
+                      <a:rPr lang="en-US" altLang="ja-JP" b="0" i="1" smtClean="0">
+                        <a:latin typeface="Cambria Math" panose="02040503050406030204" pitchFamily="18" charset="0"/>
+                      </a:rPr>
+                      <m:t>𝑁</m:t>
+                    </m:r>
+                  </m:oMath>
+                </a14:m>
+                <a:r>
+                  <a:rPr lang="en-US" altLang="ja-JP" b="1" dirty="0"/>
+                  <a:t>” </a:t>
+                </a:r>
+                <a:r>
+                  <a:rPr lang="en-US" altLang="ja-JP" dirty="0"/>
+                  <a:t>and the </a:t>
+                </a:r>
+                <a:r>
+                  <a:rPr lang="en-US" altLang="ja-JP" b="1" dirty="0"/>
+                  <a:t>“time step </a:t>
+                </a:r>
+                <a14:m>
+                  <m:oMath xmlns:m="http://schemas.openxmlformats.org/officeDocument/2006/math">
+                    <m:r>
+                      <a:rPr lang="en-US" altLang="ja-JP" b="0" i="1" smtClean="0">
+                        <a:latin typeface="Cambria Math" panose="02040503050406030204" pitchFamily="18" charset="0"/>
+                      </a:rPr>
+                      <m:t>𝑡</m:t>
+                    </m:r>
+                  </m:oMath>
+                </a14:m>
+                <a:r>
+                  <a:rPr lang="en-US" altLang="ja-JP" b="1" dirty="0"/>
+                  <a:t> of the diffusion model”</a:t>
+                </a:r>
+              </a:p>
+              <a:p>
+                <a:pPr marL="514350" indent="-514350">
+                  <a:buFont typeface="+mj-lt"/>
+                  <a:buAutoNum type="arabicPeriod"/>
+                </a:pPr>
+                <a:r>
+                  <a:rPr lang="en-US" altLang="ja-JP" u="sng" dirty="0"/>
+                  <a:t>Adapter</a:t>
+                </a:r>
+                <a:r>
+                  <a:rPr lang="en-US" altLang="ja-JP" dirty="0"/>
+                  <a:t>: Neural network bridging the </a:t>
+                </a:r>
+                <a:r>
+                  <a:rPr lang="en-US" altLang="ja-JP" b="1" dirty="0"/>
+                  <a:t>domain gap </a:t>
+                </a:r>
+                <a:br>
+                  <a:rPr lang="en-US" altLang="ja-JP" dirty="0"/>
+                </a:br>
+                <a:r>
+                  <a:rPr lang="en-US" altLang="ja-JP" dirty="0"/>
+                  <a:t>	           </a:t>
+                </a:r>
+                <a:r>
+                  <a:rPr lang="en-US" altLang="ja-JP" sz="1200" dirty="0"/>
+                  <a:t> </a:t>
+                </a:r>
+                <a:r>
+                  <a:rPr lang="en-US" altLang="ja-JP" dirty="0"/>
+                  <a:t>between Gaussian noise in diffusion models and MC noise</a:t>
+                </a:r>
+                <a:endParaRPr kumimoji="1" lang="ja-JP" altLang="en-US" dirty="0"/>
+              </a:p>
+            </p:txBody>
+          </p:sp>
+        </mc:Choice>
+        <mc:Fallback>
+          <p:sp>
+            <p:nvSpPr>
+              <p:cNvPr id="3" name="コンテンツ プレースホルダー 2">
+                <a:extLst>
+                  <a:ext uri="{FF2B5EF4-FFF2-40B4-BE49-F238E27FC236}">
+                    <a16:creationId xmlns:a16="http://schemas.microsoft.com/office/drawing/2014/main" id="{494E1B60-098B-032E-452F-D828730F5DD6}"/>
+                  </a:ext>
+                </a:extLst>
+              </p:cNvPr>
+              <p:cNvSpPr>
+                <a:spLocks noGrp="1" noRot="1" noChangeAspect="1" noMove="1" noResize="1" noEditPoints="1" noAdjustHandles="1" noChangeArrowheads="1" noChangeShapeType="1" noTextEdit="1"/>
+              </p:cNvSpPr>
+              <p:nvPr>
+                <p:ph idx="1"/>
+              </p:nvPr>
+            </p:nvSpPr>
+            <p:spPr>
+              <a:xfrm>
+                <a:off x="214544" y="4317477"/>
+                <a:ext cx="11977456" cy="2292874"/>
+              </a:xfrm>
+              <a:blipFill>
+                <a:blip r:embed="rId2"/>
+                <a:stretch>
+                  <a:fillRect l="-916" t="-5585" b="-5585"/>
+                </a:stretch>
+              </a:blipFill>
+            </p:spPr>
+            <p:txBody>
+              <a:bodyPr/>
+              <a:lstStyle/>
+              <a:p>
+                <a:r>
+                  <a:rPr lang="ja-JP" altLang="en-US">
+                    <a:noFill/>
+                  </a:rPr>
+                  <a:t> </a:t>
+                </a:r>
+              </a:p>
+            </p:txBody>
+          </p:sp>
+        </mc:Fallback>
+      </mc:AlternateContent>
+      <p:sp>
+        <p:nvSpPr>
+          <p:cNvPr id="4" name="スライド番号プレースホルダー 3">
+            <a:extLst>
+              <a:ext uri="{FF2B5EF4-FFF2-40B4-BE49-F238E27FC236}">
+                <a16:creationId xmlns:a16="http://schemas.microsoft.com/office/drawing/2014/main" id="{F9AF982C-63E5-8ABF-39A7-C789DEB65A64}"/>
+              </a:ext>
+            </a:extLst>
+          </p:cNvPr>
+          <p:cNvSpPr>
+            <a:spLocks noGrp="1"/>
+          </p:cNvSpPr>
+          <p:nvPr>
+            <p:ph type="sldNum" sz="quarter" idx="12"/>
+          </p:nvPr>
+        </p:nvSpPr>
+        <p:spPr/>
+        <p:txBody>
+          <a:bodyPr/>
+          <a:lstStyle/>
+          <a:p>
+            <a:fld id="{05A07A33-D779-4A79-A49C-E26576C728D8}" type="slidenum">
+              <a:rPr lang="ja-JP" altLang="en-US" smtClean="0"/>
+              <a:pPr/>
+              <a:t>4</a:t>
+            </a:fld>
+            <a:endParaRPr lang="ja-JP" altLang="en-US" dirty="0">
+              <a:latin typeface="Calibri" panose="020F0502020204030204" pitchFamily="34" charset="0"/>
+              <a:cs typeface="Calibri" panose="020F0502020204030204" pitchFamily="34" charset="0"/>
+            </a:endParaRPr>
+          </a:p>
+        </p:txBody>
+      </p:sp>
+      <p:pic>
+        <p:nvPicPr>
+          <p:cNvPr id="6" name="図 5">
+            <a:extLst>
+              <a:ext uri="{FF2B5EF4-FFF2-40B4-BE49-F238E27FC236}">
+                <a16:creationId xmlns:a16="http://schemas.microsoft.com/office/drawing/2014/main" id="{34B5ED4D-D804-CD0C-C715-417D0C9977EB}"/>
+              </a:ext>
+            </a:extLst>
+          </p:cNvPr>
+          <p:cNvPicPr>
+            <a:picLocks noChangeAspect="1"/>
+          </p:cNvPicPr>
+          <p:nvPr/>
+        </p:nvPicPr>
+        <p:blipFill>
+          <a:blip r:embed="rId3"/>
+          <a:stretch>
+            <a:fillRect/>
+          </a:stretch>
+        </p:blipFill>
+        <p:spPr>
+          <a:xfrm>
+            <a:off x="2675139" y="1198596"/>
+            <a:ext cx="6841721" cy="3073224"/>
+          </a:xfrm>
+          <a:prstGeom prst="rect">
+            <a:avLst/>
+          </a:prstGeom>
+        </p:spPr>
+      </p:pic>
+    </p:spTree>
+    <p:extLst>
+      <p:ext uri="{BB962C8B-B14F-4D97-AF65-F5344CB8AC3E}">
+        <p14:creationId xmlns:p14="http://schemas.microsoft.com/office/powerpoint/2010/main" val="517908483"/>
+      </p:ext>
+    </p:extLst>
+  </p:cSld>
+  <p:clrMapOvr>
+    <a:masterClrMapping/>
+  </p:clrMapOvr>
+</p:sld>
+</file>
+
+<file path=ppt/slides/slide5.xml><?xml version="1.0" encoding="utf-8"?>
+<p:sld xmlns:a="http://schemas.openxmlformats.org/drawingml/2006/main" xmlns:r="http://schemas.openxmlformats.org/officeDocument/2006/relationships" xmlns:p="http://schemas.openxmlformats.org/presentationml/2006/main">
+  <p:cSld>
+    <p:spTree>
+      <p:nvGrpSpPr>
+        <p:cNvPr id="1" name="">
+          <a:extLst>
+            <a:ext uri="{FF2B5EF4-FFF2-40B4-BE49-F238E27FC236}">
+              <a16:creationId xmlns:a16="http://schemas.microsoft.com/office/drawing/2014/main" id="{B75CE2EE-CCCE-9418-3E76-CA992CD4BB9E}"/>
+            </a:ext>
+          </a:extLst>
+        </p:cNvPr>
+        <p:cNvGrpSpPr/>
+        <p:nvPr/>
+      </p:nvGrpSpPr>
+      <p:grpSpPr>
+        <a:xfrm>
+          <a:off x="0" y="0"/>
+          <a:ext cx="0" cy="0"/>
+          <a:chOff x="0" y="0"/>
+          <a:chExt cx="0" cy="0"/>
+        </a:xfrm>
+      </p:grpSpPr>
+      <p:sp>
+        <p:nvSpPr>
+          <p:cNvPr id="2" name="タイトル 1">
+            <a:extLst>
+              <a:ext uri="{FF2B5EF4-FFF2-40B4-BE49-F238E27FC236}">
+                <a16:creationId xmlns:a16="http://schemas.microsoft.com/office/drawing/2014/main" id="{DACD4650-AE20-2C9D-9846-F82BC1D5624F}"/>
+              </a:ext>
+            </a:extLst>
+          </p:cNvPr>
+          <p:cNvSpPr>
+            <a:spLocks noGrp="1"/>
+          </p:cNvSpPr>
+          <p:nvPr>
+            <p:ph type="title"/>
+          </p:nvPr>
+        </p:nvSpPr>
+        <p:spPr/>
+        <p:txBody>
+          <a:bodyPr/>
+          <a:lstStyle/>
+          <a:p>
+            <a:r>
+              <a:rPr kumimoji="1" lang="en-US" altLang="ja-JP" dirty="0"/>
+              <a:t>Deriving MC-SDE (roughly)</a:t>
+            </a:r>
+            <a:endParaRPr kumimoji="1" lang="ja-JP" altLang="en-US" dirty="0"/>
+          </a:p>
+        </p:txBody>
+      </p:sp>
+      <mc:AlternateContent xmlns:mc="http://schemas.openxmlformats.org/markup-compatibility/2006">
+        <mc:Choice xmlns:a14="http://schemas.microsoft.com/office/drawing/2010/main" Requires="a14">
+          <p:sp>
+            <p:nvSpPr>
+              <p:cNvPr id="3" name="コンテンツ プレースホルダー 2">
+                <a:extLst>
+                  <a:ext uri="{FF2B5EF4-FFF2-40B4-BE49-F238E27FC236}">
+                    <a16:creationId xmlns:a16="http://schemas.microsoft.com/office/drawing/2014/main" id="{0977F3A6-8406-F7E4-06E5-62F49348E17F}"/>
+                  </a:ext>
+                </a:extLst>
+              </p:cNvPr>
+              <p:cNvSpPr>
+                <a:spLocks noGrp="1"/>
+              </p:cNvSpPr>
+              <p:nvPr>
+                <p:ph idx="1"/>
+              </p:nvPr>
+            </p:nvSpPr>
+            <p:spPr>
+              <a:xfrm>
+                <a:off x="164422" y="1355202"/>
+                <a:ext cx="11977456" cy="1340373"/>
+              </a:xfrm>
+            </p:spPr>
+            <p:txBody>
+              <a:bodyPr>
+                <a:normAutofit/>
+              </a:bodyPr>
+              <a:lstStyle/>
+              <a:p>
+                <a:pPr marL="0" indent="0">
+                  <a:buNone/>
+                </a:pPr>
+                <a:r>
+                  <a:rPr lang="en-US" altLang="ja-JP" u="sng" dirty="0"/>
+                  <a:t>1. Approximation using CLT:</a:t>
+                </a:r>
+              </a:p>
+              <a:p>
+                <a:pPr marL="0" indent="0">
+                  <a:buNone/>
+                </a:pPr>
+                <a:r>
+                  <a:rPr lang="en-US" altLang="ja-JP" sz="2400" dirty="0"/>
+                  <a:t>When considering MC integral </a:t>
+                </a:r>
+                <a14:m>
+                  <m:oMath xmlns:m="http://schemas.openxmlformats.org/officeDocument/2006/math">
+                    <m:sSub>
+                      <m:sSubPr>
+                        <m:ctrlPr>
+                          <a:rPr kumimoji="1" lang="en-US" altLang="ja-JP" sz="2400" b="0" i="1" smtClean="0">
+                            <a:latin typeface="Cambria Math" panose="02040503050406030204" pitchFamily="18" charset="0"/>
+                          </a:rPr>
+                        </m:ctrlPr>
+                      </m:sSubPr>
+                      <m:e>
+                        <m:r>
+                          <a:rPr kumimoji="1" lang="en-US" altLang="ja-JP" sz="2400" b="0" i="1" smtClean="0">
+                            <a:latin typeface="Cambria Math" panose="02040503050406030204" pitchFamily="18" charset="0"/>
+                          </a:rPr>
+                          <m:t>𝑋</m:t>
+                        </m:r>
+                      </m:e>
+                      <m:sub>
+                        <m:r>
+                          <a:rPr kumimoji="1" lang="en-US" altLang="ja-JP" sz="2400" b="0" i="1" smtClean="0">
+                            <a:latin typeface="Cambria Math" panose="02040503050406030204" pitchFamily="18" charset="0"/>
+                          </a:rPr>
+                          <m:t>𝑁</m:t>
+                        </m:r>
+                      </m:sub>
+                    </m:sSub>
+                    <m:r>
+                      <a:rPr kumimoji="1" lang="en-US" altLang="ja-JP" sz="2400" b="0" i="1" smtClean="0">
+                        <a:latin typeface="Cambria Math" panose="02040503050406030204" pitchFamily="18" charset="0"/>
+                      </a:rPr>
+                      <m:t>= </m:t>
+                    </m:r>
+                    <m:f>
+                      <m:fPr>
+                        <m:ctrlPr>
+                          <a:rPr kumimoji="1" lang="en-US" altLang="ja-JP" sz="2400" b="0" i="1" smtClean="0">
+                            <a:latin typeface="Cambria Math" panose="02040503050406030204" pitchFamily="18" charset="0"/>
+                          </a:rPr>
+                        </m:ctrlPr>
+                      </m:fPr>
+                      <m:num>
+                        <m:r>
+                          <a:rPr kumimoji="1" lang="en-US" altLang="ja-JP" sz="2400" b="0" i="1" smtClean="0">
+                            <a:latin typeface="Cambria Math" panose="02040503050406030204" pitchFamily="18" charset="0"/>
+                          </a:rPr>
+                          <m:t>1</m:t>
+                        </m:r>
+                      </m:num>
+                      <m:den>
+                        <m:r>
+                          <a:rPr kumimoji="1" lang="en-US" altLang="ja-JP" sz="2400" b="0" i="1" smtClean="0">
+                            <a:latin typeface="Cambria Math" panose="02040503050406030204" pitchFamily="18" charset="0"/>
+                          </a:rPr>
+                          <m:t>𝑁</m:t>
+                        </m:r>
+                      </m:den>
+                    </m:f>
+                    <m:nary>
+                      <m:naryPr>
+                        <m:chr m:val="∑"/>
+                        <m:ctrlPr>
+                          <a:rPr kumimoji="1" lang="en-US" altLang="ja-JP" sz="2400" b="0" i="1" smtClean="0">
+                            <a:latin typeface="Cambria Math" panose="02040503050406030204" pitchFamily="18" charset="0"/>
+                          </a:rPr>
+                        </m:ctrlPr>
+                      </m:naryPr>
+                      <m:sub>
+                        <m:r>
+                          <m:rPr>
+                            <m:brk m:alnAt="23"/>
+                          </m:rPr>
+                          <a:rPr kumimoji="1" lang="en-US" altLang="ja-JP" sz="2400" b="0" i="1" smtClean="0">
+                            <a:latin typeface="Cambria Math" panose="02040503050406030204" pitchFamily="18" charset="0"/>
+                          </a:rPr>
+                          <m:t>𝑖</m:t>
+                        </m:r>
+                        <m:r>
+                          <a:rPr kumimoji="1" lang="en-US" altLang="ja-JP" sz="2400" b="0" i="1" smtClean="0">
+                            <a:latin typeface="Cambria Math" panose="02040503050406030204" pitchFamily="18" charset="0"/>
+                          </a:rPr>
+                          <m:t>=1</m:t>
+                        </m:r>
+                      </m:sub>
+                      <m:sup>
+                        <m:r>
+                          <a:rPr kumimoji="1" lang="en-US" altLang="ja-JP" sz="2400" b="0" i="1" smtClean="0">
+                            <a:latin typeface="Cambria Math" panose="02040503050406030204" pitchFamily="18" charset="0"/>
+                          </a:rPr>
+                          <m:t>𝑁</m:t>
+                        </m:r>
+                      </m:sup>
+                      <m:e>
+                        <m:sSub>
+                          <m:sSubPr>
+                            <m:ctrlPr>
+                              <a:rPr kumimoji="1" lang="en-US" altLang="ja-JP" sz="2400" b="0" i="1" smtClean="0">
+                                <a:latin typeface="Cambria Math" panose="02040503050406030204" pitchFamily="18" charset="0"/>
+                              </a:rPr>
+                            </m:ctrlPr>
+                          </m:sSubPr>
+                          <m:e>
+                            <m:r>
+                              <a:rPr kumimoji="1" lang="en-US" altLang="ja-JP" sz="2400" b="0" i="1" smtClean="0">
+                                <a:latin typeface="Cambria Math" panose="02040503050406030204" pitchFamily="18" charset="0"/>
+                              </a:rPr>
+                              <m:t>𝐹</m:t>
+                            </m:r>
+                          </m:e>
+                          <m:sub>
+                            <m:r>
+                              <a:rPr kumimoji="1" lang="en-US" altLang="ja-JP" sz="2400" b="0" i="1" smtClean="0">
+                                <a:latin typeface="Cambria Math" panose="02040503050406030204" pitchFamily="18" charset="0"/>
+                              </a:rPr>
+                              <m:t>𝑖</m:t>
+                            </m:r>
+                          </m:sub>
+                        </m:sSub>
+                      </m:e>
+                    </m:nary>
+                  </m:oMath>
+                </a14:m>
+                <a:r>
+                  <a:rPr kumimoji="1" lang="en-US" altLang="ja-JP" sz="2400" dirty="0"/>
+                  <a:t>,  </a:t>
+                </a:r>
+                <a14:m>
+                  <m:oMath xmlns:m="http://schemas.openxmlformats.org/officeDocument/2006/math">
+                    <m:sSub>
+                      <m:sSubPr>
+                        <m:ctrlPr>
+                          <a:rPr kumimoji="1" lang="en-US" altLang="ja-JP" sz="2400" b="0" i="1" smtClean="0">
+                            <a:latin typeface="Cambria Math" panose="02040503050406030204" pitchFamily="18" charset="0"/>
+                          </a:rPr>
+                        </m:ctrlPr>
+                      </m:sSubPr>
+                      <m:e>
+                        <m:r>
+                          <a:rPr kumimoji="1" lang="en-US" altLang="ja-JP" sz="2400" b="0" i="1" smtClean="0">
+                            <a:latin typeface="Cambria Math" panose="02040503050406030204" pitchFamily="18" charset="0"/>
+                          </a:rPr>
+                          <m:t>𝑋</m:t>
+                        </m:r>
+                      </m:e>
+                      <m:sub>
+                        <m:r>
+                          <a:rPr kumimoji="1" lang="en-US" altLang="ja-JP" sz="2400" b="0" i="1" smtClean="0">
+                            <a:latin typeface="Cambria Math" panose="02040503050406030204" pitchFamily="18" charset="0"/>
+                          </a:rPr>
+                          <m:t>𝑁</m:t>
+                        </m:r>
+                      </m:sub>
+                    </m:sSub>
+                    <m:r>
+                      <a:rPr kumimoji="1" lang="en-US" altLang="ja-JP" sz="2400" b="0" i="1" smtClean="0">
+                        <a:latin typeface="Cambria Math" panose="02040503050406030204" pitchFamily="18" charset="0"/>
+                      </a:rPr>
+                      <m:t>∼</m:t>
+                    </m:r>
+                    <m:r>
+                      <a:rPr kumimoji="1" lang="en-US" altLang="ja-JP" sz="2400" b="0" i="1" smtClean="0">
+                        <a:latin typeface="Cambria Math" panose="02040503050406030204" pitchFamily="18" charset="0"/>
+                      </a:rPr>
+                      <m:t>𝜇</m:t>
+                    </m:r>
+                    <m:r>
+                      <a:rPr kumimoji="1" lang="en-US" altLang="ja-JP" sz="2400" b="0" i="1" smtClean="0">
+                        <a:latin typeface="Cambria Math" panose="02040503050406030204" pitchFamily="18" charset="0"/>
+                      </a:rPr>
+                      <m:t>+ </m:t>
+                    </m:r>
+                    <m:f>
+                      <m:fPr>
+                        <m:ctrlPr>
+                          <a:rPr kumimoji="1" lang="en-US" altLang="ja-JP" sz="2400" b="0" i="1" smtClean="0">
+                            <a:latin typeface="Cambria Math" panose="02040503050406030204" pitchFamily="18" charset="0"/>
+                          </a:rPr>
+                        </m:ctrlPr>
+                      </m:fPr>
+                      <m:num>
+                        <m:r>
+                          <a:rPr kumimoji="1" lang="en-US" altLang="ja-JP" sz="2400" b="0" i="1" smtClean="0">
+                            <a:latin typeface="Cambria Math" panose="02040503050406030204" pitchFamily="18" charset="0"/>
+                          </a:rPr>
+                          <m:t>𝜎</m:t>
+                        </m:r>
+                      </m:num>
+                      <m:den>
+                        <m:rad>
+                          <m:radPr>
+                            <m:degHide m:val="on"/>
+                            <m:ctrlPr>
+                              <a:rPr kumimoji="1" lang="en-US" altLang="ja-JP" sz="2400" b="0" i="1" smtClean="0">
+                                <a:latin typeface="Cambria Math" panose="02040503050406030204" pitchFamily="18" charset="0"/>
+                              </a:rPr>
+                            </m:ctrlPr>
+                          </m:radPr>
+                          <m:deg/>
+                          <m:e>
+                            <m:r>
+                              <a:rPr kumimoji="1" lang="en-US" altLang="ja-JP" sz="2400" b="0" i="1" smtClean="0">
+                                <a:latin typeface="Cambria Math" panose="02040503050406030204" pitchFamily="18" charset="0"/>
+                              </a:rPr>
+                              <m:t>𝑁</m:t>
+                            </m:r>
+                          </m:e>
+                        </m:rad>
+                      </m:den>
+                    </m:f>
+                    <m:r>
+                      <a:rPr kumimoji="1" lang="en-US" altLang="ja-JP" sz="2400" b="0" i="1" smtClean="0">
+                        <a:latin typeface="Cambria Math" panose="02040503050406030204" pitchFamily="18" charset="0"/>
+                      </a:rPr>
+                      <m:t>𝜉</m:t>
+                    </m:r>
+                    <m:r>
+                      <a:rPr kumimoji="1" lang="en-US" altLang="ja-JP" sz="2400" b="0" i="1" smtClean="0">
+                        <a:latin typeface="Cambria Math" panose="02040503050406030204" pitchFamily="18" charset="0"/>
+                      </a:rPr>
+                      <m:t>,  </m:t>
+                    </m:r>
+                    <m:r>
+                      <a:rPr kumimoji="1" lang="en-US" altLang="ja-JP" sz="2400" b="0" i="1" smtClean="0">
+                        <a:latin typeface="Cambria Math" panose="02040503050406030204" pitchFamily="18" charset="0"/>
+                      </a:rPr>
+                      <m:t>𝜉</m:t>
+                    </m:r>
+                    <m:r>
+                      <a:rPr kumimoji="1" lang="en-US" altLang="ja-JP" sz="2400" b="0" i="1" smtClean="0">
+                        <a:latin typeface="Cambria Math" panose="02040503050406030204" pitchFamily="18" charset="0"/>
+                      </a:rPr>
+                      <m:t>∼ </m:t>
+                    </m:r>
+                    <m:r>
+                      <a:rPr kumimoji="1" lang="en-US" altLang="ja-JP" sz="2400" b="0" i="1" smtClean="0">
+                        <a:latin typeface="Cambria Math" panose="02040503050406030204" pitchFamily="18" charset="0"/>
+                      </a:rPr>
+                      <m:t>𝒩</m:t>
+                    </m:r>
+                    <m:r>
+                      <a:rPr kumimoji="1" lang="en-US" altLang="ja-JP" sz="2400" b="0" i="1" smtClean="0">
+                        <a:latin typeface="Cambria Math" panose="02040503050406030204" pitchFamily="18" charset="0"/>
+                      </a:rPr>
+                      <m:t>(0, 1)</m:t>
+                    </m:r>
+                  </m:oMath>
+                </a14:m>
+                <a:r>
+                  <a:rPr kumimoji="1" lang="ja-JP" altLang="en-US" sz="2400" dirty="0"/>
+                  <a:t> </a:t>
+                </a:r>
+                <a:r>
+                  <a:rPr kumimoji="1" lang="en-US" altLang="ja-JP" sz="2400" dirty="0"/>
+                  <a:t>based on CLT</a:t>
+                </a:r>
+                <a:endParaRPr kumimoji="1" lang="ja-JP" altLang="en-US" sz="2400" dirty="0"/>
+              </a:p>
+            </p:txBody>
+          </p:sp>
+        </mc:Choice>
+        <mc:Fallback>
+          <p:sp>
+            <p:nvSpPr>
+              <p:cNvPr id="3" name="コンテンツ プレースホルダー 2">
+                <a:extLst>
+                  <a:ext uri="{FF2B5EF4-FFF2-40B4-BE49-F238E27FC236}">
+                    <a16:creationId xmlns:a16="http://schemas.microsoft.com/office/drawing/2014/main" id="{0977F3A6-8406-F7E4-06E5-62F49348E17F}"/>
+                  </a:ext>
+                </a:extLst>
+              </p:cNvPr>
+              <p:cNvSpPr>
+                <a:spLocks noGrp="1" noRot="1" noChangeAspect="1" noMove="1" noResize="1" noEditPoints="1" noAdjustHandles="1" noChangeArrowheads="1" noChangeShapeType="1" noTextEdit="1"/>
+              </p:cNvSpPr>
+              <p:nvPr>
+                <p:ph idx="1"/>
+              </p:nvPr>
+            </p:nvSpPr>
+            <p:spPr>
+              <a:xfrm>
+                <a:off x="164422" y="1355202"/>
+                <a:ext cx="11977456" cy="1340373"/>
+              </a:xfrm>
+              <a:blipFill>
+                <a:blip r:embed="rId3"/>
+                <a:stretch>
+                  <a:fillRect l="-1069" t="-7273"/>
+                </a:stretch>
+              </a:blipFill>
+            </p:spPr>
+            <p:txBody>
+              <a:bodyPr/>
+              <a:lstStyle/>
+              <a:p>
+                <a:r>
+                  <a:rPr lang="ja-JP" altLang="en-US">
+                    <a:noFill/>
+                  </a:rPr>
+                  <a:t> </a:t>
+                </a:r>
+              </a:p>
+            </p:txBody>
+          </p:sp>
+        </mc:Fallback>
+      </mc:AlternateContent>
+      <p:sp>
+        <p:nvSpPr>
+          <p:cNvPr id="4" name="スライド番号プレースホルダー 3">
+            <a:extLst>
+              <a:ext uri="{FF2B5EF4-FFF2-40B4-BE49-F238E27FC236}">
+                <a16:creationId xmlns:a16="http://schemas.microsoft.com/office/drawing/2014/main" id="{86E2088B-1228-9F04-D9FC-4368CD2CDAA6}"/>
+              </a:ext>
+            </a:extLst>
+          </p:cNvPr>
+          <p:cNvSpPr>
+            <a:spLocks noGrp="1"/>
+          </p:cNvSpPr>
+          <p:nvPr>
+            <p:ph type="sldNum" sz="quarter" idx="12"/>
+          </p:nvPr>
+        </p:nvSpPr>
+        <p:spPr/>
+        <p:txBody>
+          <a:bodyPr/>
+          <a:lstStyle/>
+          <a:p>
+            <a:fld id="{05A07A33-D779-4A79-A49C-E26576C728D8}" type="slidenum">
+              <a:rPr lang="ja-JP" altLang="en-US" smtClean="0"/>
+              <a:pPr/>
+              <a:t>5</a:t>
+            </a:fld>
+            <a:endParaRPr lang="ja-JP" altLang="en-US" dirty="0">
+              <a:latin typeface="Calibri" panose="020F0502020204030204" pitchFamily="34" charset="0"/>
+              <a:cs typeface="Calibri" panose="020F0502020204030204" pitchFamily="34" charset="0"/>
+            </a:endParaRPr>
+          </a:p>
+        </p:txBody>
+      </p:sp>
+      <mc:AlternateContent xmlns:mc="http://schemas.openxmlformats.org/markup-compatibility/2006">
+        <mc:Choice xmlns:a14="http://schemas.microsoft.com/office/drawing/2010/main" Requires="a14">
+          <p:sp>
+            <p:nvSpPr>
+              <p:cNvPr id="5" name="コンテンツ プレースホルダー 2">
+                <a:extLst>
+                  <a:ext uri="{FF2B5EF4-FFF2-40B4-BE49-F238E27FC236}">
+                    <a16:creationId xmlns:a16="http://schemas.microsoft.com/office/drawing/2014/main" id="{BC8BBC91-D53C-64AB-7DC9-C7E64944B47A}"/>
+                  </a:ext>
+                </a:extLst>
+              </p:cNvPr>
+              <p:cNvSpPr txBox="1">
+                <a:spLocks/>
+              </p:cNvSpPr>
+              <p:nvPr/>
+            </p:nvSpPr>
+            <p:spPr>
+              <a:xfrm>
+                <a:off x="164422" y="2511163"/>
+                <a:ext cx="11977456" cy="2169309"/>
+              </a:xfrm>
+              <a:prstGeom prst="rect">
+                <a:avLst/>
+              </a:prstGeom>
+            </p:spPr>
+            <p:txBody>
+              <a:bodyPr vert="horz" lIns="91440" tIns="45720" rIns="91440" bIns="45720" rtlCol="0">
+                <a:normAutofit/>
+              </a:bodyPr>
+              <a:lstStyle>
+                <a:lvl1pPr marL="228600" indent="-228600" algn="l" defTabSz="914400" rtl="0" eaLnBrk="1" latinLnBrk="0" hangingPunct="1">
+                  <a:lnSpc>
+                    <a:spcPct val="90000"/>
+                  </a:lnSpc>
+                  <a:spcBef>
+                    <a:spcPts val="1000"/>
+                  </a:spcBef>
+                  <a:buFont typeface="Arial" panose="020B0604020202020204" pitchFamily="34" charset="0"/>
+                  <a:buChar char="•"/>
+                  <a:defRPr kumimoji="1" sz="2800" kern="1200">
+                    <a:solidFill>
+                      <a:schemeClr val="tx1"/>
+                    </a:solidFill>
+                    <a:latin typeface="Calibri" panose="020F0502020204030204" pitchFamily="34" charset="0"/>
+                    <a:ea typeface="+mn-ea"/>
+                    <a:cs typeface="Calibri" panose="020F0502020204030204" pitchFamily="34" charset="0"/>
+                  </a:defRPr>
+                </a:lvl1pPr>
+                <a:lvl2pPr marL="685800" indent="-228600" algn="l" defTabSz="914400" rtl="0" eaLnBrk="1" latinLnBrk="0" hangingPunct="1">
+                  <a:lnSpc>
+                    <a:spcPct val="90000"/>
+                  </a:lnSpc>
+                  <a:spcBef>
+                    <a:spcPts val="500"/>
+                  </a:spcBef>
+                  <a:buFont typeface="Arial" panose="020B0604020202020204" pitchFamily="34" charset="0"/>
+                  <a:buChar char="•"/>
+                  <a:defRPr kumimoji="1" sz="2400" kern="1200">
+                    <a:solidFill>
+                      <a:schemeClr val="tx1"/>
+                    </a:solidFill>
+                    <a:latin typeface="Calibri" panose="020F0502020204030204" pitchFamily="34" charset="0"/>
+                    <a:ea typeface="+mn-ea"/>
+                    <a:cs typeface="Calibri" panose="020F0502020204030204" pitchFamily="34" charset="0"/>
+                  </a:defRPr>
+                </a:lvl2pPr>
+                <a:lvl3pPr marL="1143000" indent="-228600" algn="l" defTabSz="914400" rtl="0" eaLnBrk="1" latinLnBrk="0" hangingPunct="1">
+                  <a:lnSpc>
+                    <a:spcPct val="90000"/>
+                  </a:lnSpc>
+                  <a:spcBef>
+                    <a:spcPts val="500"/>
+                  </a:spcBef>
+                  <a:buFont typeface="Arial" panose="020B0604020202020204" pitchFamily="34" charset="0"/>
+                  <a:buChar char="•"/>
+                  <a:defRPr kumimoji="1" sz="2000" kern="1200">
+                    <a:solidFill>
+                      <a:schemeClr val="tx1"/>
+                    </a:solidFill>
+                    <a:latin typeface="Calibri" panose="020F0502020204030204" pitchFamily="34" charset="0"/>
+                    <a:ea typeface="+mn-ea"/>
+                    <a:cs typeface="Calibri" panose="020F0502020204030204" pitchFamily="34" charset="0"/>
+                  </a:defRPr>
+                </a:lvl3pPr>
+                <a:lvl4pPr marL="1600200" indent="-228600" algn="l" defTabSz="914400" rtl="0" eaLnBrk="1" latinLnBrk="0" hangingPunct="1">
+                  <a:lnSpc>
+                    <a:spcPct val="90000"/>
+                  </a:lnSpc>
+                  <a:spcBef>
+                    <a:spcPts val="500"/>
+                  </a:spcBef>
+                  <a:buFont typeface="Arial" panose="020B0604020202020204" pitchFamily="34" charset="0"/>
+                  <a:buChar char="•"/>
+                  <a:defRPr kumimoji="1" sz="1800" kern="1200">
+                    <a:solidFill>
+                      <a:schemeClr val="tx1"/>
+                    </a:solidFill>
+                    <a:latin typeface="Calibri" panose="020F0502020204030204" pitchFamily="34" charset="0"/>
+                    <a:ea typeface="+mn-ea"/>
+                    <a:cs typeface="Calibri" panose="020F0502020204030204" pitchFamily="34" charset="0"/>
+                  </a:defRPr>
+                </a:lvl4pPr>
+                <a:lvl5pPr marL="2057400" indent="-228600" algn="l" defTabSz="914400" rtl="0" eaLnBrk="1" latinLnBrk="0" hangingPunct="1">
+                  <a:lnSpc>
+                    <a:spcPct val="90000"/>
+                  </a:lnSpc>
+                  <a:spcBef>
+                    <a:spcPts val="500"/>
+                  </a:spcBef>
+                  <a:buFont typeface="Arial" panose="020B0604020202020204" pitchFamily="34" charset="0"/>
+                  <a:buChar char="•"/>
+                  <a:defRPr kumimoji="1" sz="1800" kern="1200">
+                    <a:solidFill>
+                      <a:schemeClr val="tx1"/>
+                    </a:solidFill>
+                    <a:latin typeface="Calibri" panose="020F0502020204030204" pitchFamily="34" charset="0"/>
+                    <a:ea typeface="+mn-ea"/>
+                    <a:cs typeface="Calibri" panose="020F0502020204030204" pitchFamily="34" charset="0"/>
+                  </a:defRPr>
+                </a:lvl5pPr>
+                <a:lvl6pPr marL="2514600" indent="-228600" algn="l" defTabSz="914400" rtl="0" eaLnBrk="1" latinLnBrk="0" hangingPunct="1">
+                  <a:lnSpc>
+                    <a:spcPct val="90000"/>
+                  </a:lnSpc>
+                  <a:spcBef>
+                    <a:spcPts val="500"/>
+                  </a:spcBef>
+                  <a:buFont typeface="Arial" panose="020B0604020202020204" pitchFamily="34" charset="0"/>
+                  <a:buChar char="•"/>
+                  <a:defRPr kumimoji="1" sz="1800" kern="1200">
+                    <a:solidFill>
+                      <a:schemeClr val="tx1"/>
+                    </a:solidFill>
+                    <a:latin typeface="+mn-lt"/>
+                    <a:ea typeface="+mn-ea"/>
+                    <a:cs typeface="+mn-cs"/>
+                  </a:defRPr>
+                </a:lvl6pPr>
+                <a:lvl7pPr marL="2971800" indent="-228600" algn="l" defTabSz="914400" rtl="0" eaLnBrk="1" latinLnBrk="0" hangingPunct="1">
+                  <a:lnSpc>
+                    <a:spcPct val="90000"/>
+                  </a:lnSpc>
+                  <a:spcBef>
+                    <a:spcPts val="500"/>
+                  </a:spcBef>
+                  <a:buFont typeface="Arial" panose="020B0604020202020204" pitchFamily="34" charset="0"/>
+                  <a:buChar char="•"/>
+                  <a:defRPr kumimoji="1" sz="1800" kern="1200">
+                    <a:solidFill>
+                      <a:schemeClr val="tx1"/>
+                    </a:solidFill>
+                    <a:latin typeface="+mn-lt"/>
+                    <a:ea typeface="+mn-ea"/>
+                    <a:cs typeface="+mn-cs"/>
+                  </a:defRPr>
+                </a:lvl7pPr>
+                <a:lvl8pPr marL="3429000" indent="-228600" algn="l" defTabSz="914400" rtl="0" eaLnBrk="1" latinLnBrk="0" hangingPunct="1">
+                  <a:lnSpc>
+                    <a:spcPct val="90000"/>
+                  </a:lnSpc>
+                  <a:spcBef>
+                    <a:spcPts val="500"/>
+                  </a:spcBef>
+                  <a:buFont typeface="Arial" panose="020B0604020202020204" pitchFamily="34" charset="0"/>
+                  <a:buChar char="•"/>
+                  <a:defRPr kumimoji="1" sz="1800" kern="1200">
+                    <a:solidFill>
+                      <a:schemeClr val="tx1"/>
+                    </a:solidFill>
+                    <a:latin typeface="+mn-lt"/>
+                    <a:ea typeface="+mn-ea"/>
+                    <a:cs typeface="+mn-cs"/>
+                  </a:defRPr>
+                </a:lvl8pPr>
+                <a:lvl9pPr marL="3886200" indent="-228600" algn="l" defTabSz="914400" rtl="0" eaLnBrk="1" latinLnBrk="0" hangingPunct="1">
+                  <a:lnSpc>
+                    <a:spcPct val="90000"/>
+                  </a:lnSpc>
+                  <a:spcBef>
+                    <a:spcPts val="500"/>
+                  </a:spcBef>
+                  <a:buFont typeface="Arial" panose="020B0604020202020204" pitchFamily="34" charset="0"/>
+                  <a:buChar char="•"/>
+                  <a:defRPr kumimoji="1" sz="1800" kern="1200">
+                    <a:solidFill>
+                      <a:schemeClr val="tx1"/>
+                    </a:solidFill>
+                    <a:latin typeface="+mn-lt"/>
+                    <a:ea typeface="+mn-ea"/>
+                    <a:cs typeface="+mn-cs"/>
+                  </a:defRPr>
+                </a:lvl9pPr>
+              </a:lstStyle>
+              <a:p>
+                <a:pPr marL="0" indent="0">
+                  <a:buNone/>
+                </a:pPr>
+                <a:r>
+                  <a:rPr lang="en-US" altLang="ja-JP" u="sng" dirty="0"/>
+                  <a:t>2. Mapping to the continuous time variable </a:t>
+                </a:r>
+                <a14:m>
+                  <m:oMath xmlns:m="http://schemas.openxmlformats.org/officeDocument/2006/math">
+                    <m:r>
+                      <m:rPr>
+                        <m:sty m:val="p"/>
+                      </m:rPr>
+                      <a:rPr lang="en-US" altLang="ja-JP" b="0" i="1" u="sng" smtClean="0">
+                        <a:latin typeface="Cambria Math" panose="02040503050406030204" pitchFamily="18" charset="0"/>
+                      </a:rPr>
+                      <m:t>τ</m:t>
+                    </m:r>
+                  </m:oMath>
+                </a14:m>
+                <a:r>
+                  <a:rPr lang="en-US" altLang="ja-JP" u="sng" dirty="0"/>
+                  <a:t>:</a:t>
+                </a:r>
+              </a:p>
+              <a:p>
+                <a:pPr marL="0" indent="0">
+                  <a:buNone/>
+                </a:pPr>
+                <a:r>
+                  <a:rPr lang="en-US" altLang="ja-JP" sz="2400" dirty="0"/>
+                  <a:t>Define the mapping of continuous time </a:t>
+                </a:r>
+                <a14:m>
+                  <m:oMath xmlns:m="http://schemas.openxmlformats.org/officeDocument/2006/math">
+                    <m:r>
+                      <m:rPr>
+                        <m:sty m:val="p"/>
+                      </m:rPr>
+                      <a:rPr lang="en-US" altLang="ja-JP" sz="2400" b="0" i="1" smtClean="0">
+                        <a:latin typeface="Cambria Math" panose="02040503050406030204" pitchFamily="18" charset="0"/>
+                      </a:rPr>
+                      <m:t>τ</m:t>
+                    </m:r>
+                  </m:oMath>
+                </a14:m>
+                <a:r>
+                  <a:rPr lang="en-US" altLang="ja-JP" sz="2400" dirty="0"/>
+                  <a:t> and sample count </a:t>
+                </a:r>
+                <a14:m>
+                  <m:oMath xmlns:m="http://schemas.openxmlformats.org/officeDocument/2006/math">
+                    <m:r>
+                      <m:rPr>
+                        <m:sty m:val="p"/>
+                      </m:rPr>
+                      <a:rPr lang="en-US" altLang="ja-JP" sz="2400" b="0" i="1" smtClean="0">
+                        <a:latin typeface="Cambria Math" panose="02040503050406030204" pitchFamily="18" charset="0"/>
+                      </a:rPr>
+                      <m:t>N</m:t>
+                    </m:r>
+                  </m:oMath>
+                </a14:m>
+                <a:r>
+                  <a:rPr lang="en-US" altLang="ja-JP" sz="2400" dirty="0"/>
+                  <a:t> as:</a:t>
+                </a:r>
+              </a:p>
+              <a:p>
+                <a:pPr marL="0" indent="0">
+                  <a:buNone/>
+                </a:pPr>
+                <a14:m>
+                  <m:oMathPara xmlns:m="http://schemas.openxmlformats.org/officeDocument/2006/math">
+                    <m:oMathParaPr>
+                      <m:jc m:val="centerGroup"/>
+                    </m:oMathParaPr>
+                    <m:oMath xmlns:m="http://schemas.openxmlformats.org/officeDocument/2006/math">
+                      <m:r>
+                        <m:rPr>
+                          <m:sty m:val="p"/>
+                        </m:rPr>
+                        <a:rPr lang="en-US" altLang="ja-JP" sz="2400" b="0" i="1" smtClean="0">
+                          <a:latin typeface="Cambria Math" panose="02040503050406030204" pitchFamily="18" charset="0"/>
+                        </a:rPr>
+                        <m:t>N</m:t>
+                      </m:r>
+                      <m:r>
+                        <a:rPr lang="en-US" altLang="ja-JP" sz="2400" b="0" i="1" smtClean="0">
+                          <a:latin typeface="Cambria Math" panose="02040503050406030204" pitchFamily="18" charset="0"/>
+                        </a:rPr>
+                        <m:t>(</m:t>
+                      </m:r>
+                      <m:r>
+                        <m:rPr>
+                          <m:sty m:val="p"/>
+                        </m:rPr>
+                        <a:rPr lang="en-US" altLang="ja-JP" sz="2400" b="0" i="1" smtClean="0">
+                          <a:latin typeface="Cambria Math" panose="02040503050406030204" pitchFamily="18" charset="0"/>
+                        </a:rPr>
+                        <m:t>τ</m:t>
+                      </m:r>
+                      <m:r>
+                        <a:rPr lang="en-US" altLang="ja-JP" sz="2400" b="0" i="1" smtClean="0">
+                          <a:latin typeface="Cambria Math" panose="02040503050406030204" pitchFamily="18" charset="0"/>
+                        </a:rPr>
+                        <m:t>) = </m:t>
+                      </m:r>
+                      <m:sSup>
+                        <m:sSupPr>
+                          <m:ctrlPr>
+                            <a:rPr lang="en-US" altLang="ja-JP" sz="2400" b="0" i="1" smtClean="0">
+                              <a:latin typeface="Cambria Math" panose="02040503050406030204" pitchFamily="18" charset="0"/>
+                            </a:rPr>
+                          </m:ctrlPr>
+                        </m:sSupPr>
+                        <m:e>
+                          <m:r>
+                            <a:rPr lang="en-US" altLang="ja-JP" sz="2400" b="0" i="1" smtClean="0">
+                              <a:latin typeface="Cambria Math" panose="02040503050406030204" pitchFamily="18" charset="0"/>
+                            </a:rPr>
+                            <m:t>𝜏</m:t>
+                          </m:r>
+                        </m:e>
+                        <m:sup>
+                          <m:r>
+                            <a:rPr lang="en-US" altLang="ja-JP" sz="2400" b="0" i="1" smtClean="0">
+                              <a:latin typeface="Cambria Math" panose="02040503050406030204" pitchFamily="18" charset="0"/>
+                            </a:rPr>
+                            <m:t>−2</m:t>
+                          </m:r>
+                        </m:sup>
+                      </m:sSup>
+                      <m:r>
+                        <a:rPr lang="en-US" altLang="ja-JP" sz="2400" b="0" i="0" smtClean="0">
+                          <a:latin typeface="Cambria Math" panose="02040503050406030204" pitchFamily="18" charset="0"/>
+                        </a:rPr>
+                        <m:t>, </m:t>
+                      </m:r>
+                      <m:r>
+                        <m:rPr>
+                          <m:sty m:val="p"/>
+                        </m:rPr>
+                        <a:rPr lang="en-US" altLang="ja-JP" sz="2400" b="0" i="1" smtClean="0">
+                          <a:latin typeface="Cambria Math" panose="02040503050406030204" pitchFamily="18" charset="0"/>
+                        </a:rPr>
+                        <m:t>τ</m:t>
+                      </m:r>
+                      <m:r>
+                        <a:rPr lang="en-US" altLang="ja-JP" sz="2400" b="0" i="1" smtClean="0">
+                          <a:latin typeface="Cambria Math" panose="02040503050406030204" pitchFamily="18" charset="0"/>
+                        </a:rPr>
+                        <m:t> &gt; 0</m:t>
+                      </m:r>
+                    </m:oMath>
+                  </m:oMathPara>
+                </a14:m>
+                <a:endParaRPr lang="en-US" altLang="ja-JP" sz="2400" dirty="0"/>
+              </a:p>
+              <a:p>
+                <a:pPr marL="0" indent="0">
+                  <a:buNone/>
+                </a:pPr>
+                <a:r>
+                  <a:rPr lang="en-US" altLang="ja-JP" sz="2400" dirty="0"/>
+                  <a:t>The update of the estimator </a:t>
+                </a:r>
+                <a14:m>
+                  <m:oMath xmlns:m="http://schemas.openxmlformats.org/officeDocument/2006/math">
+                    <m:r>
+                      <a:rPr lang="en-US" altLang="ja-JP" sz="2400" b="0" i="1" smtClean="0">
+                        <a:latin typeface="Cambria Math" panose="02040503050406030204" pitchFamily="18" charset="0"/>
+                      </a:rPr>
+                      <m:t>𝑋</m:t>
+                    </m:r>
+                  </m:oMath>
+                </a14:m>
+                <a:r>
+                  <a:rPr lang="en-US" altLang="ja-JP" sz="2400" dirty="0"/>
+                  <a:t> by the change from time </a:t>
+                </a:r>
+                <a14:m>
+                  <m:oMath xmlns:m="http://schemas.openxmlformats.org/officeDocument/2006/math">
+                    <m:r>
+                      <m:rPr>
+                        <m:sty m:val="p"/>
+                      </m:rPr>
+                      <a:rPr lang="en-US" altLang="ja-JP" sz="2400" b="0" i="1" smtClean="0">
+                        <a:latin typeface="Cambria Math" panose="02040503050406030204" pitchFamily="18" charset="0"/>
+                      </a:rPr>
+                      <m:t>τ</m:t>
+                    </m:r>
+                  </m:oMath>
+                </a14:m>
+                <a:r>
+                  <a:rPr lang="en-US" altLang="ja-JP" sz="2400" dirty="0"/>
+                  <a:t> to </a:t>
+                </a:r>
+                <a14:m>
+                  <m:oMath xmlns:m="http://schemas.openxmlformats.org/officeDocument/2006/math">
+                    <m:r>
+                      <m:rPr>
+                        <m:sty m:val="p"/>
+                      </m:rPr>
+                      <a:rPr lang="en-US" altLang="ja-JP" sz="2400" b="0" i="1" smtClean="0">
+                        <a:latin typeface="Cambria Math" panose="02040503050406030204" pitchFamily="18" charset="0"/>
+                      </a:rPr>
+                      <m:t>τ</m:t>
+                    </m:r>
+                    <m:r>
+                      <a:rPr lang="en-US" altLang="ja-JP" sz="2400" b="0" i="1" smtClean="0">
+                        <a:latin typeface="Cambria Math" panose="02040503050406030204" pitchFamily="18" charset="0"/>
+                      </a:rPr>
+                      <m:t> + </m:t>
+                    </m:r>
+                    <m:r>
+                      <m:rPr>
+                        <m:sty m:val="p"/>
+                      </m:rPr>
+                      <a:rPr lang="en-US" altLang="ja-JP" sz="2400" b="0" i="1" smtClean="0">
+                        <a:latin typeface="Cambria Math" panose="02040503050406030204" pitchFamily="18" charset="0"/>
+                      </a:rPr>
+                      <m:t>Δτ</m:t>
+                    </m:r>
+                  </m:oMath>
+                </a14:m>
+                <a:r>
+                  <a:rPr lang="en-US" altLang="ja-JP" sz="2400" dirty="0"/>
+                  <a:t> (adding samples) is: </a:t>
+                </a:r>
+              </a:p>
+              <a:p>
+                <a:pPr marL="0" indent="0">
+                  <a:buNone/>
+                </a:pPr>
+                <a14:m>
+                  <m:oMathPara xmlns:m="http://schemas.openxmlformats.org/officeDocument/2006/math">
+                    <m:oMathParaPr>
+                      <m:jc m:val="centerGroup"/>
+                    </m:oMathParaPr>
+                    <m:oMath xmlns:m="http://schemas.openxmlformats.org/officeDocument/2006/math">
+                      <m:r>
+                        <m:rPr>
+                          <m:sty m:val="p"/>
+                        </m:rPr>
+                        <a:rPr lang="en-US" altLang="ja-JP" sz="2400" b="0" i="1" smtClean="0">
+                          <a:latin typeface="Cambria Math" panose="02040503050406030204" pitchFamily="18" charset="0"/>
+                        </a:rPr>
+                        <m:t>ΔY</m:t>
+                      </m:r>
+                      <m:r>
+                        <a:rPr lang="en-US" altLang="ja-JP" sz="2400" b="0" i="1" smtClean="0">
+                          <a:latin typeface="Cambria Math" panose="02040503050406030204" pitchFamily="18" charset="0"/>
+                        </a:rPr>
+                        <m:t>(</m:t>
+                      </m:r>
+                      <m:r>
+                        <m:rPr>
+                          <m:sty m:val="p"/>
+                        </m:rPr>
+                        <a:rPr lang="en-US" altLang="ja-JP" sz="2400" b="0" i="1" smtClean="0">
+                          <a:latin typeface="Cambria Math" panose="02040503050406030204" pitchFamily="18" charset="0"/>
+                        </a:rPr>
+                        <m:t>τ</m:t>
+                      </m:r>
+                      <m:r>
+                        <a:rPr lang="en-US" altLang="ja-JP" sz="2400" b="0" i="1" smtClean="0">
+                          <a:latin typeface="Cambria Math" panose="02040503050406030204" pitchFamily="18" charset="0"/>
+                        </a:rPr>
+                        <m:t>) = </m:t>
+                      </m:r>
+                      <m:sSub>
+                        <m:sSubPr>
+                          <m:ctrlPr>
+                            <a:rPr lang="en-US" altLang="ja-JP" sz="2400" b="0" i="1" smtClean="0">
+                              <a:latin typeface="Cambria Math" panose="02040503050406030204" pitchFamily="18" charset="0"/>
+                            </a:rPr>
+                          </m:ctrlPr>
+                        </m:sSubPr>
+                        <m:e>
+                          <m:r>
+                            <a:rPr lang="en-US" altLang="ja-JP" sz="2400" b="0" i="1" smtClean="0">
+                              <a:latin typeface="Cambria Math" panose="02040503050406030204" pitchFamily="18" charset="0"/>
+                            </a:rPr>
+                            <m:t>𝑋</m:t>
+                          </m:r>
+                        </m:e>
+                        <m:sub>
+                          <m:r>
+                            <a:rPr lang="en-US" altLang="ja-JP" sz="2400" b="0" i="1" smtClean="0">
+                              <a:latin typeface="Cambria Math" panose="02040503050406030204" pitchFamily="18" charset="0"/>
+                            </a:rPr>
+                            <m:t>𝑁</m:t>
+                          </m:r>
+                          <m:r>
+                            <a:rPr lang="en-US" altLang="ja-JP" sz="2400" b="0" i="1" smtClean="0">
+                              <a:latin typeface="Cambria Math" panose="02040503050406030204" pitchFamily="18" charset="0"/>
+                            </a:rPr>
+                            <m:t>+</m:t>
+                          </m:r>
+                          <m:r>
+                            <m:rPr>
+                              <m:sty m:val="p"/>
+                            </m:rPr>
+                            <a:rPr lang="en-US" altLang="ja-JP" sz="2400" b="0" i="0" smtClean="0">
+                              <a:latin typeface="Cambria Math" panose="02040503050406030204" pitchFamily="18" charset="0"/>
+                            </a:rPr>
+                            <m:t>Δ</m:t>
+                          </m:r>
+                          <m:r>
+                            <a:rPr lang="en-US" altLang="ja-JP" sz="2400" b="0" i="1" smtClean="0">
+                              <a:latin typeface="Cambria Math" panose="02040503050406030204" pitchFamily="18" charset="0"/>
+                            </a:rPr>
+                            <m:t>𝑁</m:t>
+                          </m:r>
+                        </m:sub>
+                      </m:sSub>
+                      <m:r>
+                        <a:rPr lang="en-US" altLang="ja-JP" sz="2400" b="0" i="0" smtClean="0">
+                          <a:latin typeface="Cambria Math" panose="02040503050406030204" pitchFamily="18" charset="0"/>
+                        </a:rPr>
+                        <m:t> - </m:t>
+                      </m:r>
+                      <m:sSub>
+                        <m:sSubPr>
+                          <m:ctrlPr>
+                            <a:rPr lang="en-US" altLang="ja-JP" sz="2400" b="0" i="0" smtClean="0">
+                              <a:latin typeface="Cambria Math" panose="02040503050406030204" pitchFamily="18" charset="0"/>
+                            </a:rPr>
+                          </m:ctrlPr>
+                        </m:sSubPr>
+                        <m:e>
+                          <m:r>
+                            <a:rPr lang="en-US" altLang="ja-JP" sz="2400" b="0" i="0" smtClean="0">
+                              <a:latin typeface="Cambria Math" panose="02040503050406030204" pitchFamily="18" charset="0"/>
+                            </a:rPr>
+                            <m:t>𝑋</m:t>
+                          </m:r>
+                        </m:e>
+                        <m:sub>
+                          <m:r>
+                            <a:rPr lang="en-US" altLang="ja-JP" sz="2400" b="0" i="0" smtClean="0">
+                              <a:latin typeface="Cambria Math" panose="02040503050406030204" pitchFamily="18" charset="0"/>
+                            </a:rPr>
+                            <m:t>𝑁</m:t>
+                          </m:r>
+                        </m:sub>
+                      </m:sSub>
+                    </m:oMath>
+                  </m:oMathPara>
+                </a14:m>
+                <a:endParaRPr lang="en-US" altLang="ja-JP" sz="2400" dirty="0"/>
+              </a:p>
+            </p:txBody>
+          </p:sp>
+        </mc:Choice>
+        <mc:Fallback>
+          <p:sp>
+            <p:nvSpPr>
+              <p:cNvPr id="5" name="コンテンツ プレースホルダー 2">
+                <a:extLst>
+                  <a:ext uri="{FF2B5EF4-FFF2-40B4-BE49-F238E27FC236}">
+                    <a16:creationId xmlns:a16="http://schemas.microsoft.com/office/drawing/2014/main" id="{BC8BBC91-D53C-64AB-7DC9-C7E64944B47A}"/>
+                  </a:ext>
+                </a:extLst>
+              </p:cNvPr>
+              <p:cNvSpPr txBox="1">
+                <a:spLocks noRot="1" noChangeAspect="1" noMove="1" noResize="1" noEditPoints="1" noAdjustHandles="1" noChangeArrowheads="1" noChangeShapeType="1" noTextEdit="1"/>
+              </p:cNvSpPr>
+              <p:nvPr/>
+            </p:nvSpPr>
+            <p:spPr>
+              <a:xfrm>
+                <a:off x="164422" y="2511163"/>
+                <a:ext cx="11977456" cy="2169309"/>
+              </a:xfrm>
+              <a:prstGeom prst="rect">
+                <a:avLst/>
+              </a:prstGeom>
+              <a:blipFill>
+                <a:blip r:embed="rId4"/>
+                <a:stretch>
+                  <a:fillRect l="-1069" t="-4775"/>
+                </a:stretch>
+              </a:blipFill>
+            </p:spPr>
+            <p:txBody>
+              <a:bodyPr/>
+              <a:lstStyle/>
+              <a:p>
+                <a:r>
+                  <a:rPr lang="ja-JP" altLang="en-US">
+                    <a:noFill/>
+                  </a:rPr>
+                  <a:t> </a:t>
+                </a:r>
+              </a:p>
+            </p:txBody>
+          </p:sp>
+        </mc:Fallback>
+      </mc:AlternateContent>
+      <mc:AlternateContent xmlns:mc="http://schemas.openxmlformats.org/markup-compatibility/2006">
+        <mc:Choice xmlns:a14="http://schemas.microsoft.com/office/drawing/2010/main" Requires="a14">
+          <p:sp>
+            <p:nvSpPr>
+              <p:cNvPr id="7" name="コンテンツ プレースホルダー 2">
+                <a:extLst>
+                  <a:ext uri="{FF2B5EF4-FFF2-40B4-BE49-F238E27FC236}">
+                    <a16:creationId xmlns:a16="http://schemas.microsoft.com/office/drawing/2014/main" id="{B515ED38-C54C-5256-E9BB-120E0C3B7B30}"/>
+                  </a:ext>
+                </a:extLst>
+              </p:cNvPr>
+              <p:cNvSpPr txBox="1">
+                <a:spLocks/>
+              </p:cNvSpPr>
+              <p:nvPr/>
+            </p:nvSpPr>
+            <p:spPr>
+              <a:xfrm>
+                <a:off x="164422" y="4670947"/>
+                <a:ext cx="11663143" cy="1587501"/>
+              </a:xfrm>
+              <a:prstGeom prst="rect">
+                <a:avLst/>
+              </a:prstGeom>
+            </p:spPr>
+            <p:txBody>
+              <a:bodyPr vert="horz" lIns="91440" tIns="45720" rIns="91440" bIns="45720" rtlCol="0">
+                <a:normAutofit lnSpcReduction="10000"/>
+              </a:bodyPr>
+              <a:lstStyle>
+                <a:lvl1pPr marL="228600" indent="-228600" algn="l" defTabSz="914400" rtl="0" eaLnBrk="1" latinLnBrk="0" hangingPunct="1">
+                  <a:lnSpc>
+                    <a:spcPct val="90000"/>
+                  </a:lnSpc>
+                  <a:spcBef>
+                    <a:spcPts val="1000"/>
+                  </a:spcBef>
+                  <a:buFont typeface="Arial" panose="020B0604020202020204" pitchFamily="34" charset="0"/>
+                  <a:buChar char="•"/>
+                  <a:defRPr kumimoji="1" sz="2800" kern="1200">
+                    <a:solidFill>
+                      <a:schemeClr val="tx1"/>
+                    </a:solidFill>
+                    <a:latin typeface="Calibri" panose="020F0502020204030204" pitchFamily="34" charset="0"/>
+                    <a:ea typeface="+mn-ea"/>
+                    <a:cs typeface="Calibri" panose="020F0502020204030204" pitchFamily="34" charset="0"/>
+                  </a:defRPr>
+                </a:lvl1pPr>
+                <a:lvl2pPr marL="685800" indent="-228600" algn="l" defTabSz="914400" rtl="0" eaLnBrk="1" latinLnBrk="0" hangingPunct="1">
+                  <a:lnSpc>
+                    <a:spcPct val="90000"/>
+                  </a:lnSpc>
+                  <a:spcBef>
+                    <a:spcPts val="500"/>
+                  </a:spcBef>
+                  <a:buFont typeface="Arial" panose="020B0604020202020204" pitchFamily="34" charset="0"/>
+                  <a:buChar char="•"/>
+                  <a:defRPr kumimoji="1" sz="2400" kern="1200">
+                    <a:solidFill>
+                      <a:schemeClr val="tx1"/>
+                    </a:solidFill>
+                    <a:latin typeface="Calibri" panose="020F0502020204030204" pitchFamily="34" charset="0"/>
+                    <a:ea typeface="+mn-ea"/>
+                    <a:cs typeface="Calibri" panose="020F0502020204030204" pitchFamily="34" charset="0"/>
+                  </a:defRPr>
+                </a:lvl2pPr>
+                <a:lvl3pPr marL="1143000" indent="-228600" algn="l" defTabSz="914400" rtl="0" eaLnBrk="1" latinLnBrk="0" hangingPunct="1">
+                  <a:lnSpc>
+                    <a:spcPct val="90000"/>
+                  </a:lnSpc>
+                  <a:spcBef>
+                    <a:spcPts val="500"/>
+                  </a:spcBef>
+                  <a:buFont typeface="Arial" panose="020B0604020202020204" pitchFamily="34" charset="0"/>
+                  <a:buChar char="•"/>
+                  <a:defRPr kumimoji="1" sz="2000" kern="1200">
+                    <a:solidFill>
+                      <a:schemeClr val="tx1"/>
+                    </a:solidFill>
+                    <a:latin typeface="Calibri" panose="020F0502020204030204" pitchFamily="34" charset="0"/>
+                    <a:ea typeface="+mn-ea"/>
+                    <a:cs typeface="Calibri" panose="020F0502020204030204" pitchFamily="34" charset="0"/>
+                  </a:defRPr>
+                </a:lvl3pPr>
+                <a:lvl4pPr marL="1600200" indent="-228600" algn="l" defTabSz="914400" rtl="0" eaLnBrk="1" latinLnBrk="0" hangingPunct="1">
+                  <a:lnSpc>
+                    <a:spcPct val="90000"/>
+                  </a:lnSpc>
+                  <a:spcBef>
+                    <a:spcPts val="500"/>
+                  </a:spcBef>
+                  <a:buFont typeface="Arial" panose="020B0604020202020204" pitchFamily="34" charset="0"/>
+                  <a:buChar char="•"/>
+                  <a:defRPr kumimoji="1" sz="1800" kern="1200">
+                    <a:solidFill>
+                      <a:schemeClr val="tx1"/>
+                    </a:solidFill>
+                    <a:latin typeface="Calibri" panose="020F0502020204030204" pitchFamily="34" charset="0"/>
+                    <a:ea typeface="+mn-ea"/>
+                    <a:cs typeface="Calibri" panose="020F0502020204030204" pitchFamily="34" charset="0"/>
+                  </a:defRPr>
+                </a:lvl4pPr>
+                <a:lvl5pPr marL="2057400" indent="-228600" algn="l" defTabSz="914400" rtl="0" eaLnBrk="1" latinLnBrk="0" hangingPunct="1">
+                  <a:lnSpc>
+                    <a:spcPct val="90000"/>
+                  </a:lnSpc>
+                  <a:spcBef>
+                    <a:spcPts val="500"/>
+                  </a:spcBef>
+                  <a:buFont typeface="Arial" panose="020B0604020202020204" pitchFamily="34" charset="0"/>
+                  <a:buChar char="•"/>
+                  <a:defRPr kumimoji="1" sz="1800" kern="1200">
+                    <a:solidFill>
+                      <a:schemeClr val="tx1"/>
+                    </a:solidFill>
+                    <a:latin typeface="Calibri" panose="020F0502020204030204" pitchFamily="34" charset="0"/>
+                    <a:ea typeface="+mn-ea"/>
+                    <a:cs typeface="Calibri" panose="020F0502020204030204" pitchFamily="34" charset="0"/>
+                  </a:defRPr>
+                </a:lvl5pPr>
+                <a:lvl6pPr marL="2514600" indent="-228600" algn="l" defTabSz="914400" rtl="0" eaLnBrk="1" latinLnBrk="0" hangingPunct="1">
+                  <a:lnSpc>
+                    <a:spcPct val="90000"/>
+                  </a:lnSpc>
+                  <a:spcBef>
+                    <a:spcPts val="500"/>
+                  </a:spcBef>
+                  <a:buFont typeface="Arial" panose="020B0604020202020204" pitchFamily="34" charset="0"/>
+                  <a:buChar char="•"/>
+                  <a:defRPr kumimoji="1" sz="1800" kern="1200">
+                    <a:solidFill>
+                      <a:schemeClr val="tx1"/>
+                    </a:solidFill>
+                    <a:latin typeface="+mn-lt"/>
+                    <a:ea typeface="+mn-ea"/>
+                    <a:cs typeface="+mn-cs"/>
+                  </a:defRPr>
+                </a:lvl6pPr>
+                <a:lvl7pPr marL="2971800" indent="-228600" algn="l" defTabSz="914400" rtl="0" eaLnBrk="1" latinLnBrk="0" hangingPunct="1">
+                  <a:lnSpc>
+                    <a:spcPct val="90000"/>
+                  </a:lnSpc>
+                  <a:spcBef>
+                    <a:spcPts val="500"/>
+                  </a:spcBef>
+                  <a:buFont typeface="Arial" panose="020B0604020202020204" pitchFamily="34" charset="0"/>
+                  <a:buChar char="•"/>
+                  <a:defRPr kumimoji="1" sz="1800" kern="1200">
+                    <a:solidFill>
+                      <a:schemeClr val="tx1"/>
+                    </a:solidFill>
+                    <a:latin typeface="+mn-lt"/>
+                    <a:ea typeface="+mn-ea"/>
+                    <a:cs typeface="+mn-cs"/>
+                  </a:defRPr>
+                </a:lvl7pPr>
+                <a:lvl8pPr marL="3429000" indent="-228600" algn="l" defTabSz="914400" rtl="0" eaLnBrk="1" latinLnBrk="0" hangingPunct="1">
+                  <a:lnSpc>
+                    <a:spcPct val="90000"/>
+                  </a:lnSpc>
+                  <a:spcBef>
+                    <a:spcPts val="500"/>
+                  </a:spcBef>
+                  <a:buFont typeface="Arial" panose="020B0604020202020204" pitchFamily="34" charset="0"/>
+                  <a:buChar char="•"/>
+                  <a:defRPr kumimoji="1" sz="1800" kern="1200">
+                    <a:solidFill>
+                      <a:schemeClr val="tx1"/>
+                    </a:solidFill>
+                    <a:latin typeface="+mn-lt"/>
+                    <a:ea typeface="+mn-ea"/>
+                    <a:cs typeface="+mn-cs"/>
+                  </a:defRPr>
+                </a:lvl8pPr>
+                <a:lvl9pPr marL="3886200" indent="-228600" algn="l" defTabSz="914400" rtl="0" eaLnBrk="1" latinLnBrk="0" hangingPunct="1">
+                  <a:lnSpc>
+                    <a:spcPct val="90000"/>
+                  </a:lnSpc>
+                  <a:spcBef>
+                    <a:spcPts val="500"/>
+                  </a:spcBef>
+                  <a:buFont typeface="Arial" panose="020B0604020202020204" pitchFamily="34" charset="0"/>
+                  <a:buChar char="•"/>
+                  <a:defRPr kumimoji="1" sz="1800" kern="1200">
+                    <a:solidFill>
+                      <a:schemeClr val="tx1"/>
+                    </a:solidFill>
+                    <a:latin typeface="+mn-lt"/>
+                    <a:ea typeface="+mn-ea"/>
+                    <a:cs typeface="+mn-cs"/>
+                  </a:defRPr>
+                </a:lvl9pPr>
+              </a:lstStyle>
+              <a:p>
+                <a:pPr marL="0" indent="0">
+                  <a:buNone/>
+                </a:pPr>
+                <a:r>
+                  <a:rPr lang="en-US" altLang="ja-JP" u="sng" dirty="0"/>
+                  <a:t>3. Extreme operation with Wiener process:</a:t>
+                </a:r>
+              </a:p>
+              <a:p>
+                <a:pPr marL="0" indent="0">
+                  <a:buNone/>
+                </a:pPr>
+                <a:r>
+                  <a:rPr lang="en-US" altLang="ja-JP" sz="2400" dirty="0"/>
+                  <a:t>Taking the limit as </a:t>
+                </a:r>
+                <a14:m>
+                  <m:oMath xmlns:m="http://schemas.openxmlformats.org/officeDocument/2006/math">
+                    <m:r>
+                      <m:rPr>
+                        <m:sty m:val="p"/>
+                      </m:rPr>
+                      <a:rPr lang="en-US" altLang="ja-JP" sz="2400" b="0" i="1" smtClean="0">
+                        <a:latin typeface="Cambria Math" panose="02040503050406030204" pitchFamily="18" charset="0"/>
+                      </a:rPr>
+                      <m:t>Δτ</m:t>
+                    </m:r>
+                    <m:r>
+                      <a:rPr lang="en-US" altLang="ja-JP" sz="2400" b="0" i="1" smtClean="0">
+                        <a:latin typeface="Cambria Math" panose="02040503050406030204" pitchFamily="18" charset="0"/>
+                      </a:rPr>
+                      <m:t> → 0</m:t>
+                    </m:r>
+                  </m:oMath>
+                </a14:m>
+                <a:r>
+                  <a:rPr lang="en-US" altLang="ja-JP" sz="2400" dirty="0"/>
+                  <a:t> yields the same inverse-time SDE as the diffusion model:</a:t>
+                </a:r>
+                <a:br>
+                  <a:rPr lang="en-US" altLang="ja-JP" sz="2400" dirty="0"/>
+                </a:br>
+                <a:endParaRPr lang="en-US" altLang="ja-JP" sz="900" dirty="0"/>
+              </a:p>
+              <a:p>
+                <a:pPr marL="0" indent="0">
+                  <a:buNone/>
+                </a:pPr>
+                <a14:m>
+                  <m:oMathPara xmlns:m="http://schemas.openxmlformats.org/officeDocument/2006/math">
+                    <m:oMathParaPr>
+                      <m:jc m:val="centerGroup"/>
+                    </m:oMathParaPr>
+                    <m:oMath xmlns:m="http://schemas.openxmlformats.org/officeDocument/2006/math">
+                      <m:r>
+                        <m:rPr>
+                          <m:sty m:val="p"/>
+                        </m:rPr>
+                        <a:rPr lang="en-US" altLang="ja-JP" sz="2400" b="0" i="1" smtClean="0">
+                          <a:latin typeface="Cambria Math" panose="02040503050406030204" pitchFamily="18" charset="0"/>
+                        </a:rPr>
+                        <m:t>dY</m:t>
+                      </m:r>
+                      <m:r>
+                        <a:rPr lang="en-US" altLang="ja-JP" sz="2400" b="0" i="1" smtClean="0">
+                          <a:latin typeface="Cambria Math" panose="02040503050406030204" pitchFamily="18" charset="0"/>
+                        </a:rPr>
+                        <m:t>(</m:t>
+                      </m:r>
+                      <m:r>
+                        <m:rPr>
+                          <m:sty m:val="p"/>
+                        </m:rPr>
+                        <a:rPr lang="en-US" altLang="ja-JP" sz="2400" b="0" i="1" smtClean="0">
+                          <a:latin typeface="Cambria Math" panose="02040503050406030204" pitchFamily="18" charset="0"/>
+                        </a:rPr>
+                        <m:t>τ</m:t>
+                      </m:r>
+                      <m:r>
+                        <a:rPr lang="en-US" altLang="ja-JP" sz="2400" b="0" i="1" smtClean="0">
+                          <a:latin typeface="Cambria Math" panose="02040503050406030204" pitchFamily="18" charset="0"/>
+                        </a:rPr>
+                        <m:t>) = </m:t>
+                      </m:r>
+                      <m:f>
+                        <m:fPr>
+                          <m:ctrlPr>
+                            <a:rPr lang="en-US" altLang="ja-JP" sz="2400" b="0" i="1" smtClean="0">
+                              <a:latin typeface="Cambria Math" panose="02040503050406030204" pitchFamily="18" charset="0"/>
+                            </a:rPr>
+                          </m:ctrlPr>
+                        </m:fPr>
+                        <m:num>
+                          <m:r>
+                            <a:rPr lang="en-US" altLang="ja-JP" sz="2400" b="0" i="1" smtClean="0">
+                              <a:latin typeface="Cambria Math" panose="02040503050406030204" pitchFamily="18" charset="0"/>
+                            </a:rPr>
+                            <m:t>2</m:t>
+                          </m:r>
+                        </m:num>
+                        <m:den>
+                          <m:r>
+                            <m:rPr>
+                              <m:sty m:val="p"/>
+                            </m:rPr>
+                            <a:rPr lang="en-US" altLang="ja-JP" sz="2400" b="0" i="1" smtClean="0">
+                              <a:latin typeface="Cambria Math" panose="02040503050406030204" pitchFamily="18" charset="0"/>
+                            </a:rPr>
+                            <m:t>τ</m:t>
+                          </m:r>
+                        </m:den>
+                      </m:f>
+                      <m:r>
+                        <a:rPr lang="en-US" altLang="ja-JP" sz="2400" i="1">
+                          <a:latin typeface="Cambria Math" panose="02040503050406030204" pitchFamily="18" charset="0"/>
+                        </a:rPr>
+                        <m:t>(</m:t>
+                      </m:r>
+                      <m:r>
+                        <m:rPr>
+                          <m:sty m:val="p"/>
+                        </m:rPr>
+                        <a:rPr lang="en-US" altLang="ja-JP" sz="2400" i="1">
+                          <a:latin typeface="Cambria Math" panose="02040503050406030204" pitchFamily="18" charset="0"/>
+                        </a:rPr>
+                        <m:t>Y</m:t>
+                      </m:r>
+                      <m:r>
+                        <a:rPr lang="en-US" altLang="ja-JP" sz="2400" i="1">
+                          <a:latin typeface="Cambria Math" panose="02040503050406030204" pitchFamily="18" charset="0"/>
+                        </a:rPr>
+                        <m:t>(</m:t>
+                      </m:r>
+                      <m:r>
+                        <m:rPr>
+                          <m:sty m:val="p"/>
+                        </m:rPr>
+                        <a:rPr lang="en-US" altLang="ja-JP" sz="2400" i="1">
+                          <a:latin typeface="Cambria Math" panose="02040503050406030204" pitchFamily="18" charset="0"/>
+                        </a:rPr>
+                        <m:t>τ</m:t>
+                      </m:r>
+                      <m:r>
+                        <a:rPr lang="en-US" altLang="ja-JP" sz="2400" i="1">
+                          <a:latin typeface="Cambria Math" panose="02040503050406030204" pitchFamily="18" charset="0"/>
+                        </a:rPr>
+                        <m:t>) − </m:t>
+                      </m:r>
+                      <m:r>
+                        <m:rPr>
+                          <m:sty m:val="p"/>
+                        </m:rPr>
+                        <a:rPr lang="en-US" altLang="ja-JP" sz="2400" i="1">
+                          <a:latin typeface="Cambria Math" panose="02040503050406030204" pitchFamily="18" charset="0"/>
+                        </a:rPr>
+                        <m:t>μ</m:t>
+                      </m:r>
+                      <m:r>
+                        <a:rPr lang="en-US" altLang="ja-JP" sz="2400" i="1">
+                          <a:latin typeface="Cambria Math" panose="02040503050406030204" pitchFamily="18" charset="0"/>
+                        </a:rPr>
+                        <m:t>)</m:t>
+                      </m:r>
+                      <m:r>
+                        <m:rPr>
+                          <m:sty m:val="p"/>
+                        </m:rPr>
+                        <a:rPr lang="en-US" altLang="ja-JP" sz="2400" b="0" i="1" smtClean="0">
+                          <a:latin typeface="Cambria Math" panose="02040503050406030204" pitchFamily="18" charset="0"/>
+                        </a:rPr>
+                        <m:t>dτ</m:t>
+                      </m:r>
+                      <m:r>
+                        <a:rPr lang="en-US" altLang="ja-JP" sz="2400" b="0" i="1" smtClean="0">
+                          <a:latin typeface="Cambria Math" panose="02040503050406030204" pitchFamily="18" charset="0"/>
+                        </a:rPr>
+                        <m:t> + </m:t>
+                      </m:r>
+                      <m:r>
+                        <m:rPr>
+                          <m:sty m:val="p"/>
+                        </m:rPr>
+                        <a:rPr lang="en-US" altLang="ja-JP" sz="2400" b="0" i="1" smtClean="0">
+                          <a:latin typeface="Cambria Math" panose="02040503050406030204" pitchFamily="18" charset="0"/>
+                        </a:rPr>
+                        <m:t>σ</m:t>
+                      </m:r>
+                      <m:rad>
+                        <m:radPr>
+                          <m:degHide m:val="on"/>
+                          <m:ctrlPr>
+                            <a:rPr lang="en-US" altLang="ja-JP" sz="2400" b="0" i="1" smtClean="0">
+                              <a:latin typeface="Cambria Math" panose="02040503050406030204" pitchFamily="18" charset="0"/>
+                            </a:rPr>
+                          </m:ctrlPr>
+                        </m:radPr>
+                        <m:deg/>
+                        <m:e>
+                          <m:r>
+                            <a:rPr lang="en-US" altLang="ja-JP" sz="2400" b="0" i="1" smtClean="0">
+                              <a:latin typeface="Cambria Math" panose="02040503050406030204" pitchFamily="18" charset="0"/>
+                            </a:rPr>
+                            <m:t>2</m:t>
+                          </m:r>
+                          <m:r>
+                            <a:rPr lang="en-US" altLang="ja-JP" sz="2400" b="0" i="1" smtClean="0">
+                              <a:latin typeface="Cambria Math" panose="02040503050406030204" pitchFamily="18" charset="0"/>
+                            </a:rPr>
+                            <m:t>𝜏</m:t>
+                          </m:r>
+                        </m:e>
+                      </m:rad>
+                      <m:r>
+                        <m:rPr>
+                          <m:sty m:val="p"/>
+                        </m:rPr>
+                        <a:rPr lang="en-US" altLang="ja-JP" sz="2400" b="0" i="1" smtClean="0">
+                          <a:latin typeface="Cambria Math" panose="02040503050406030204" pitchFamily="18" charset="0"/>
+                        </a:rPr>
+                        <m:t>d</m:t>
+                      </m:r>
+                      <m:sSub>
+                        <m:sSubPr>
+                          <m:ctrlPr>
+                            <a:rPr lang="en-US" altLang="ja-JP" sz="2400" b="0" i="1" smtClean="0">
+                              <a:latin typeface="Cambria Math" panose="02040503050406030204" pitchFamily="18" charset="0"/>
+                            </a:rPr>
+                          </m:ctrlPr>
+                        </m:sSubPr>
+                        <m:e>
+                          <m:r>
+                            <a:rPr lang="en-US" altLang="ja-JP" sz="2400" b="0" i="1" smtClean="0">
+                              <a:latin typeface="Cambria Math" panose="02040503050406030204" pitchFamily="18" charset="0"/>
+                            </a:rPr>
+                            <m:t>𝑊</m:t>
+                          </m:r>
+                        </m:e>
+                        <m:sub>
+                          <m:r>
+                            <a:rPr lang="en-US" altLang="ja-JP" sz="2400" b="0" i="1" smtClean="0">
+                              <a:latin typeface="Cambria Math" panose="02040503050406030204" pitchFamily="18" charset="0"/>
+                            </a:rPr>
+                            <m:t>𝜏</m:t>
+                          </m:r>
+                        </m:sub>
+                      </m:sSub>
+                      <m:r>
+                        <a:rPr lang="en-US" altLang="ja-JP" sz="2400" b="0" i="1" smtClean="0">
+                          <a:latin typeface="Cambria Math" panose="02040503050406030204" pitchFamily="18" charset="0"/>
+                        </a:rPr>
+                        <m:t>, </m:t>
+                      </m:r>
+                      <m:r>
+                        <a:rPr lang="ja-JP" altLang="en-US" sz="2400" i="1">
+                          <a:latin typeface="Cambria Math" panose="02040503050406030204" pitchFamily="18" charset="0"/>
+                        </a:rPr>
+                        <m:t>　</m:t>
+                      </m:r>
+                      <m:r>
+                        <m:rPr>
+                          <m:sty m:val="p"/>
+                        </m:rPr>
+                        <a:rPr lang="en-US" altLang="ja-JP" sz="2400" i="1">
+                          <a:latin typeface="Cambria Math" panose="02040503050406030204" pitchFamily="18" charset="0"/>
+                        </a:rPr>
+                        <m:t>d</m:t>
+                      </m:r>
+                      <m:sSub>
+                        <m:sSubPr>
+                          <m:ctrlPr>
+                            <a:rPr lang="en-US" altLang="ja-JP" sz="2400" i="1">
+                              <a:latin typeface="Cambria Math" panose="02040503050406030204" pitchFamily="18" charset="0"/>
+                            </a:rPr>
+                          </m:ctrlPr>
+                        </m:sSubPr>
+                        <m:e>
+                          <m:r>
+                            <a:rPr lang="en-US" altLang="ja-JP" sz="2400" i="1">
+                              <a:latin typeface="Cambria Math" panose="02040503050406030204" pitchFamily="18" charset="0"/>
+                            </a:rPr>
+                            <m:t>𝑊</m:t>
+                          </m:r>
+                        </m:e>
+                        <m:sub>
+                          <m:r>
+                            <a:rPr lang="en-US" altLang="ja-JP" sz="2400" i="1">
+                              <a:latin typeface="Cambria Math" panose="02040503050406030204" pitchFamily="18" charset="0"/>
+                            </a:rPr>
+                            <m:t>𝜏</m:t>
+                          </m:r>
+                        </m:sub>
+                      </m:sSub>
+                      <m:r>
+                        <a:rPr lang="en-US" altLang="ja-JP" sz="2400" b="0" i="1" smtClean="0">
+                          <a:latin typeface="Cambria Math" panose="02040503050406030204" pitchFamily="18" charset="0"/>
+                        </a:rPr>
+                        <m:t>∼</m:t>
+                      </m:r>
+                      <m:r>
+                        <a:rPr lang="en-US" altLang="ja-JP" sz="2400" i="1">
+                          <a:latin typeface="Cambria Math" panose="02040503050406030204" pitchFamily="18" charset="0"/>
+                        </a:rPr>
+                        <m:t>𝒩</m:t>
+                      </m:r>
+                      <m:r>
+                        <a:rPr lang="en-US" altLang="ja-JP" sz="2400" i="1">
+                          <a:latin typeface="Cambria Math" panose="02040503050406030204" pitchFamily="18" charset="0"/>
+                        </a:rPr>
+                        <m:t>(0, </m:t>
+                      </m:r>
+                      <m:r>
+                        <m:rPr>
+                          <m:sty m:val="p"/>
+                        </m:rPr>
+                        <a:rPr lang="en-US" altLang="ja-JP" sz="2400" b="0" i="1" smtClean="0">
+                          <a:latin typeface="Cambria Math" panose="02040503050406030204" pitchFamily="18" charset="0"/>
+                        </a:rPr>
+                        <m:t>dτ</m:t>
+                      </m:r>
+                      <m:r>
+                        <a:rPr lang="en-US" altLang="ja-JP" sz="2400" i="1">
+                          <a:latin typeface="Cambria Math" panose="02040503050406030204" pitchFamily="18" charset="0"/>
+                        </a:rPr>
+                        <m:t>)</m:t>
+                      </m:r>
+                    </m:oMath>
+                  </m:oMathPara>
+                </a14:m>
+                <a:br>
+                  <a:rPr lang="en-US" altLang="ja-JP" sz="2400" dirty="0"/>
+                </a:br>
+                <a:endParaRPr lang="ja-JP" altLang="en-US" sz="2400" dirty="0"/>
+              </a:p>
+            </p:txBody>
+          </p:sp>
+        </mc:Choice>
+        <mc:Fallback>
+          <p:sp>
+            <p:nvSpPr>
+              <p:cNvPr id="7" name="コンテンツ プレースホルダー 2">
+                <a:extLst>
+                  <a:ext uri="{FF2B5EF4-FFF2-40B4-BE49-F238E27FC236}">
+                    <a16:creationId xmlns:a16="http://schemas.microsoft.com/office/drawing/2014/main" id="{B515ED38-C54C-5256-E9BB-120E0C3B7B30}"/>
+                  </a:ext>
+                </a:extLst>
+              </p:cNvPr>
+              <p:cNvSpPr txBox="1">
+                <a:spLocks noRot="1" noChangeAspect="1" noMove="1" noResize="1" noEditPoints="1" noAdjustHandles="1" noChangeArrowheads="1" noChangeShapeType="1" noTextEdit="1"/>
+              </p:cNvSpPr>
+              <p:nvPr/>
+            </p:nvSpPr>
+            <p:spPr>
+              <a:xfrm>
+                <a:off x="164422" y="4670947"/>
+                <a:ext cx="11663143" cy="1587501"/>
+              </a:xfrm>
+              <a:prstGeom prst="rect">
+                <a:avLst/>
+              </a:prstGeom>
+              <a:blipFill>
+                <a:blip r:embed="rId5"/>
+                <a:stretch>
+                  <a:fillRect l="-1098" t="-8429"/>
+                </a:stretch>
+              </a:blipFill>
+            </p:spPr>
+            <p:txBody>
+              <a:bodyPr/>
+              <a:lstStyle/>
+              <a:p>
+                <a:r>
+                  <a:rPr lang="ja-JP" altLang="en-US">
+                    <a:noFill/>
+                  </a:rPr>
+                  <a:t> </a:t>
+                </a:r>
+              </a:p>
+            </p:txBody>
+          </p:sp>
+        </mc:Fallback>
+      </mc:AlternateContent>
+      <p:sp>
+        <p:nvSpPr>
+          <p:cNvPr id="9" name="左中かっこ 8">
+            <a:extLst>
+              <a:ext uri="{FF2B5EF4-FFF2-40B4-BE49-F238E27FC236}">
+                <a16:creationId xmlns:a16="http://schemas.microsoft.com/office/drawing/2014/main" id="{D6253B27-542C-A4B9-1C10-9C4A8FEB0F8E}"/>
+              </a:ext>
+            </a:extLst>
+          </p:cNvPr>
+          <p:cNvSpPr/>
+          <p:nvPr/>
+        </p:nvSpPr>
+        <p:spPr>
+          <a:xfrm rot="16200000">
+            <a:off x="4419601" y="5299076"/>
+            <a:ext cx="200023" cy="2047875"/>
+          </a:xfrm>
+          <a:prstGeom prst="leftBrace">
+            <a:avLst/>
+          </a:prstGeom>
+        </p:spPr>
+        <p:style>
+          <a:lnRef idx="2">
+            <a:schemeClr val="dk1"/>
+          </a:lnRef>
+          <a:fillRef idx="0">
+            <a:schemeClr val="dk1"/>
+          </a:fillRef>
+          <a:effectRef idx="1">
+            <a:schemeClr val="dk1"/>
+          </a:effectRef>
+          <a:fontRef idx="minor">
+            <a:schemeClr val="tx1"/>
+          </a:fontRef>
+        </p:style>
+        <p:txBody>
+          <a:bodyPr rtlCol="0" anchor="ctr"/>
+          <a:lstStyle/>
+          <a:p>
+            <a:pPr algn="ctr"/>
+            <a:endParaRPr kumimoji="1" lang="ja-JP" altLang="en-US"/>
+          </a:p>
+        </p:txBody>
+      </p:sp>
+      <p:sp>
+        <p:nvSpPr>
+          <p:cNvPr id="10" name="テキスト ボックス 9">
+            <a:extLst>
+              <a:ext uri="{FF2B5EF4-FFF2-40B4-BE49-F238E27FC236}">
+                <a16:creationId xmlns:a16="http://schemas.microsoft.com/office/drawing/2014/main" id="{333EDBEC-A6D3-8817-C9AE-E76C02F0FBD3}"/>
+              </a:ext>
+            </a:extLst>
+          </p:cNvPr>
+          <p:cNvSpPr txBox="1"/>
+          <p:nvPr/>
+        </p:nvSpPr>
+        <p:spPr>
+          <a:xfrm>
+            <a:off x="3495675" y="6412468"/>
+            <a:ext cx="2047875" cy="369332"/>
+          </a:xfrm>
+          <a:prstGeom prst="rect">
+            <a:avLst/>
+          </a:prstGeom>
+          <a:noFill/>
+        </p:spPr>
+        <p:txBody>
+          <a:bodyPr wrap="square" rtlCol="0">
+            <a:spAutoFit/>
+          </a:bodyPr>
+          <a:lstStyle/>
+          <a:p>
+            <a:pPr algn="ctr"/>
+            <a:r>
+              <a:rPr kumimoji="1" lang="en-US" altLang="ja-JP" b="1" dirty="0">
+                <a:latin typeface="Calibri" panose="020F0502020204030204" pitchFamily="34" charset="0"/>
+                <a:ea typeface="Calibri" panose="020F0502020204030204" pitchFamily="34" charset="0"/>
+                <a:cs typeface="Calibri" panose="020F0502020204030204" pitchFamily="34" charset="0"/>
+              </a:rPr>
+              <a:t>Drift term</a:t>
+            </a:r>
+            <a:endParaRPr kumimoji="1" lang="ja-JP" altLang="en-US" b="1" dirty="0">
+              <a:latin typeface="Calibri" panose="020F0502020204030204" pitchFamily="34" charset="0"/>
+              <a:cs typeface="Calibri" panose="020F0502020204030204" pitchFamily="34" charset="0"/>
+            </a:endParaRPr>
+          </a:p>
+        </p:txBody>
+      </p:sp>
+      <p:sp>
+        <p:nvSpPr>
+          <p:cNvPr id="11" name="左中かっこ 10">
+            <a:extLst>
+              <a:ext uri="{FF2B5EF4-FFF2-40B4-BE49-F238E27FC236}">
+                <a16:creationId xmlns:a16="http://schemas.microsoft.com/office/drawing/2014/main" id="{164C8F45-ED1F-D8C1-C134-AF01D108D2EA}"/>
+              </a:ext>
+            </a:extLst>
+          </p:cNvPr>
+          <p:cNvSpPr/>
+          <p:nvPr/>
+        </p:nvSpPr>
+        <p:spPr>
+          <a:xfrm rot="16200000">
+            <a:off x="6569248" y="5696122"/>
+            <a:ext cx="200023" cy="1253781"/>
+          </a:xfrm>
+          <a:prstGeom prst="leftBrace">
+            <a:avLst/>
+          </a:prstGeom>
+        </p:spPr>
+        <p:style>
+          <a:lnRef idx="2">
+            <a:schemeClr val="dk1"/>
+          </a:lnRef>
+          <a:fillRef idx="0">
+            <a:schemeClr val="dk1"/>
+          </a:fillRef>
+          <a:effectRef idx="1">
+            <a:schemeClr val="dk1"/>
+          </a:effectRef>
+          <a:fontRef idx="minor">
+            <a:schemeClr val="tx1"/>
+          </a:fontRef>
+        </p:style>
+        <p:txBody>
+          <a:bodyPr rtlCol="0" anchor="ctr"/>
+          <a:lstStyle/>
+          <a:p>
+            <a:pPr algn="ctr"/>
+            <a:endParaRPr kumimoji="1" lang="ja-JP" altLang="en-US"/>
+          </a:p>
+        </p:txBody>
+      </p:sp>
+      <p:sp>
+        <p:nvSpPr>
+          <p:cNvPr id="12" name="テキスト ボックス 11">
+            <a:extLst>
+              <a:ext uri="{FF2B5EF4-FFF2-40B4-BE49-F238E27FC236}">
+                <a16:creationId xmlns:a16="http://schemas.microsoft.com/office/drawing/2014/main" id="{08372F0B-AE94-1A2B-7F5C-A758F8C98AA7}"/>
+              </a:ext>
+            </a:extLst>
+          </p:cNvPr>
+          <p:cNvSpPr txBox="1"/>
+          <p:nvPr/>
+        </p:nvSpPr>
+        <p:spPr>
+          <a:xfrm>
+            <a:off x="5543550" y="6412468"/>
+            <a:ext cx="2322341" cy="369332"/>
+          </a:xfrm>
+          <a:prstGeom prst="rect">
+            <a:avLst/>
+          </a:prstGeom>
+          <a:noFill/>
+        </p:spPr>
+        <p:txBody>
+          <a:bodyPr wrap="square" rtlCol="0">
+            <a:spAutoFit/>
+          </a:bodyPr>
+          <a:lstStyle/>
+          <a:p>
+            <a:pPr algn="ctr"/>
+            <a:r>
+              <a:rPr kumimoji="1" lang="en-US" altLang="ja-JP" b="1" dirty="0">
+                <a:latin typeface="Calibri" panose="020F0502020204030204" pitchFamily="34" charset="0"/>
+                <a:ea typeface="Calibri" panose="020F0502020204030204" pitchFamily="34" charset="0"/>
+                <a:cs typeface="Calibri" panose="020F0502020204030204" pitchFamily="34" charset="0"/>
+              </a:rPr>
+              <a:t>Diffusion term (noise)</a:t>
+            </a:r>
+            <a:endParaRPr kumimoji="1" lang="ja-JP" altLang="en-US" b="1" dirty="0">
+              <a:latin typeface="Calibri" panose="020F0502020204030204" pitchFamily="34" charset="0"/>
+              <a:cs typeface="Calibri" panose="020F0502020204030204" pitchFamily="34" charset="0"/>
+            </a:endParaRPr>
+          </a:p>
+        </p:txBody>
+      </p:sp>
+    </p:spTree>
+    <p:extLst>
+      <p:ext uri="{BB962C8B-B14F-4D97-AF65-F5344CB8AC3E}">
+        <p14:creationId xmlns:p14="http://schemas.microsoft.com/office/powerpoint/2010/main" val="47189002"/>
+      </p:ext>
+    </p:extLst>
+  </p:cSld>
+  <p:clrMapOvr>
+    <a:masterClrMapping/>
+  </p:clrMapOvr>
+</p:sld>
+</file>
+
+<file path=ppt/slides/slide6.xml><?xml version="1.0" encoding="utf-8"?>
+<p:sld xmlns:a="http://schemas.openxmlformats.org/drawingml/2006/main" xmlns:r="http://schemas.openxmlformats.org/officeDocument/2006/relationships" xmlns:p="http://schemas.openxmlformats.org/presentationml/2006/main">
+  <p:cSld>
+    <p:spTree>
+      <p:nvGrpSpPr>
+        <p:cNvPr id="1" name="">
+          <a:extLst>
+            <a:ext uri="{FF2B5EF4-FFF2-40B4-BE49-F238E27FC236}">
+              <a16:creationId xmlns:a16="http://schemas.microsoft.com/office/drawing/2014/main" id="{DE6379F8-A37F-47C8-B5E0-78405B4F4E75}"/>
+            </a:ext>
+          </a:extLst>
+        </p:cNvPr>
+        <p:cNvGrpSpPr/>
+        <p:nvPr/>
+      </p:nvGrpSpPr>
+      <p:grpSpPr>
+        <a:xfrm>
+          <a:off x="0" y="0"/>
+          <a:ext cx="0" cy="0"/>
+          <a:chOff x="0" y="0"/>
+          <a:chExt cx="0" cy="0"/>
+        </a:xfrm>
+      </p:grpSpPr>
+      <p:sp>
+        <p:nvSpPr>
+          <p:cNvPr id="2" name="タイトル 1">
+            <a:extLst>
+              <a:ext uri="{FF2B5EF4-FFF2-40B4-BE49-F238E27FC236}">
+                <a16:creationId xmlns:a16="http://schemas.microsoft.com/office/drawing/2014/main" id="{F20EA99E-B4C5-6ED1-8410-02B3F56EF01E}"/>
+              </a:ext>
+            </a:extLst>
+          </p:cNvPr>
+          <p:cNvSpPr>
+            <a:spLocks noGrp="1"/>
+          </p:cNvSpPr>
+          <p:nvPr>
+            <p:ph type="title"/>
+          </p:nvPr>
+        </p:nvSpPr>
+        <p:spPr/>
+        <p:txBody>
+          <a:bodyPr/>
+          <a:lstStyle/>
+          <a:p>
+            <a:r>
+              <a:rPr kumimoji="1" lang="en-US" altLang="ja-JP" dirty="0"/>
+              <a:t>Time mapping</a:t>
+            </a:r>
+            <a:endParaRPr kumimoji="1" lang="ja-JP" altLang="en-US" dirty="0"/>
+          </a:p>
+        </p:txBody>
+      </p:sp>
+      <mc:AlternateContent xmlns:mc="http://schemas.openxmlformats.org/markup-compatibility/2006">
+        <mc:Choice xmlns:a14="http://schemas.microsoft.com/office/drawing/2010/main" Requires="a14">
+          <p:sp>
+            <p:nvSpPr>
+              <p:cNvPr id="3" name="コンテンツ プレースホルダー 2">
+                <a:extLst>
+                  <a:ext uri="{FF2B5EF4-FFF2-40B4-BE49-F238E27FC236}">
+                    <a16:creationId xmlns:a16="http://schemas.microsoft.com/office/drawing/2014/main" id="{C78B6FC6-44EC-4202-B97B-5E4E755A6F7D}"/>
+                  </a:ext>
+                </a:extLst>
+              </p:cNvPr>
+              <p:cNvSpPr>
+                <a:spLocks noGrp="1"/>
+              </p:cNvSpPr>
+              <p:nvPr>
+                <p:ph idx="1"/>
+              </p:nvPr>
+            </p:nvSpPr>
+            <p:spPr>
+              <a:xfrm>
+                <a:off x="164422" y="1355202"/>
+                <a:ext cx="11977456" cy="921273"/>
+              </a:xfrm>
+            </p:spPr>
+            <p:txBody>
+              <a:bodyPr>
+                <a:normAutofit/>
+              </a:bodyPr>
+              <a:lstStyle/>
+              <a:p>
+                <a:r>
+                  <a:rPr lang="en-US" altLang="ja-JP" dirty="0"/>
+                  <a:t>Estimate diffusion model’s time step </a:t>
+                </a:r>
+                <a14:m>
+                  <m:oMath xmlns:m="http://schemas.openxmlformats.org/officeDocument/2006/math">
+                    <m:r>
+                      <m:rPr>
+                        <m:sty m:val="p"/>
+                      </m:rPr>
+                      <a:rPr lang="en-US" altLang="ja-JP" b="0" i="1" smtClean="0">
+                        <a:latin typeface="Cambria Math" panose="02040503050406030204" pitchFamily="18" charset="0"/>
+                      </a:rPr>
+                      <m:t>t</m:t>
+                    </m:r>
+                  </m:oMath>
+                </a14:m>
+                <a:r>
+                  <a:rPr lang="en-US" altLang="ja-JP" dirty="0"/>
+                  <a:t> </a:t>
+                </a:r>
+                <a:br>
+                  <a:rPr lang="en-US" altLang="ja-JP" dirty="0"/>
+                </a:br>
+                <a:r>
+                  <a:rPr lang="en-US" altLang="ja-JP" dirty="0"/>
+                  <a:t>s</a:t>
+                </a:r>
+                <a:r>
+                  <a:rPr lang="en-US" altLang="ja-JP" dirty="0" err="1"/>
+                  <a:t>.t.</a:t>
+                </a:r>
+                <a:r>
+                  <a:rPr lang="en-US" altLang="ja-JP" dirty="0"/>
+                  <a:t> the log-SNR match to the MC image at time point </a:t>
+                </a:r>
+                <a14:m>
+                  <m:oMath xmlns:m="http://schemas.openxmlformats.org/officeDocument/2006/math">
+                    <m:r>
+                      <m:rPr>
+                        <m:sty m:val="p"/>
+                      </m:rPr>
+                      <a:rPr lang="en-US" altLang="ja-JP" i="1" dirty="0">
+                        <a:latin typeface="Cambria Math" panose="02040503050406030204" pitchFamily="18" charset="0"/>
+                      </a:rPr>
+                      <m:t>τ</m:t>
+                    </m:r>
+                  </m:oMath>
+                </a14:m>
+                <a:r>
+                  <a:rPr lang="en-US" altLang="ja-JP" dirty="0"/>
+                  <a:t> </a:t>
+                </a:r>
+                <a:endParaRPr kumimoji="1" lang="ja-JP" altLang="en-US" sz="2400" dirty="0"/>
+              </a:p>
+            </p:txBody>
+          </p:sp>
+        </mc:Choice>
+        <mc:Fallback>
+          <p:sp>
+            <p:nvSpPr>
+              <p:cNvPr id="3" name="コンテンツ プレースホルダー 2">
+                <a:extLst>
+                  <a:ext uri="{FF2B5EF4-FFF2-40B4-BE49-F238E27FC236}">
+                    <a16:creationId xmlns:a16="http://schemas.microsoft.com/office/drawing/2014/main" id="{C78B6FC6-44EC-4202-B97B-5E4E755A6F7D}"/>
+                  </a:ext>
+                </a:extLst>
+              </p:cNvPr>
+              <p:cNvSpPr>
+                <a:spLocks noGrp="1" noRot="1" noChangeAspect="1" noMove="1" noResize="1" noEditPoints="1" noAdjustHandles="1" noChangeArrowheads="1" noChangeShapeType="1" noTextEdit="1"/>
+              </p:cNvSpPr>
+              <p:nvPr>
+                <p:ph idx="1"/>
+              </p:nvPr>
+            </p:nvSpPr>
+            <p:spPr>
+              <a:xfrm>
+                <a:off x="164422" y="1355202"/>
+                <a:ext cx="11977456" cy="921273"/>
+              </a:xfrm>
+              <a:blipFill>
+                <a:blip r:embed="rId2"/>
+                <a:stretch>
+                  <a:fillRect l="-916" t="-10596" b="-12583"/>
+                </a:stretch>
+              </a:blipFill>
+            </p:spPr>
+            <p:txBody>
+              <a:bodyPr/>
+              <a:lstStyle/>
+              <a:p>
+                <a:r>
+                  <a:rPr lang="ja-JP" altLang="en-US">
+                    <a:noFill/>
+                  </a:rPr>
+                  <a:t> </a:t>
+                </a:r>
+              </a:p>
+            </p:txBody>
+          </p:sp>
+        </mc:Fallback>
+      </mc:AlternateContent>
+      <p:sp>
+        <p:nvSpPr>
+          <p:cNvPr id="4" name="スライド番号プレースホルダー 3">
+            <a:extLst>
+              <a:ext uri="{FF2B5EF4-FFF2-40B4-BE49-F238E27FC236}">
+                <a16:creationId xmlns:a16="http://schemas.microsoft.com/office/drawing/2014/main" id="{A1230171-8C6A-1C3F-11A9-54CFADF0FF8B}"/>
+              </a:ext>
+            </a:extLst>
+          </p:cNvPr>
+          <p:cNvSpPr>
+            <a:spLocks noGrp="1"/>
+          </p:cNvSpPr>
+          <p:nvPr>
+            <p:ph type="sldNum" sz="quarter" idx="12"/>
+          </p:nvPr>
+        </p:nvSpPr>
+        <p:spPr/>
+        <p:txBody>
+          <a:bodyPr/>
+          <a:lstStyle/>
+          <a:p>
+            <a:fld id="{05A07A33-D779-4A79-A49C-E26576C728D8}" type="slidenum">
+              <a:rPr lang="ja-JP" altLang="en-US" smtClean="0"/>
+              <a:pPr/>
+              <a:t>6</a:t>
+            </a:fld>
+            <a:endParaRPr lang="ja-JP" altLang="en-US" dirty="0">
+              <a:latin typeface="Calibri" panose="020F0502020204030204" pitchFamily="34" charset="0"/>
+              <a:cs typeface="Calibri" panose="020F0502020204030204" pitchFamily="34" charset="0"/>
+            </a:endParaRPr>
+          </a:p>
+        </p:txBody>
+      </p:sp>
+      <mc:AlternateContent xmlns:mc="http://schemas.openxmlformats.org/markup-compatibility/2006">
+        <mc:Choice xmlns:a14="http://schemas.microsoft.com/office/drawing/2010/main" Requires="a14">
+          <p:sp>
+            <p:nvSpPr>
+              <p:cNvPr id="13" name="コンテンツ プレースホルダー 2">
+                <a:extLst>
+                  <a:ext uri="{FF2B5EF4-FFF2-40B4-BE49-F238E27FC236}">
+                    <a16:creationId xmlns:a16="http://schemas.microsoft.com/office/drawing/2014/main" id="{B455E4A2-DB56-1C79-799B-9AF310F4E08E}"/>
+                  </a:ext>
+                </a:extLst>
+              </p:cNvPr>
+              <p:cNvSpPr txBox="1">
+                <a:spLocks/>
+              </p:cNvSpPr>
+              <p:nvPr/>
+            </p:nvSpPr>
+            <p:spPr>
+              <a:xfrm>
+                <a:off x="2033587" y="1815838"/>
+                <a:ext cx="8124825" cy="2967579"/>
+              </a:xfrm>
+              <a:prstGeom prst="rect">
+                <a:avLst/>
+              </a:prstGeom>
+            </p:spPr>
+            <p:txBody>
+              <a:bodyPr vert="horz" lIns="91440" tIns="45720" rIns="91440" bIns="45720" rtlCol="0">
+                <a:normAutofit/>
+              </a:bodyPr>
+              <a:lstStyle>
+                <a:lvl1pPr marL="228600" indent="-228600" algn="l" defTabSz="914400" rtl="0" eaLnBrk="1" latinLnBrk="0" hangingPunct="1">
+                  <a:lnSpc>
+                    <a:spcPct val="90000"/>
+                  </a:lnSpc>
+                  <a:spcBef>
+                    <a:spcPts val="1000"/>
+                  </a:spcBef>
+                  <a:buFont typeface="Arial" panose="020B0604020202020204" pitchFamily="34" charset="0"/>
+                  <a:buChar char="•"/>
+                  <a:defRPr kumimoji="1" sz="2800" kern="1200">
+                    <a:solidFill>
+                      <a:schemeClr val="tx1"/>
+                    </a:solidFill>
+                    <a:latin typeface="Calibri" panose="020F0502020204030204" pitchFamily="34" charset="0"/>
+                    <a:ea typeface="+mn-ea"/>
+                    <a:cs typeface="Calibri" panose="020F0502020204030204" pitchFamily="34" charset="0"/>
+                  </a:defRPr>
+                </a:lvl1pPr>
+                <a:lvl2pPr marL="685800" indent="-228600" algn="l" defTabSz="914400" rtl="0" eaLnBrk="1" latinLnBrk="0" hangingPunct="1">
+                  <a:lnSpc>
+                    <a:spcPct val="90000"/>
+                  </a:lnSpc>
+                  <a:spcBef>
+                    <a:spcPts val="500"/>
+                  </a:spcBef>
+                  <a:buFont typeface="Arial" panose="020B0604020202020204" pitchFamily="34" charset="0"/>
+                  <a:buChar char="•"/>
+                  <a:defRPr kumimoji="1" sz="2400" kern="1200">
+                    <a:solidFill>
+                      <a:schemeClr val="tx1"/>
+                    </a:solidFill>
+                    <a:latin typeface="Calibri" panose="020F0502020204030204" pitchFamily="34" charset="0"/>
+                    <a:ea typeface="+mn-ea"/>
+                    <a:cs typeface="Calibri" panose="020F0502020204030204" pitchFamily="34" charset="0"/>
+                  </a:defRPr>
+                </a:lvl2pPr>
+                <a:lvl3pPr marL="1143000" indent="-228600" algn="l" defTabSz="914400" rtl="0" eaLnBrk="1" latinLnBrk="0" hangingPunct="1">
+                  <a:lnSpc>
+                    <a:spcPct val="90000"/>
+                  </a:lnSpc>
+                  <a:spcBef>
+                    <a:spcPts val="500"/>
+                  </a:spcBef>
+                  <a:buFont typeface="Arial" panose="020B0604020202020204" pitchFamily="34" charset="0"/>
+                  <a:buChar char="•"/>
+                  <a:defRPr kumimoji="1" sz="2000" kern="1200">
+                    <a:solidFill>
+                      <a:schemeClr val="tx1"/>
+                    </a:solidFill>
+                    <a:latin typeface="Calibri" panose="020F0502020204030204" pitchFamily="34" charset="0"/>
+                    <a:ea typeface="+mn-ea"/>
+                    <a:cs typeface="Calibri" panose="020F0502020204030204" pitchFamily="34" charset="0"/>
+                  </a:defRPr>
+                </a:lvl3pPr>
+                <a:lvl4pPr marL="1600200" indent="-228600" algn="l" defTabSz="914400" rtl="0" eaLnBrk="1" latinLnBrk="0" hangingPunct="1">
+                  <a:lnSpc>
+                    <a:spcPct val="90000"/>
+                  </a:lnSpc>
+                  <a:spcBef>
+                    <a:spcPts val="500"/>
+                  </a:spcBef>
+                  <a:buFont typeface="Arial" panose="020B0604020202020204" pitchFamily="34" charset="0"/>
+                  <a:buChar char="•"/>
+                  <a:defRPr kumimoji="1" sz="1800" kern="1200">
+                    <a:solidFill>
+                      <a:schemeClr val="tx1"/>
+                    </a:solidFill>
+                    <a:latin typeface="Calibri" panose="020F0502020204030204" pitchFamily="34" charset="0"/>
+                    <a:ea typeface="+mn-ea"/>
+                    <a:cs typeface="Calibri" panose="020F0502020204030204" pitchFamily="34" charset="0"/>
+                  </a:defRPr>
+                </a:lvl4pPr>
+                <a:lvl5pPr marL="2057400" indent="-228600" algn="l" defTabSz="914400" rtl="0" eaLnBrk="1" latinLnBrk="0" hangingPunct="1">
+                  <a:lnSpc>
+                    <a:spcPct val="90000"/>
+                  </a:lnSpc>
+                  <a:spcBef>
+                    <a:spcPts val="500"/>
+                  </a:spcBef>
+                  <a:buFont typeface="Arial" panose="020B0604020202020204" pitchFamily="34" charset="0"/>
+                  <a:buChar char="•"/>
+                  <a:defRPr kumimoji="1" sz="1800" kern="1200">
+                    <a:solidFill>
+                      <a:schemeClr val="tx1"/>
+                    </a:solidFill>
+                    <a:latin typeface="Calibri" panose="020F0502020204030204" pitchFamily="34" charset="0"/>
+                    <a:ea typeface="+mn-ea"/>
+                    <a:cs typeface="Calibri" panose="020F0502020204030204" pitchFamily="34" charset="0"/>
+                  </a:defRPr>
+                </a:lvl5pPr>
+                <a:lvl6pPr marL="2514600" indent="-228600" algn="l" defTabSz="914400" rtl="0" eaLnBrk="1" latinLnBrk="0" hangingPunct="1">
+                  <a:lnSpc>
+                    <a:spcPct val="90000"/>
+                  </a:lnSpc>
+                  <a:spcBef>
+                    <a:spcPts val="500"/>
+                  </a:spcBef>
+                  <a:buFont typeface="Arial" panose="020B0604020202020204" pitchFamily="34" charset="0"/>
+                  <a:buChar char="•"/>
+                  <a:defRPr kumimoji="1" sz="1800" kern="1200">
+                    <a:solidFill>
+                      <a:schemeClr val="tx1"/>
+                    </a:solidFill>
+                    <a:latin typeface="+mn-lt"/>
+                    <a:ea typeface="+mn-ea"/>
+                    <a:cs typeface="+mn-cs"/>
+                  </a:defRPr>
+                </a:lvl6pPr>
+                <a:lvl7pPr marL="2971800" indent="-228600" algn="l" defTabSz="914400" rtl="0" eaLnBrk="1" latinLnBrk="0" hangingPunct="1">
+                  <a:lnSpc>
+                    <a:spcPct val="90000"/>
+                  </a:lnSpc>
+                  <a:spcBef>
+                    <a:spcPts val="500"/>
+                  </a:spcBef>
+                  <a:buFont typeface="Arial" panose="020B0604020202020204" pitchFamily="34" charset="0"/>
+                  <a:buChar char="•"/>
+                  <a:defRPr kumimoji="1" sz="1800" kern="1200">
+                    <a:solidFill>
+                      <a:schemeClr val="tx1"/>
+                    </a:solidFill>
+                    <a:latin typeface="+mn-lt"/>
+                    <a:ea typeface="+mn-ea"/>
+                    <a:cs typeface="+mn-cs"/>
+                  </a:defRPr>
+                </a:lvl7pPr>
+                <a:lvl8pPr marL="3429000" indent="-228600" algn="l" defTabSz="914400" rtl="0" eaLnBrk="1" latinLnBrk="0" hangingPunct="1">
+                  <a:lnSpc>
+                    <a:spcPct val="90000"/>
+                  </a:lnSpc>
+                  <a:spcBef>
+                    <a:spcPts val="500"/>
+                  </a:spcBef>
+                  <a:buFont typeface="Arial" panose="020B0604020202020204" pitchFamily="34" charset="0"/>
+                  <a:buChar char="•"/>
+                  <a:defRPr kumimoji="1" sz="1800" kern="1200">
+                    <a:solidFill>
+                      <a:schemeClr val="tx1"/>
+                    </a:solidFill>
+                    <a:latin typeface="+mn-lt"/>
+                    <a:ea typeface="+mn-ea"/>
+                    <a:cs typeface="+mn-cs"/>
+                  </a:defRPr>
+                </a:lvl8pPr>
+                <a:lvl9pPr marL="3886200" indent="-228600" algn="l" defTabSz="914400" rtl="0" eaLnBrk="1" latinLnBrk="0" hangingPunct="1">
+                  <a:lnSpc>
+                    <a:spcPct val="90000"/>
+                  </a:lnSpc>
+                  <a:spcBef>
+                    <a:spcPts val="500"/>
+                  </a:spcBef>
+                  <a:buFont typeface="Arial" panose="020B0604020202020204" pitchFamily="34" charset="0"/>
+                  <a:buChar char="•"/>
+                  <a:defRPr kumimoji="1" sz="1800" kern="1200">
+                    <a:solidFill>
+                      <a:schemeClr val="tx1"/>
+                    </a:solidFill>
+                    <a:latin typeface="+mn-lt"/>
+                    <a:ea typeface="+mn-ea"/>
+                    <a:cs typeface="+mn-cs"/>
+                  </a:defRPr>
+                </a:lvl9pPr>
+              </a:lstStyle>
+              <a:p>
+                <a:pPr marL="0" indent="0">
+                  <a:lnSpc>
+                    <a:spcPct val="150000"/>
+                  </a:lnSpc>
+                  <a:buNone/>
+                </a:pPr>
+                <a14:m>
+                  <m:oMathPara xmlns:m="http://schemas.openxmlformats.org/officeDocument/2006/math">
+                    <m:oMathParaPr>
+                      <m:jc m:val="centerGroup"/>
+                    </m:oMathParaPr>
+                    <m:oMath xmlns:m="http://schemas.openxmlformats.org/officeDocument/2006/math">
+                      <m:r>
+                        <m:rPr>
+                          <m:sty m:val="p"/>
+                        </m:rPr>
+                        <a:rPr lang="en-US" altLang="ja-JP" sz="2400">
+                          <a:latin typeface="Cambria Math" panose="02040503050406030204" pitchFamily="18" charset="0"/>
+                        </a:rPr>
+                        <m:t>SN</m:t>
+                      </m:r>
+                      <m:sSub>
+                        <m:sSubPr>
+                          <m:ctrlPr>
+                            <a:rPr lang="en-US" altLang="ja-JP" sz="2400" i="1">
+                              <a:latin typeface="Cambria Math" panose="02040503050406030204" pitchFamily="18" charset="0"/>
+                            </a:rPr>
+                          </m:ctrlPr>
+                        </m:sSubPr>
+                        <m:e>
+                          <m:r>
+                            <m:rPr>
+                              <m:sty m:val="p"/>
+                            </m:rPr>
+                            <a:rPr lang="en-US" altLang="ja-JP" sz="2400">
+                              <a:latin typeface="Cambria Math" panose="02040503050406030204" pitchFamily="18" charset="0"/>
+                            </a:rPr>
+                            <m:t>R</m:t>
+                          </m:r>
+                        </m:e>
+                        <m:sub>
+                          <m:r>
+                            <m:rPr>
+                              <m:sty m:val="p"/>
+                            </m:rPr>
+                            <a:rPr lang="en-US" altLang="ja-JP" sz="2400">
+                              <a:latin typeface="Cambria Math" panose="02040503050406030204" pitchFamily="18" charset="0"/>
+                            </a:rPr>
+                            <m:t>VP</m:t>
+                          </m:r>
+                        </m:sub>
+                      </m:sSub>
+                      <m:r>
+                        <a:rPr lang="en-US" altLang="ja-JP" sz="2400" b="0" i="1" smtClean="0">
+                          <a:latin typeface="Cambria Math" panose="02040503050406030204" pitchFamily="18" charset="0"/>
+                        </a:rPr>
+                        <m:t> := </m:t>
+                      </m:r>
+                      <m:f>
+                        <m:fPr>
+                          <m:ctrlPr>
+                            <a:rPr lang="en-US" altLang="ja-JP" sz="2400" b="0" i="1" smtClean="0">
+                              <a:latin typeface="Cambria Math" panose="02040503050406030204" pitchFamily="18" charset="0"/>
+                            </a:rPr>
+                          </m:ctrlPr>
+                        </m:fPr>
+                        <m:num>
+                          <m:bar>
+                            <m:barPr>
+                              <m:pos m:val="top"/>
+                              <m:ctrlPr>
+                                <a:rPr lang="en-US" altLang="ja-JP" sz="2400" b="0" i="1" smtClean="0">
+                                  <a:latin typeface="Cambria Math" panose="02040503050406030204" pitchFamily="18" charset="0"/>
+                                </a:rPr>
+                              </m:ctrlPr>
+                            </m:barPr>
+                            <m:e>
+                              <m:r>
+                                <m:rPr>
+                                  <m:sty m:val="p"/>
+                                </m:rPr>
+                                <a:rPr lang="en-US" altLang="ja-JP" sz="2400" b="0" i="1" smtClean="0">
+                                  <a:latin typeface="Cambria Math" panose="02040503050406030204" pitchFamily="18" charset="0"/>
+                                </a:rPr>
+                                <m:t>α</m:t>
+                              </m:r>
+                            </m:e>
+                          </m:bar>
+                          <m:sSup>
+                            <m:sSupPr>
+                              <m:ctrlPr>
+                                <a:rPr lang="en-US" altLang="ja-JP" sz="2400" b="0" i="1" smtClean="0">
+                                  <a:latin typeface="Cambria Math" panose="02040503050406030204" pitchFamily="18" charset="0"/>
+                                </a:rPr>
+                              </m:ctrlPr>
+                            </m:sSupPr>
+                            <m:e>
+                              <m:d>
+                                <m:dPr>
+                                  <m:ctrlPr>
+                                    <a:rPr lang="en-US" altLang="ja-JP" sz="2400" b="0" i="1" smtClean="0">
+                                      <a:latin typeface="Cambria Math" panose="02040503050406030204" pitchFamily="18" charset="0"/>
+                                    </a:rPr>
+                                  </m:ctrlPr>
+                                </m:dPr>
+                                <m:e>
+                                  <m:r>
+                                    <a:rPr lang="en-US" altLang="ja-JP" sz="2400" b="0" i="1" smtClean="0">
+                                      <a:latin typeface="Cambria Math" panose="02040503050406030204" pitchFamily="18" charset="0"/>
+                                    </a:rPr>
+                                    <m:t>𝑡</m:t>
+                                  </m:r>
+                                </m:e>
+                              </m:d>
+                            </m:e>
+                            <m:sup>
+                              <m:r>
+                                <a:rPr lang="en-US" altLang="ja-JP" sz="2400" b="0" i="1" smtClean="0">
+                                  <a:latin typeface="Cambria Math" panose="02040503050406030204" pitchFamily="18" charset="0"/>
+                                </a:rPr>
+                                <m:t>2</m:t>
+                              </m:r>
+                            </m:sup>
+                          </m:sSup>
+                        </m:num>
+                        <m:den>
+                          <m:sSub>
+                            <m:sSubPr>
+                              <m:ctrlPr>
+                                <a:rPr lang="en-US" altLang="ja-JP" sz="2400" b="0" i="1" smtClean="0">
+                                  <a:latin typeface="Cambria Math" panose="02040503050406030204" pitchFamily="18" charset="0"/>
+                                </a:rPr>
+                              </m:ctrlPr>
+                            </m:sSubPr>
+                            <m:e>
+                              <m:r>
+                                <a:rPr lang="en-US" altLang="ja-JP" sz="2400" b="0" i="1" smtClean="0">
+                                  <a:latin typeface="Cambria Math" panose="02040503050406030204" pitchFamily="18" charset="0"/>
+                                </a:rPr>
+                                <m:t>𝜎</m:t>
+                              </m:r>
+                            </m:e>
+                            <m:sub>
+                              <m:r>
+                                <m:rPr>
+                                  <m:sty m:val="p"/>
+                                </m:rPr>
+                                <a:rPr lang="en-US" altLang="ja-JP" sz="2400" b="0" i="0" smtClean="0">
+                                  <a:latin typeface="Cambria Math" panose="02040503050406030204" pitchFamily="18" charset="0"/>
+                                </a:rPr>
+                                <m:t>VP</m:t>
+                              </m:r>
+                            </m:sub>
+                          </m:sSub>
+                          <m:sSup>
+                            <m:sSupPr>
+                              <m:ctrlPr>
+                                <a:rPr lang="en-US" altLang="ja-JP" sz="2400" b="0" i="1" smtClean="0">
+                                  <a:latin typeface="Cambria Math" panose="02040503050406030204" pitchFamily="18" charset="0"/>
+                                </a:rPr>
+                              </m:ctrlPr>
+                            </m:sSupPr>
+                            <m:e>
+                              <m:d>
+                                <m:dPr>
+                                  <m:ctrlPr>
+                                    <a:rPr lang="en-US" altLang="ja-JP" sz="2400" b="0" i="1" smtClean="0">
+                                      <a:latin typeface="Cambria Math" panose="02040503050406030204" pitchFamily="18" charset="0"/>
+                                    </a:rPr>
+                                  </m:ctrlPr>
+                                </m:dPr>
+                                <m:e>
+                                  <m:r>
+                                    <a:rPr lang="en-US" altLang="ja-JP" sz="2400" b="0" i="1" smtClean="0">
+                                      <a:latin typeface="Cambria Math" panose="02040503050406030204" pitchFamily="18" charset="0"/>
+                                    </a:rPr>
+                                    <m:t>𝑡</m:t>
+                                  </m:r>
+                                </m:e>
+                              </m:d>
+                            </m:e>
+                            <m:sup>
+                              <m:r>
+                                <a:rPr lang="en-US" altLang="ja-JP" sz="2400" b="0" i="1" smtClean="0">
+                                  <a:latin typeface="Cambria Math" panose="02040503050406030204" pitchFamily="18" charset="0"/>
+                                </a:rPr>
+                                <m:t>2</m:t>
+                              </m:r>
+                            </m:sup>
+                          </m:sSup>
+                        </m:den>
+                      </m:f>
+                    </m:oMath>
+                  </m:oMathPara>
+                </a14:m>
+                <a:br>
+                  <a:rPr lang="en-US" altLang="ja-JP" sz="2400" b="0" i="1" dirty="0">
+                    <a:latin typeface="Cambria Math" panose="02040503050406030204" pitchFamily="18" charset="0"/>
+                  </a:rPr>
+                </a:br>
+                <a:endParaRPr lang="en-US" altLang="ja-JP" sz="2400" b="0" i="1" dirty="0">
+                  <a:latin typeface="Cambria Math" panose="02040503050406030204" pitchFamily="18" charset="0"/>
+                </a:endParaRPr>
+              </a:p>
+              <a:p>
+                <a:pPr marL="0" indent="0">
+                  <a:lnSpc>
+                    <a:spcPct val="150000"/>
+                  </a:lnSpc>
+                  <a:buNone/>
+                </a:pPr>
+                <a14:m>
+                  <m:oMathPara xmlns:m="http://schemas.openxmlformats.org/officeDocument/2006/math">
+                    <m:oMathParaPr>
+                      <m:jc m:val="centerGroup"/>
+                    </m:oMathParaPr>
+                    <m:oMath xmlns:m="http://schemas.openxmlformats.org/officeDocument/2006/math">
+                      <m:r>
+                        <m:rPr>
+                          <m:sty m:val="p"/>
+                        </m:rPr>
+                        <a:rPr lang="en-US" altLang="ja-JP" sz="2400">
+                          <a:latin typeface="Cambria Math" panose="02040503050406030204" pitchFamily="18" charset="0"/>
+                        </a:rPr>
+                        <m:t>SN</m:t>
+                      </m:r>
+                      <m:sSub>
+                        <m:sSubPr>
+                          <m:ctrlPr>
+                            <a:rPr lang="en-US" altLang="ja-JP" sz="2400" i="1">
+                              <a:latin typeface="Cambria Math" panose="02040503050406030204" pitchFamily="18" charset="0"/>
+                            </a:rPr>
+                          </m:ctrlPr>
+                        </m:sSubPr>
+                        <m:e>
+                          <m:r>
+                            <m:rPr>
+                              <m:sty m:val="p"/>
+                            </m:rPr>
+                            <a:rPr lang="en-US" altLang="ja-JP" sz="2400">
+                              <a:latin typeface="Cambria Math" panose="02040503050406030204" pitchFamily="18" charset="0"/>
+                            </a:rPr>
+                            <m:t>R</m:t>
+                          </m:r>
+                        </m:e>
+                        <m:sub>
+                          <m:r>
+                            <m:rPr>
+                              <m:sty m:val="p"/>
+                            </m:rPr>
+                            <a:rPr lang="en-US" altLang="ja-JP" sz="2400">
+                              <a:latin typeface="Cambria Math" panose="02040503050406030204" pitchFamily="18" charset="0"/>
+                            </a:rPr>
+                            <m:t>MC</m:t>
+                          </m:r>
+                        </m:sub>
+                      </m:sSub>
+                      <m:r>
+                        <a:rPr lang="en-US" altLang="ja-JP" sz="2400" b="0" i="1" smtClean="0">
+                          <a:latin typeface="Cambria Math" panose="02040503050406030204" pitchFamily="18" charset="0"/>
+                        </a:rPr>
+                        <m:t> := </m:t>
+                      </m:r>
+                      <m:f>
+                        <m:fPr>
+                          <m:ctrlPr>
+                            <a:rPr lang="en-US" altLang="ja-JP" sz="2400" b="0" i="1" smtClean="0">
+                              <a:latin typeface="Cambria Math" panose="02040503050406030204" pitchFamily="18" charset="0"/>
+                            </a:rPr>
+                          </m:ctrlPr>
+                        </m:fPr>
+                        <m:num>
+                          <m:r>
+                            <m:rPr>
+                              <m:sty m:val="p"/>
+                            </m:rPr>
+                            <a:rPr lang="en-US" altLang="ja-JP" sz="2400" b="0" i="1" smtClean="0">
+                              <a:latin typeface="Cambria Math" panose="02040503050406030204" pitchFamily="18" charset="0"/>
+                            </a:rPr>
+                            <m:t>κ</m:t>
+                          </m:r>
+                        </m:num>
+                        <m:den>
+                          <m:sSup>
+                            <m:sSupPr>
+                              <m:ctrlPr>
+                                <a:rPr lang="en-US" altLang="ja-JP" sz="2400" b="0" i="1" smtClean="0">
+                                  <a:latin typeface="Cambria Math" panose="02040503050406030204" pitchFamily="18" charset="0"/>
+                                </a:rPr>
+                              </m:ctrlPr>
+                            </m:sSupPr>
+                            <m:e>
+                              <m:r>
+                                <a:rPr lang="en-US" altLang="ja-JP" sz="2400" b="0" i="1" smtClean="0">
+                                  <a:latin typeface="Cambria Math" panose="02040503050406030204" pitchFamily="18" charset="0"/>
+                                </a:rPr>
+                                <m:t>𝜎</m:t>
+                              </m:r>
+                            </m:e>
+                            <m:sup>
+                              <m:r>
+                                <a:rPr lang="en-US" altLang="ja-JP" sz="2400" b="0" i="1" smtClean="0">
+                                  <a:latin typeface="Cambria Math" panose="02040503050406030204" pitchFamily="18" charset="0"/>
+                                </a:rPr>
+                                <m:t>2</m:t>
+                              </m:r>
+                            </m:sup>
+                          </m:sSup>
+                          <m:sSup>
+                            <m:sSupPr>
+                              <m:ctrlPr>
+                                <a:rPr lang="en-US" altLang="ja-JP" sz="2400" b="0" i="1" smtClean="0">
+                                  <a:latin typeface="Cambria Math" panose="02040503050406030204" pitchFamily="18" charset="0"/>
+                                </a:rPr>
+                              </m:ctrlPr>
+                            </m:sSupPr>
+                            <m:e>
+                              <m:r>
+                                <a:rPr lang="en-US" altLang="ja-JP" sz="2400" b="0" i="1" smtClean="0">
+                                  <a:latin typeface="Cambria Math" panose="02040503050406030204" pitchFamily="18" charset="0"/>
+                                </a:rPr>
+                                <m:t>𝜏</m:t>
+                              </m:r>
+                            </m:e>
+                            <m:sup>
+                              <m:r>
+                                <a:rPr lang="en-US" altLang="ja-JP" sz="2400" b="0" i="1" smtClean="0">
+                                  <a:latin typeface="Cambria Math" panose="02040503050406030204" pitchFamily="18" charset="0"/>
+                                </a:rPr>
+                                <m:t>2</m:t>
+                              </m:r>
+                            </m:sup>
+                          </m:sSup>
+                        </m:den>
+                      </m:f>
+                    </m:oMath>
+                  </m:oMathPara>
+                </a14:m>
+                <a:endParaRPr lang="en-US" altLang="ja-JP" sz="2400" b="0" i="1" dirty="0">
+                  <a:latin typeface="Cambria Math" panose="02040503050406030204" pitchFamily="18" charset="0"/>
+                </a:endParaRPr>
+              </a:p>
+              <a:p>
+                <a:pPr marL="0" indent="0">
+                  <a:lnSpc>
+                    <a:spcPct val="150000"/>
+                  </a:lnSpc>
+                  <a:buNone/>
+                </a:pPr>
+                <a14:m>
+                  <m:oMathPara xmlns:m="http://schemas.openxmlformats.org/officeDocument/2006/math">
+                    <m:oMathParaPr>
+                      <m:jc m:val="centerGroup"/>
+                    </m:oMathParaPr>
+                    <m:oMath xmlns:m="http://schemas.openxmlformats.org/officeDocument/2006/math">
+                      <m:sSub>
+                        <m:sSubPr>
+                          <m:ctrlPr>
+                            <a:rPr lang="en-US" altLang="ja-JP" sz="2400" b="0" i="1" smtClean="0">
+                              <a:latin typeface="Cambria Math" panose="02040503050406030204" pitchFamily="18" charset="0"/>
+                            </a:rPr>
+                          </m:ctrlPr>
+                        </m:sSubPr>
+                        <m:e>
+                          <m:r>
+                            <a:rPr lang="en-US" altLang="ja-JP" sz="2400" b="0" i="1" smtClean="0">
+                              <a:latin typeface="Cambria Math" panose="02040503050406030204" pitchFamily="18" charset="0"/>
+                            </a:rPr>
+                            <m:t>𝜆</m:t>
+                          </m:r>
+                        </m:e>
+                        <m:sub>
+                          <m:r>
+                            <a:rPr lang="en-US" altLang="ja-JP" sz="2400" b="0" i="1" smtClean="0">
+                              <a:latin typeface="Cambria Math" panose="02040503050406030204" pitchFamily="18" charset="0"/>
+                            </a:rPr>
+                            <m:t>𝑑𝑖𝑓𝑓</m:t>
+                          </m:r>
+                        </m:sub>
+                      </m:sSub>
+                      <m:r>
+                        <a:rPr lang="en-US" altLang="ja-JP" sz="2400" b="0" i="1" smtClean="0">
+                          <a:latin typeface="Cambria Math" panose="02040503050406030204" pitchFamily="18" charset="0"/>
+                        </a:rPr>
+                        <m:t>(</m:t>
+                      </m:r>
+                      <m:r>
+                        <m:rPr>
+                          <m:sty m:val="p"/>
+                        </m:rPr>
+                        <a:rPr lang="en-US" altLang="ja-JP" sz="2400" b="0" i="1" smtClean="0">
+                          <a:latin typeface="Cambria Math" panose="02040503050406030204" pitchFamily="18" charset="0"/>
+                        </a:rPr>
+                        <m:t>t</m:t>
+                      </m:r>
+                      <m:r>
+                        <a:rPr lang="en-US" altLang="ja-JP" sz="2400" b="0" i="1" smtClean="0">
+                          <a:latin typeface="Cambria Math" panose="02040503050406030204" pitchFamily="18" charset="0"/>
+                        </a:rPr>
+                        <m:t>) := </m:t>
+                      </m:r>
+                      <m:r>
+                        <m:rPr>
+                          <m:sty m:val="p"/>
+                        </m:rPr>
+                        <a:rPr lang="en-US" altLang="ja-JP" sz="2400" b="0" i="1" smtClean="0">
+                          <a:latin typeface="Cambria Math" panose="02040503050406030204" pitchFamily="18" charset="0"/>
+                        </a:rPr>
+                        <m:t>log</m:t>
+                      </m:r>
+                      <m:r>
+                        <m:rPr>
+                          <m:sty m:val="p"/>
+                        </m:rPr>
+                        <a:rPr lang="en-US" altLang="ja-JP" sz="2400" b="0" i="0" smtClean="0">
+                          <a:latin typeface="Cambria Math" panose="02040503050406030204" pitchFamily="18" charset="0"/>
+                        </a:rPr>
+                        <m:t>SN</m:t>
+                      </m:r>
+                      <m:sSub>
+                        <m:sSubPr>
+                          <m:ctrlPr>
+                            <a:rPr lang="en-US" altLang="ja-JP" sz="2400" b="0" smtClean="0">
+                              <a:latin typeface="Cambria Math" panose="02040503050406030204" pitchFamily="18" charset="0"/>
+                            </a:rPr>
+                          </m:ctrlPr>
+                        </m:sSubPr>
+                        <m:e>
+                          <m:r>
+                            <m:rPr>
+                              <m:sty m:val="p"/>
+                            </m:rPr>
+                            <a:rPr lang="en-US" altLang="ja-JP" sz="2400" b="0" i="0" smtClean="0">
+                              <a:latin typeface="Cambria Math" panose="02040503050406030204" pitchFamily="18" charset="0"/>
+                            </a:rPr>
+                            <m:t>R</m:t>
+                          </m:r>
+                        </m:e>
+                        <m:sub>
+                          <m:r>
+                            <m:rPr>
+                              <m:sty m:val="p"/>
+                            </m:rPr>
+                            <a:rPr lang="en-US" altLang="ja-JP" sz="2400" b="0" i="0" smtClean="0">
+                              <a:latin typeface="Cambria Math" panose="02040503050406030204" pitchFamily="18" charset="0"/>
+                            </a:rPr>
+                            <m:t>VP</m:t>
+                          </m:r>
+                        </m:sub>
+                      </m:sSub>
+                      <m:r>
+                        <a:rPr lang="en-US" altLang="ja-JP" sz="2400" b="0" i="1" smtClean="0">
+                          <a:latin typeface="Cambria Math" panose="02040503050406030204" pitchFamily="18" charset="0"/>
+                        </a:rPr>
+                        <m:t>(</m:t>
+                      </m:r>
+                      <m:r>
+                        <m:rPr>
+                          <m:sty m:val="p"/>
+                        </m:rPr>
+                        <a:rPr lang="en-US" altLang="ja-JP" sz="2400" b="0" i="1" smtClean="0">
+                          <a:latin typeface="Cambria Math" panose="02040503050406030204" pitchFamily="18" charset="0"/>
+                        </a:rPr>
+                        <m:t>t</m:t>
+                      </m:r>
+                      <m:r>
+                        <a:rPr lang="en-US" altLang="ja-JP" sz="2400" b="0" i="1" smtClean="0">
+                          <a:latin typeface="Cambria Math" panose="02040503050406030204" pitchFamily="18" charset="0"/>
+                        </a:rPr>
+                        <m:t>) , </m:t>
+                      </m:r>
+                      <m:r>
+                        <a:rPr lang="ja-JP" altLang="en-US" sz="2400" i="1">
+                          <a:latin typeface="Cambria Math" panose="02040503050406030204" pitchFamily="18" charset="0"/>
+                        </a:rPr>
+                        <m:t>　</m:t>
+                      </m:r>
+                      <m:sSub>
+                        <m:sSubPr>
+                          <m:ctrlPr>
+                            <a:rPr lang="en-US" altLang="ja-JP" sz="2400" b="0" i="1" smtClean="0">
+                              <a:latin typeface="Cambria Math" panose="02040503050406030204" pitchFamily="18" charset="0"/>
+                            </a:rPr>
+                          </m:ctrlPr>
+                        </m:sSubPr>
+                        <m:e>
+                          <m:r>
+                            <a:rPr lang="en-US" altLang="ja-JP" sz="2400" b="0" i="1" smtClean="0">
+                              <a:latin typeface="Cambria Math" panose="02040503050406030204" pitchFamily="18" charset="0"/>
+                            </a:rPr>
+                            <m:t>𝜆</m:t>
+                          </m:r>
+                        </m:e>
+                        <m:sub>
+                          <m:r>
+                            <a:rPr lang="en-US" altLang="ja-JP" sz="2400" b="0" i="1" smtClean="0">
+                              <a:latin typeface="Cambria Math" panose="02040503050406030204" pitchFamily="18" charset="0"/>
+                            </a:rPr>
+                            <m:t>𝑀</m:t>
+                          </m:r>
+                          <m:r>
+                            <m:rPr>
+                              <m:sty m:val="p"/>
+                            </m:rPr>
+                            <a:rPr lang="en-US" altLang="ja-JP" sz="2400" b="0" i="1" smtClean="0">
+                              <a:latin typeface="Cambria Math" panose="02040503050406030204" pitchFamily="18" charset="0"/>
+                            </a:rPr>
+                            <m:t>C</m:t>
+                          </m:r>
+                        </m:sub>
+                      </m:sSub>
+                      <m:r>
+                        <a:rPr lang="en-US" altLang="ja-JP" sz="2400" b="0" i="1" smtClean="0">
+                          <a:latin typeface="Cambria Math" panose="02040503050406030204" pitchFamily="18" charset="0"/>
+                        </a:rPr>
+                        <m:t>(</m:t>
+                      </m:r>
+                      <m:r>
+                        <m:rPr>
+                          <m:sty m:val="p"/>
+                        </m:rPr>
+                        <a:rPr lang="en-US" altLang="ja-JP" sz="2400" b="0" i="1" smtClean="0">
+                          <a:latin typeface="Cambria Math" panose="02040503050406030204" pitchFamily="18" charset="0"/>
+                        </a:rPr>
+                        <m:t>τ</m:t>
+                      </m:r>
+                      <m:r>
+                        <a:rPr lang="en-US" altLang="ja-JP" sz="2400" b="0" i="1" smtClean="0">
+                          <a:latin typeface="Cambria Math" panose="02040503050406030204" pitchFamily="18" charset="0"/>
+                        </a:rPr>
+                        <m:t>) ≔</m:t>
+                      </m:r>
+                      <m:r>
+                        <m:rPr>
+                          <m:sty m:val="p"/>
+                        </m:rPr>
+                        <a:rPr lang="en-US" altLang="ja-JP" sz="2400" i="1">
+                          <a:latin typeface="Cambria Math" panose="02040503050406030204" pitchFamily="18" charset="0"/>
+                        </a:rPr>
+                        <m:t>log</m:t>
+                      </m:r>
+                      <m:r>
+                        <m:rPr>
+                          <m:sty m:val="p"/>
+                        </m:rPr>
+                        <a:rPr lang="en-US" altLang="ja-JP" sz="2400" i="0" smtClean="0">
+                          <a:latin typeface="Cambria Math" panose="02040503050406030204" pitchFamily="18" charset="0"/>
+                        </a:rPr>
+                        <m:t>SN</m:t>
+                      </m:r>
+                      <m:sSub>
+                        <m:sSubPr>
+                          <m:ctrlPr>
+                            <a:rPr lang="en-US" altLang="ja-JP" sz="2400" b="0" smtClean="0">
+                              <a:latin typeface="Cambria Math" panose="02040503050406030204" pitchFamily="18" charset="0"/>
+                            </a:rPr>
+                          </m:ctrlPr>
+                        </m:sSubPr>
+                        <m:e>
+                          <m:r>
+                            <m:rPr>
+                              <m:sty m:val="p"/>
+                            </m:rPr>
+                            <a:rPr lang="en-US" altLang="ja-JP" sz="2400" i="0">
+                              <a:latin typeface="Cambria Math" panose="02040503050406030204" pitchFamily="18" charset="0"/>
+                            </a:rPr>
+                            <m:t>R</m:t>
+                          </m:r>
+                        </m:e>
+                        <m:sub>
+                          <m:r>
+                            <m:rPr>
+                              <m:sty m:val="p"/>
+                            </m:rPr>
+                            <a:rPr lang="en-US" altLang="ja-JP" sz="2400" b="0" i="0" smtClean="0">
+                              <a:latin typeface="Cambria Math" panose="02040503050406030204" pitchFamily="18" charset="0"/>
+                            </a:rPr>
+                            <m:t>MC</m:t>
+                          </m:r>
+                        </m:sub>
+                      </m:sSub>
+                      <m:r>
+                        <a:rPr lang="en-US" altLang="ja-JP" sz="2400" i="1">
+                          <a:latin typeface="Cambria Math" panose="02040503050406030204" pitchFamily="18" charset="0"/>
+                        </a:rPr>
+                        <m:t>(</m:t>
+                      </m:r>
+                      <m:r>
+                        <m:rPr>
+                          <m:sty m:val="p"/>
+                        </m:rPr>
+                        <a:rPr lang="en-US" altLang="ja-JP" sz="2400" b="0" i="1" smtClean="0">
+                          <a:latin typeface="Cambria Math" panose="02040503050406030204" pitchFamily="18" charset="0"/>
+                        </a:rPr>
+                        <m:t>τ</m:t>
+                      </m:r>
+                      <m:r>
+                        <a:rPr lang="en-US" altLang="ja-JP" sz="2400" i="1">
+                          <a:latin typeface="Cambria Math" panose="02040503050406030204" pitchFamily="18" charset="0"/>
+                        </a:rPr>
+                        <m:t>)</m:t>
+                      </m:r>
+                      <m:r>
+                        <a:rPr lang="en-US" altLang="ja-JP" sz="2400" b="0" i="0" smtClean="0">
+                          <a:latin typeface="Cambria Math" panose="02040503050406030204" pitchFamily="18" charset="0"/>
+                        </a:rPr>
+                        <m:t> </m:t>
+                      </m:r>
+                    </m:oMath>
+                  </m:oMathPara>
+                </a14:m>
+                <a:endParaRPr lang="ja-JP" altLang="en-US" sz="2400" dirty="0"/>
+              </a:p>
+            </p:txBody>
+          </p:sp>
+        </mc:Choice>
+        <mc:Fallback>
+          <p:sp>
+            <p:nvSpPr>
+              <p:cNvPr id="13" name="コンテンツ プレースホルダー 2">
+                <a:extLst>
+                  <a:ext uri="{FF2B5EF4-FFF2-40B4-BE49-F238E27FC236}">
+                    <a16:creationId xmlns:a16="http://schemas.microsoft.com/office/drawing/2014/main" id="{B455E4A2-DB56-1C79-799B-9AF310F4E08E}"/>
+                  </a:ext>
+                </a:extLst>
+              </p:cNvPr>
+              <p:cNvSpPr txBox="1">
+                <a:spLocks noRot="1" noChangeAspect="1" noMove="1" noResize="1" noEditPoints="1" noAdjustHandles="1" noChangeArrowheads="1" noChangeShapeType="1" noTextEdit="1"/>
+              </p:cNvSpPr>
+              <p:nvPr/>
+            </p:nvSpPr>
+            <p:spPr>
+              <a:xfrm>
+                <a:off x="2033587" y="1815838"/>
+                <a:ext cx="8124825" cy="2967579"/>
+              </a:xfrm>
+              <a:prstGeom prst="rect">
+                <a:avLst/>
+              </a:prstGeom>
+              <a:blipFill>
+                <a:blip r:embed="rId3"/>
+                <a:stretch>
+                  <a:fillRect/>
+                </a:stretch>
+              </a:blipFill>
+            </p:spPr>
+            <p:txBody>
+              <a:bodyPr/>
+              <a:lstStyle/>
+              <a:p>
+                <a:r>
+                  <a:rPr lang="ja-JP" altLang="en-US">
+                    <a:noFill/>
+                  </a:rPr>
+                  <a:t> </a:t>
+                </a:r>
+              </a:p>
+            </p:txBody>
+          </p:sp>
+        </mc:Fallback>
+      </mc:AlternateContent>
+      <mc:AlternateContent xmlns:mc="http://schemas.openxmlformats.org/markup-compatibility/2006">
+        <mc:Choice xmlns:a14="http://schemas.microsoft.com/office/drawing/2010/main" Requires="a14">
+          <p:sp>
+            <p:nvSpPr>
+              <p:cNvPr id="14" name="コンテンツ プレースホルダー 2">
+                <a:extLst>
+                  <a:ext uri="{FF2B5EF4-FFF2-40B4-BE49-F238E27FC236}">
+                    <a16:creationId xmlns:a16="http://schemas.microsoft.com/office/drawing/2014/main" id="{F728CCB0-9719-6D4D-1E8B-28136C512AD2}"/>
+                  </a:ext>
+                </a:extLst>
+              </p:cNvPr>
+              <p:cNvSpPr txBox="1">
+                <a:spLocks/>
+              </p:cNvSpPr>
+              <p:nvPr/>
+            </p:nvSpPr>
+            <p:spPr>
+              <a:xfrm>
+                <a:off x="164422" y="4745316"/>
+                <a:ext cx="11977456" cy="921273"/>
+              </a:xfrm>
+              <a:prstGeom prst="rect">
+                <a:avLst/>
+              </a:prstGeom>
+            </p:spPr>
+            <p:txBody>
+              <a:bodyPr vert="horz" lIns="91440" tIns="45720" rIns="91440" bIns="45720" rtlCol="0">
+                <a:normAutofit/>
+              </a:bodyPr>
+              <a:lstStyle>
+                <a:lvl1pPr marL="228600" indent="-228600" algn="l" defTabSz="914400" rtl="0" eaLnBrk="1" latinLnBrk="0" hangingPunct="1">
+                  <a:lnSpc>
+                    <a:spcPct val="90000"/>
+                  </a:lnSpc>
+                  <a:spcBef>
+                    <a:spcPts val="1000"/>
+                  </a:spcBef>
+                  <a:buFont typeface="Arial" panose="020B0604020202020204" pitchFamily="34" charset="0"/>
+                  <a:buChar char="•"/>
+                  <a:defRPr kumimoji="1" sz="2800" kern="1200">
+                    <a:solidFill>
+                      <a:schemeClr val="tx1"/>
+                    </a:solidFill>
+                    <a:latin typeface="Calibri" panose="020F0502020204030204" pitchFamily="34" charset="0"/>
+                    <a:ea typeface="+mn-ea"/>
+                    <a:cs typeface="Calibri" panose="020F0502020204030204" pitchFamily="34" charset="0"/>
+                  </a:defRPr>
+                </a:lvl1pPr>
+                <a:lvl2pPr marL="685800" indent="-228600" algn="l" defTabSz="914400" rtl="0" eaLnBrk="1" latinLnBrk="0" hangingPunct="1">
+                  <a:lnSpc>
+                    <a:spcPct val="90000"/>
+                  </a:lnSpc>
+                  <a:spcBef>
+                    <a:spcPts val="500"/>
+                  </a:spcBef>
+                  <a:buFont typeface="Arial" panose="020B0604020202020204" pitchFamily="34" charset="0"/>
+                  <a:buChar char="•"/>
+                  <a:defRPr kumimoji="1" sz="2400" kern="1200">
+                    <a:solidFill>
+                      <a:schemeClr val="tx1"/>
+                    </a:solidFill>
+                    <a:latin typeface="Calibri" panose="020F0502020204030204" pitchFamily="34" charset="0"/>
+                    <a:ea typeface="+mn-ea"/>
+                    <a:cs typeface="Calibri" panose="020F0502020204030204" pitchFamily="34" charset="0"/>
+                  </a:defRPr>
+                </a:lvl2pPr>
+                <a:lvl3pPr marL="1143000" indent="-228600" algn="l" defTabSz="914400" rtl="0" eaLnBrk="1" latinLnBrk="0" hangingPunct="1">
+                  <a:lnSpc>
+                    <a:spcPct val="90000"/>
+                  </a:lnSpc>
+                  <a:spcBef>
+                    <a:spcPts val="500"/>
+                  </a:spcBef>
+                  <a:buFont typeface="Arial" panose="020B0604020202020204" pitchFamily="34" charset="0"/>
+                  <a:buChar char="•"/>
+                  <a:defRPr kumimoji="1" sz="2000" kern="1200">
+                    <a:solidFill>
+                      <a:schemeClr val="tx1"/>
+                    </a:solidFill>
+                    <a:latin typeface="Calibri" panose="020F0502020204030204" pitchFamily="34" charset="0"/>
+                    <a:ea typeface="+mn-ea"/>
+                    <a:cs typeface="Calibri" panose="020F0502020204030204" pitchFamily="34" charset="0"/>
+                  </a:defRPr>
+                </a:lvl3pPr>
+                <a:lvl4pPr marL="1600200" indent="-228600" algn="l" defTabSz="914400" rtl="0" eaLnBrk="1" latinLnBrk="0" hangingPunct="1">
+                  <a:lnSpc>
+                    <a:spcPct val="90000"/>
+                  </a:lnSpc>
+                  <a:spcBef>
+                    <a:spcPts val="500"/>
+                  </a:spcBef>
+                  <a:buFont typeface="Arial" panose="020B0604020202020204" pitchFamily="34" charset="0"/>
+                  <a:buChar char="•"/>
+                  <a:defRPr kumimoji="1" sz="1800" kern="1200">
+                    <a:solidFill>
+                      <a:schemeClr val="tx1"/>
+                    </a:solidFill>
+                    <a:latin typeface="Calibri" panose="020F0502020204030204" pitchFamily="34" charset="0"/>
+                    <a:ea typeface="+mn-ea"/>
+                    <a:cs typeface="Calibri" panose="020F0502020204030204" pitchFamily="34" charset="0"/>
+                  </a:defRPr>
+                </a:lvl4pPr>
+                <a:lvl5pPr marL="2057400" indent="-228600" algn="l" defTabSz="914400" rtl="0" eaLnBrk="1" latinLnBrk="0" hangingPunct="1">
+                  <a:lnSpc>
+                    <a:spcPct val="90000"/>
+                  </a:lnSpc>
+                  <a:spcBef>
+                    <a:spcPts val="500"/>
+                  </a:spcBef>
+                  <a:buFont typeface="Arial" panose="020B0604020202020204" pitchFamily="34" charset="0"/>
+                  <a:buChar char="•"/>
+                  <a:defRPr kumimoji="1" sz="1800" kern="1200">
+                    <a:solidFill>
+                      <a:schemeClr val="tx1"/>
+                    </a:solidFill>
+                    <a:latin typeface="Calibri" panose="020F0502020204030204" pitchFamily="34" charset="0"/>
+                    <a:ea typeface="+mn-ea"/>
+                    <a:cs typeface="Calibri" panose="020F0502020204030204" pitchFamily="34" charset="0"/>
+                  </a:defRPr>
+                </a:lvl5pPr>
+                <a:lvl6pPr marL="2514600" indent="-228600" algn="l" defTabSz="914400" rtl="0" eaLnBrk="1" latinLnBrk="0" hangingPunct="1">
+                  <a:lnSpc>
+                    <a:spcPct val="90000"/>
+                  </a:lnSpc>
+                  <a:spcBef>
+                    <a:spcPts val="500"/>
+                  </a:spcBef>
+                  <a:buFont typeface="Arial" panose="020B0604020202020204" pitchFamily="34" charset="0"/>
+                  <a:buChar char="•"/>
+                  <a:defRPr kumimoji="1" sz="1800" kern="1200">
+                    <a:solidFill>
+                      <a:schemeClr val="tx1"/>
+                    </a:solidFill>
+                    <a:latin typeface="+mn-lt"/>
+                    <a:ea typeface="+mn-ea"/>
+                    <a:cs typeface="+mn-cs"/>
+                  </a:defRPr>
+                </a:lvl6pPr>
+                <a:lvl7pPr marL="2971800" indent="-228600" algn="l" defTabSz="914400" rtl="0" eaLnBrk="1" latinLnBrk="0" hangingPunct="1">
+                  <a:lnSpc>
+                    <a:spcPct val="90000"/>
+                  </a:lnSpc>
+                  <a:spcBef>
+                    <a:spcPts val="500"/>
+                  </a:spcBef>
+                  <a:buFont typeface="Arial" panose="020B0604020202020204" pitchFamily="34" charset="0"/>
+                  <a:buChar char="•"/>
+                  <a:defRPr kumimoji="1" sz="1800" kern="1200">
+                    <a:solidFill>
+                      <a:schemeClr val="tx1"/>
+                    </a:solidFill>
+                    <a:latin typeface="+mn-lt"/>
+                    <a:ea typeface="+mn-ea"/>
+                    <a:cs typeface="+mn-cs"/>
+                  </a:defRPr>
+                </a:lvl7pPr>
+                <a:lvl8pPr marL="3429000" indent="-228600" algn="l" defTabSz="914400" rtl="0" eaLnBrk="1" latinLnBrk="0" hangingPunct="1">
+                  <a:lnSpc>
+                    <a:spcPct val="90000"/>
+                  </a:lnSpc>
+                  <a:spcBef>
+                    <a:spcPts val="500"/>
+                  </a:spcBef>
+                  <a:buFont typeface="Arial" panose="020B0604020202020204" pitchFamily="34" charset="0"/>
+                  <a:buChar char="•"/>
+                  <a:defRPr kumimoji="1" sz="1800" kern="1200">
+                    <a:solidFill>
+                      <a:schemeClr val="tx1"/>
+                    </a:solidFill>
+                    <a:latin typeface="+mn-lt"/>
+                    <a:ea typeface="+mn-ea"/>
+                    <a:cs typeface="+mn-cs"/>
+                  </a:defRPr>
+                </a:lvl8pPr>
+                <a:lvl9pPr marL="3886200" indent="-228600" algn="l" defTabSz="914400" rtl="0" eaLnBrk="1" latinLnBrk="0" hangingPunct="1">
+                  <a:lnSpc>
+                    <a:spcPct val="90000"/>
+                  </a:lnSpc>
+                  <a:spcBef>
+                    <a:spcPts val="500"/>
+                  </a:spcBef>
+                  <a:buFont typeface="Arial" panose="020B0604020202020204" pitchFamily="34" charset="0"/>
+                  <a:buChar char="•"/>
+                  <a:defRPr kumimoji="1" sz="1800" kern="1200">
+                    <a:solidFill>
+                      <a:schemeClr val="tx1"/>
+                    </a:solidFill>
+                    <a:latin typeface="+mn-lt"/>
+                    <a:ea typeface="+mn-ea"/>
+                    <a:cs typeface="+mn-cs"/>
+                  </a:defRPr>
+                </a:lvl9pPr>
+              </a:lstStyle>
+              <a:p>
+                <a14:m>
+                  <m:oMath xmlns:m="http://schemas.openxmlformats.org/officeDocument/2006/math">
+                    <m:bar>
+                      <m:barPr>
+                        <m:pos m:val="top"/>
+                        <m:ctrlPr>
+                          <a:rPr lang="en-US" altLang="ja-JP" sz="2400" i="1">
+                            <a:latin typeface="Cambria Math" panose="02040503050406030204" pitchFamily="18" charset="0"/>
+                          </a:rPr>
+                        </m:ctrlPr>
+                      </m:barPr>
+                      <m:e>
+                        <m:r>
+                          <m:rPr>
+                            <m:sty m:val="p"/>
+                          </m:rPr>
+                          <a:rPr lang="en-US" altLang="ja-JP" sz="2400" i="1">
+                            <a:latin typeface="Cambria Math" panose="02040503050406030204" pitchFamily="18" charset="0"/>
+                          </a:rPr>
+                          <m:t>α</m:t>
+                        </m:r>
+                      </m:e>
+                    </m:bar>
+                  </m:oMath>
+                </a14:m>
+                <a:r>
+                  <a:rPr lang="en-US" altLang="ja-JP" sz="2400" dirty="0"/>
+                  <a:t>: “Scheduler” for DDPM diffusion models, </a:t>
+                </a:r>
+                <a14:m>
+                  <m:oMath xmlns:m="http://schemas.openxmlformats.org/officeDocument/2006/math">
+                    <m:sSub>
+                      <m:sSubPr>
+                        <m:ctrlPr>
+                          <a:rPr lang="en-US" altLang="ja-JP" sz="2400" i="1">
+                            <a:latin typeface="Cambria Math" panose="02040503050406030204" pitchFamily="18" charset="0"/>
+                          </a:rPr>
+                        </m:ctrlPr>
+                      </m:sSubPr>
+                      <m:e>
+                        <m:r>
+                          <a:rPr lang="en-US" altLang="ja-JP" sz="2400" i="1">
+                            <a:latin typeface="Cambria Math" panose="02040503050406030204" pitchFamily="18" charset="0"/>
+                          </a:rPr>
+                          <m:t>𝜎</m:t>
+                        </m:r>
+                      </m:e>
+                      <m:sub>
+                        <m:r>
+                          <m:rPr>
+                            <m:sty m:val="p"/>
+                          </m:rPr>
+                          <a:rPr lang="en-US" altLang="ja-JP" sz="2400">
+                            <a:latin typeface="Cambria Math" panose="02040503050406030204" pitchFamily="18" charset="0"/>
+                          </a:rPr>
+                          <m:t>VP</m:t>
+                        </m:r>
+                      </m:sub>
+                    </m:sSub>
+                  </m:oMath>
+                </a14:m>
+                <a:r>
+                  <a:rPr lang="en-US" altLang="ja-JP" sz="2400" dirty="0"/>
+                  <a:t>: noise’s standard deviation</a:t>
+                </a:r>
+              </a:p>
+              <a:p>
+                <a14:m>
+                  <m:oMath xmlns:m="http://schemas.openxmlformats.org/officeDocument/2006/math">
+                    <m:r>
+                      <m:rPr>
+                        <m:sty m:val="p"/>
+                      </m:rPr>
+                      <a:rPr lang="en-US" altLang="ja-JP" sz="2400" i="1">
+                        <a:latin typeface="Cambria Math" panose="02040503050406030204" pitchFamily="18" charset="0"/>
+                      </a:rPr>
+                      <m:t>κ</m:t>
+                    </m:r>
+                  </m:oMath>
+                </a14:m>
+                <a:r>
+                  <a:rPr lang="en-US" altLang="ja-JP" sz="2400" dirty="0"/>
+                  <a:t>: Scaling constant for MC rendering image</a:t>
+                </a:r>
+                <a:endParaRPr lang="ja-JP" altLang="en-US" sz="2400" dirty="0"/>
+              </a:p>
+            </p:txBody>
+          </p:sp>
+        </mc:Choice>
+        <mc:Fallback>
+          <p:sp>
+            <p:nvSpPr>
+              <p:cNvPr id="14" name="コンテンツ プレースホルダー 2">
+                <a:extLst>
+                  <a:ext uri="{FF2B5EF4-FFF2-40B4-BE49-F238E27FC236}">
+                    <a16:creationId xmlns:a16="http://schemas.microsoft.com/office/drawing/2014/main" id="{F728CCB0-9719-6D4D-1E8B-28136C512AD2}"/>
+                  </a:ext>
+                </a:extLst>
+              </p:cNvPr>
+              <p:cNvSpPr txBox="1">
+                <a:spLocks noRot="1" noChangeAspect="1" noMove="1" noResize="1" noEditPoints="1" noAdjustHandles="1" noChangeArrowheads="1" noChangeShapeType="1" noTextEdit="1"/>
+              </p:cNvSpPr>
+              <p:nvPr/>
+            </p:nvSpPr>
+            <p:spPr>
+              <a:xfrm>
+                <a:off x="164422" y="4745316"/>
+                <a:ext cx="11977456" cy="921273"/>
+              </a:xfrm>
+              <a:prstGeom prst="rect">
+                <a:avLst/>
+              </a:prstGeom>
+              <a:blipFill>
+                <a:blip r:embed="rId4"/>
+                <a:stretch>
+                  <a:fillRect l="-712" t="-9211" b="-9868"/>
+                </a:stretch>
+              </a:blipFill>
+            </p:spPr>
+            <p:txBody>
+              <a:bodyPr/>
+              <a:lstStyle/>
+              <a:p>
+                <a:r>
+                  <a:rPr lang="ja-JP" altLang="en-US">
+                    <a:noFill/>
+                  </a:rPr>
+                  <a:t> </a:t>
+                </a:r>
+              </a:p>
+            </p:txBody>
+          </p:sp>
+        </mc:Fallback>
+      </mc:AlternateContent>
+      <p:sp>
+        <p:nvSpPr>
+          <p:cNvPr id="15" name="矢印: 下 14">
+            <a:extLst>
+              <a:ext uri="{FF2B5EF4-FFF2-40B4-BE49-F238E27FC236}">
+                <a16:creationId xmlns:a16="http://schemas.microsoft.com/office/drawing/2014/main" id="{0B1A4302-1C53-664E-396C-646ECA5C7237}"/>
+              </a:ext>
+            </a:extLst>
+          </p:cNvPr>
+          <p:cNvSpPr/>
+          <p:nvPr/>
+        </p:nvSpPr>
+        <p:spPr>
+          <a:xfrm>
+            <a:off x="5957886" y="5685639"/>
+            <a:ext cx="276226" cy="209550"/>
+          </a:xfrm>
+          <a:prstGeom prst="downArrow">
+            <a:avLst/>
+          </a:prstGeom>
+        </p:spPr>
+        <p:style>
+          <a:lnRef idx="2">
+            <a:schemeClr val="dk1">
+              <a:shade val="15000"/>
+            </a:schemeClr>
+          </a:lnRef>
+          <a:fillRef idx="1">
+            <a:schemeClr val="dk1"/>
+          </a:fillRef>
+          <a:effectRef idx="0">
+            <a:schemeClr val="dk1"/>
+          </a:effectRef>
+          <a:fontRef idx="minor">
+            <a:schemeClr val="lt1"/>
+          </a:fontRef>
+        </p:style>
+        <p:txBody>
+          <a:bodyPr rtlCol="0" anchor="ctr"/>
+          <a:lstStyle/>
+          <a:p>
+            <a:pPr algn="ctr"/>
+            <a:endParaRPr kumimoji="1" lang="ja-JP" altLang="en-US"/>
+          </a:p>
+        </p:txBody>
+      </p:sp>
+      <mc:AlternateContent xmlns:mc="http://schemas.openxmlformats.org/markup-compatibility/2006">
+        <mc:Choice xmlns:a14="http://schemas.microsoft.com/office/drawing/2010/main" Requires="a14">
+          <p:sp>
+            <p:nvSpPr>
+              <p:cNvPr id="16" name="コンテンツ プレースホルダー 2">
+                <a:extLst>
+                  <a:ext uri="{FF2B5EF4-FFF2-40B4-BE49-F238E27FC236}">
+                    <a16:creationId xmlns:a16="http://schemas.microsoft.com/office/drawing/2014/main" id="{C759F05A-3674-3DD6-A378-48F85E7038D7}"/>
+                  </a:ext>
+                </a:extLst>
+              </p:cNvPr>
+              <p:cNvSpPr txBox="1">
+                <a:spLocks/>
+              </p:cNvSpPr>
+              <p:nvPr/>
+            </p:nvSpPr>
+            <p:spPr>
+              <a:xfrm>
+                <a:off x="1588293" y="5937210"/>
+                <a:ext cx="9015412" cy="688751"/>
+              </a:xfrm>
+              <a:prstGeom prst="rect">
+                <a:avLst/>
+              </a:prstGeom>
+            </p:spPr>
+            <p:txBody>
+              <a:bodyPr vert="horz" lIns="91440" tIns="45720" rIns="91440" bIns="45720" rtlCol="0">
+                <a:noAutofit/>
+              </a:bodyPr>
+              <a:lstStyle>
+                <a:lvl1pPr marL="228600" indent="-228600" algn="l" defTabSz="914400" rtl="0" eaLnBrk="1" latinLnBrk="0" hangingPunct="1">
+                  <a:lnSpc>
+                    <a:spcPct val="90000"/>
+                  </a:lnSpc>
+                  <a:spcBef>
+                    <a:spcPts val="1000"/>
+                  </a:spcBef>
+                  <a:buFont typeface="Arial" panose="020B0604020202020204" pitchFamily="34" charset="0"/>
+                  <a:buChar char="•"/>
+                  <a:defRPr kumimoji="1" sz="2800" kern="1200">
+                    <a:solidFill>
+                      <a:schemeClr val="tx1"/>
+                    </a:solidFill>
+                    <a:latin typeface="Calibri" panose="020F0502020204030204" pitchFamily="34" charset="0"/>
+                    <a:ea typeface="+mn-ea"/>
+                    <a:cs typeface="Calibri" panose="020F0502020204030204" pitchFamily="34" charset="0"/>
+                  </a:defRPr>
+                </a:lvl1pPr>
+                <a:lvl2pPr marL="685800" indent="-228600" algn="l" defTabSz="914400" rtl="0" eaLnBrk="1" latinLnBrk="0" hangingPunct="1">
+                  <a:lnSpc>
+                    <a:spcPct val="90000"/>
+                  </a:lnSpc>
+                  <a:spcBef>
+                    <a:spcPts val="500"/>
+                  </a:spcBef>
+                  <a:buFont typeface="Arial" panose="020B0604020202020204" pitchFamily="34" charset="0"/>
+                  <a:buChar char="•"/>
+                  <a:defRPr kumimoji="1" sz="2400" kern="1200">
+                    <a:solidFill>
+                      <a:schemeClr val="tx1"/>
+                    </a:solidFill>
+                    <a:latin typeface="Calibri" panose="020F0502020204030204" pitchFamily="34" charset="0"/>
+                    <a:ea typeface="+mn-ea"/>
+                    <a:cs typeface="Calibri" panose="020F0502020204030204" pitchFamily="34" charset="0"/>
+                  </a:defRPr>
+                </a:lvl2pPr>
+                <a:lvl3pPr marL="1143000" indent="-228600" algn="l" defTabSz="914400" rtl="0" eaLnBrk="1" latinLnBrk="0" hangingPunct="1">
+                  <a:lnSpc>
+                    <a:spcPct val="90000"/>
+                  </a:lnSpc>
+                  <a:spcBef>
+                    <a:spcPts val="500"/>
+                  </a:spcBef>
+                  <a:buFont typeface="Arial" panose="020B0604020202020204" pitchFamily="34" charset="0"/>
+                  <a:buChar char="•"/>
+                  <a:defRPr kumimoji="1" sz="2000" kern="1200">
+                    <a:solidFill>
+                      <a:schemeClr val="tx1"/>
+                    </a:solidFill>
+                    <a:latin typeface="Calibri" panose="020F0502020204030204" pitchFamily="34" charset="0"/>
+                    <a:ea typeface="+mn-ea"/>
+                    <a:cs typeface="Calibri" panose="020F0502020204030204" pitchFamily="34" charset="0"/>
+                  </a:defRPr>
+                </a:lvl3pPr>
+                <a:lvl4pPr marL="1600200" indent="-228600" algn="l" defTabSz="914400" rtl="0" eaLnBrk="1" latinLnBrk="0" hangingPunct="1">
+                  <a:lnSpc>
+                    <a:spcPct val="90000"/>
+                  </a:lnSpc>
+                  <a:spcBef>
+                    <a:spcPts val="500"/>
+                  </a:spcBef>
+                  <a:buFont typeface="Arial" panose="020B0604020202020204" pitchFamily="34" charset="0"/>
+                  <a:buChar char="•"/>
+                  <a:defRPr kumimoji="1" sz="1800" kern="1200">
+                    <a:solidFill>
+                      <a:schemeClr val="tx1"/>
+                    </a:solidFill>
+                    <a:latin typeface="Calibri" panose="020F0502020204030204" pitchFamily="34" charset="0"/>
+                    <a:ea typeface="+mn-ea"/>
+                    <a:cs typeface="Calibri" panose="020F0502020204030204" pitchFamily="34" charset="0"/>
+                  </a:defRPr>
+                </a:lvl4pPr>
+                <a:lvl5pPr marL="2057400" indent="-228600" algn="l" defTabSz="914400" rtl="0" eaLnBrk="1" latinLnBrk="0" hangingPunct="1">
+                  <a:lnSpc>
+                    <a:spcPct val="90000"/>
+                  </a:lnSpc>
+                  <a:spcBef>
+                    <a:spcPts val="500"/>
+                  </a:spcBef>
+                  <a:buFont typeface="Arial" panose="020B0604020202020204" pitchFamily="34" charset="0"/>
+                  <a:buChar char="•"/>
+                  <a:defRPr kumimoji="1" sz="1800" kern="1200">
+                    <a:solidFill>
+                      <a:schemeClr val="tx1"/>
+                    </a:solidFill>
+                    <a:latin typeface="Calibri" panose="020F0502020204030204" pitchFamily="34" charset="0"/>
+                    <a:ea typeface="+mn-ea"/>
+                    <a:cs typeface="Calibri" panose="020F0502020204030204" pitchFamily="34" charset="0"/>
+                  </a:defRPr>
+                </a:lvl5pPr>
+                <a:lvl6pPr marL="2514600" indent="-228600" algn="l" defTabSz="914400" rtl="0" eaLnBrk="1" latinLnBrk="0" hangingPunct="1">
+                  <a:lnSpc>
+                    <a:spcPct val="90000"/>
+                  </a:lnSpc>
+                  <a:spcBef>
+                    <a:spcPts val="500"/>
+                  </a:spcBef>
+                  <a:buFont typeface="Arial" panose="020B0604020202020204" pitchFamily="34" charset="0"/>
+                  <a:buChar char="•"/>
+                  <a:defRPr kumimoji="1" sz="1800" kern="1200">
+                    <a:solidFill>
+                      <a:schemeClr val="tx1"/>
+                    </a:solidFill>
+                    <a:latin typeface="+mn-lt"/>
+                    <a:ea typeface="+mn-ea"/>
+                    <a:cs typeface="+mn-cs"/>
+                  </a:defRPr>
+                </a:lvl6pPr>
+                <a:lvl7pPr marL="2971800" indent="-228600" algn="l" defTabSz="914400" rtl="0" eaLnBrk="1" latinLnBrk="0" hangingPunct="1">
+                  <a:lnSpc>
+                    <a:spcPct val="90000"/>
+                  </a:lnSpc>
+                  <a:spcBef>
+                    <a:spcPts val="500"/>
+                  </a:spcBef>
+                  <a:buFont typeface="Arial" panose="020B0604020202020204" pitchFamily="34" charset="0"/>
+                  <a:buChar char="•"/>
+                  <a:defRPr kumimoji="1" sz="1800" kern="1200">
+                    <a:solidFill>
+                      <a:schemeClr val="tx1"/>
+                    </a:solidFill>
+                    <a:latin typeface="+mn-lt"/>
+                    <a:ea typeface="+mn-ea"/>
+                    <a:cs typeface="+mn-cs"/>
+                  </a:defRPr>
+                </a:lvl7pPr>
+                <a:lvl8pPr marL="3429000" indent="-228600" algn="l" defTabSz="914400" rtl="0" eaLnBrk="1" latinLnBrk="0" hangingPunct="1">
+                  <a:lnSpc>
+                    <a:spcPct val="90000"/>
+                  </a:lnSpc>
+                  <a:spcBef>
+                    <a:spcPts val="500"/>
+                  </a:spcBef>
+                  <a:buFont typeface="Arial" panose="020B0604020202020204" pitchFamily="34" charset="0"/>
+                  <a:buChar char="•"/>
+                  <a:defRPr kumimoji="1" sz="1800" kern="1200">
+                    <a:solidFill>
+                      <a:schemeClr val="tx1"/>
+                    </a:solidFill>
+                    <a:latin typeface="+mn-lt"/>
+                    <a:ea typeface="+mn-ea"/>
+                    <a:cs typeface="+mn-cs"/>
+                  </a:defRPr>
+                </a:lvl8pPr>
+                <a:lvl9pPr marL="3886200" indent="-228600" algn="l" defTabSz="914400" rtl="0" eaLnBrk="1" latinLnBrk="0" hangingPunct="1">
+                  <a:lnSpc>
+                    <a:spcPct val="90000"/>
+                  </a:lnSpc>
+                  <a:spcBef>
+                    <a:spcPts val="500"/>
+                  </a:spcBef>
+                  <a:buFont typeface="Arial" panose="020B0604020202020204" pitchFamily="34" charset="0"/>
+                  <a:buChar char="•"/>
+                  <a:defRPr kumimoji="1" sz="1800" kern="1200">
+                    <a:solidFill>
+                      <a:schemeClr val="tx1"/>
+                    </a:solidFill>
+                    <a:latin typeface="+mn-lt"/>
+                    <a:ea typeface="+mn-ea"/>
+                    <a:cs typeface="+mn-cs"/>
+                  </a:defRPr>
+                </a:lvl9pPr>
+              </a:lstStyle>
+              <a:p>
+                <a:pPr marL="0" indent="0" algn="ctr">
+                  <a:lnSpc>
+                    <a:spcPct val="110000"/>
+                  </a:lnSpc>
+                  <a:buNone/>
+                </a:pPr>
+                <a:r>
+                  <a:rPr lang="en-US" altLang="ja-JP" sz="2400" dirty="0"/>
+                  <a:t>Final time mapping  </a:t>
+                </a:r>
+                <a14:m>
+                  <m:oMath xmlns:m="http://schemas.openxmlformats.org/officeDocument/2006/math">
+                    <m:r>
+                      <m:rPr>
+                        <m:sty m:val="p"/>
+                      </m:rPr>
+                      <a:rPr lang="en-US" altLang="ja-JP" sz="2400" b="0" i="1" smtClean="0">
+                        <a:latin typeface="Cambria Math" panose="02040503050406030204" pitchFamily="18" charset="0"/>
+                      </a:rPr>
+                      <m:t>t</m:t>
+                    </m:r>
+                    <m:r>
+                      <a:rPr lang="en-US" altLang="ja-JP" sz="2400" b="0" i="1" smtClean="0">
+                        <a:latin typeface="Cambria Math" panose="02040503050406030204" pitchFamily="18" charset="0"/>
+                      </a:rPr>
+                      <m:t>*(</m:t>
+                    </m:r>
+                    <m:r>
+                      <m:rPr>
+                        <m:sty m:val="p"/>
+                      </m:rPr>
+                      <a:rPr lang="en-US" altLang="ja-JP" sz="2400" b="0" i="1" smtClean="0">
+                        <a:latin typeface="Cambria Math" panose="02040503050406030204" pitchFamily="18" charset="0"/>
+                      </a:rPr>
+                      <m:t>τ</m:t>
+                    </m:r>
+                    <m:r>
+                      <a:rPr lang="en-US" altLang="ja-JP" sz="2400" b="0" i="1" smtClean="0">
+                        <a:latin typeface="Cambria Math" panose="02040503050406030204" pitchFamily="18" charset="0"/>
+                      </a:rPr>
+                      <m:t>) =</m:t>
+                    </m:r>
+                    <m:sSubSup>
+                      <m:sSubSupPr>
+                        <m:ctrlPr>
+                          <a:rPr lang="en-US" altLang="ja-JP" sz="2400" b="0" i="1" smtClean="0">
+                            <a:latin typeface="Cambria Math" panose="02040503050406030204" pitchFamily="18" charset="0"/>
+                          </a:rPr>
+                        </m:ctrlPr>
+                      </m:sSubSupPr>
+                      <m:e>
+                        <m:r>
+                          <a:rPr lang="en-US" altLang="ja-JP" sz="2400" i="1">
+                            <a:latin typeface="Cambria Math" panose="02040503050406030204" pitchFamily="18" charset="0"/>
+                          </a:rPr>
+                          <m:t>𝜆</m:t>
+                        </m:r>
+                      </m:e>
+                      <m:sub>
+                        <m:r>
+                          <a:rPr lang="en-US" altLang="ja-JP" sz="2400" i="1">
+                            <a:latin typeface="Cambria Math" panose="02040503050406030204" pitchFamily="18" charset="0"/>
+                          </a:rPr>
+                          <m:t>𝑑𝑖𝑓𝑓</m:t>
+                        </m:r>
+                      </m:sub>
+                      <m:sup>
+                        <m:r>
+                          <a:rPr lang="en-US" altLang="ja-JP" sz="2400" b="0" i="1" smtClean="0">
+                            <a:latin typeface="Cambria Math" panose="02040503050406030204" pitchFamily="18" charset="0"/>
+                          </a:rPr>
+                          <m:t>−1</m:t>
+                        </m:r>
+                      </m:sup>
+                    </m:sSubSup>
+                    <m:r>
+                      <a:rPr lang="en-US" altLang="ja-JP" sz="2400" b="0" i="1" smtClean="0">
+                        <a:latin typeface="Cambria Math" panose="02040503050406030204" pitchFamily="18" charset="0"/>
+                      </a:rPr>
+                      <m:t>(-2</m:t>
+                    </m:r>
+                    <m:r>
+                      <m:rPr>
+                        <m:sty m:val="p"/>
+                      </m:rPr>
+                      <a:rPr lang="en-US" altLang="ja-JP" sz="2400" b="0" i="1" smtClean="0">
+                        <a:latin typeface="Cambria Math" panose="02040503050406030204" pitchFamily="18" charset="0"/>
+                      </a:rPr>
+                      <m:t>log</m:t>
+                    </m:r>
+                    <m:r>
+                      <a:rPr lang="en-US" altLang="ja-JP" sz="2400" b="0" i="1" smtClean="0">
+                        <a:latin typeface="Cambria Math" panose="02040503050406030204" pitchFamily="18" charset="0"/>
+                      </a:rPr>
+                      <m:t>(</m:t>
+                    </m:r>
+                    <m:r>
+                      <m:rPr>
+                        <m:sty m:val="p"/>
+                      </m:rPr>
+                      <a:rPr lang="en-US" altLang="ja-JP" sz="2400" b="0" i="1" smtClean="0">
+                        <a:latin typeface="Cambria Math" panose="02040503050406030204" pitchFamily="18" charset="0"/>
+                      </a:rPr>
+                      <m:t>τ</m:t>
+                    </m:r>
+                    <m:r>
+                      <a:rPr lang="en-US" altLang="ja-JP" sz="2400" b="0" i="1" smtClean="0">
+                        <a:latin typeface="Cambria Math" panose="02040503050406030204" pitchFamily="18" charset="0"/>
+                      </a:rPr>
+                      <m:t>) + (</m:t>
+                    </m:r>
+                    <m:r>
+                      <m:rPr>
+                        <m:sty m:val="p"/>
+                      </m:rPr>
+                      <a:rPr lang="en-US" altLang="ja-JP" sz="2400" b="0" i="1" smtClean="0">
+                        <a:latin typeface="Cambria Math" panose="02040503050406030204" pitchFamily="18" charset="0"/>
+                      </a:rPr>
+                      <m:t>logκ</m:t>
+                    </m:r>
+                    <m:r>
+                      <a:rPr lang="en-US" altLang="ja-JP" sz="2400" b="0" i="1" smtClean="0">
+                        <a:latin typeface="Cambria Math" panose="02040503050406030204" pitchFamily="18" charset="0"/>
+                      </a:rPr>
+                      <m:t> - </m:t>
+                    </m:r>
+                    <m:r>
+                      <m:rPr>
+                        <m:sty m:val="p"/>
+                      </m:rPr>
+                      <a:rPr lang="en-US" altLang="ja-JP" sz="2400" b="0" i="1" smtClean="0">
+                        <a:latin typeface="Cambria Math" panose="02040503050406030204" pitchFamily="18" charset="0"/>
+                      </a:rPr>
+                      <m:t>log</m:t>
+                    </m:r>
+                    <m:sSup>
+                      <m:sSupPr>
+                        <m:ctrlPr>
+                          <a:rPr lang="en-US" altLang="ja-JP" sz="2400" b="0" i="1" smtClean="0">
+                            <a:latin typeface="Cambria Math" panose="02040503050406030204" pitchFamily="18" charset="0"/>
+                          </a:rPr>
+                        </m:ctrlPr>
+                      </m:sSupPr>
+                      <m:e>
+                        <m:r>
+                          <a:rPr lang="en-US" altLang="ja-JP" sz="2400" b="0" i="1" smtClean="0">
+                            <a:latin typeface="Cambria Math" panose="02040503050406030204" pitchFamily="18" charset="0"/>
+                          </a:rPr>
+                          <m:t>𝜎</m:t>
+                        </m:r>
+                      </m:e>
+                      <m:sup>
+                        <m:r>
+                          <a:rPr lang="en-US" altLang="ja-JP" sz="2400" b="0" i="1" smtClean="0">
+                            <a:latin typeface="Cambria Math" panose="02040503050406030204" pitchFamily="18" charset="0"/>
+                          </a:rPr>
+                          <m:t>2</m:t>
+                        </m:r>
+                      </m:sup>
+                    </m:sSup>
+                    <m:r>
+                      <a:rPr lang="en-US" altLang="ja-JP" sz="2400" b="0" i="1" smtClean="0">
+                        <a:latin typeface="Cambria Math" panose="02040503050406030204" pitchFamily="18" charset="0"/>
+                      </a:rPr>
+                      <m:t>))</m:t>
+                    </m:r>
+                  </m:oMath>
+                </a14:m>
+                <a:endParaRPr lang="ja-JP" altLang="en-US" sz="2400" dirty="0"/>
+              </a:p>
+            </p:txBody>
+          </p:sp>
+        </mc:Choice>
+        <mc:Fallback>
+          <p:sp>
+            <p:nvSpPr>
+              <p:cNvPr id="16" name="コンテンツ プレースホルダー 2">
+                <a:extLst>
+                  <a:ext uri="{FF2B5EF4-FFF2-40B4-BE49-F238E27FC236}">
+                    <a16:creationId xmlns:a16="http://schemas.microsoft.com/office/drawing/2014/main" id="{C759F05A-3674-3DD6-A378-48F85E7038D7}"/>
+                  </a:ext>
+                </a:extLst>
+              </p:cNvPr>
+              <p:cNvSpPr txBox="1">
+                <a:spLocks noRot="1" noChangeAspect="1" noMove="1" noResize="1" noEditPoints="1" noAdjustHandles="1" noChangeArrowheads="1" noChangeShapeType="1" noTextEdit="1"/>
+              </p:cNvSpPr>
+              <p:nvPr/>
+            </p:nvSpPr>
+            <p:spPr>
+              <a:xfrm>
+                <a:off x="1588293" y="5937210"/>
+                <a:ext cx="9015412" cy="688751"/>
+              </a:xfrm>
+              <a:prstGeom prst="rect">
+                <a:avLst/>
+              </a:prstGeom>
+              <a:blipFill>
+                <a:blip r:embed="rId5"/>
+                <a:stretch>
+                  <a:fillRect/>
+                </a:stretch>
+              </a:blipFill>
+            </p:spPr>
+            <p:txBody>
+              <a:bodyPr/>
+              <a:lstStyle/>
+              <a:p>
+                <a:r>
+                  <a:rPr lang="ja-JP" altLang="en-US">
+                    <a:noFill/>
+                  </a:rPr>
+                  <a:t> </a:t>
+                </a:r>
+              </a:p>
+            </p:txBody>
+          </p:sp>
+        </mc:Fallback>
+      </mc:AlternateContent>
+    </p:spTree>
+    <p:extLst>
+      <p:ext uri="{BB962C8B-B14F-4D97-AF65-F5344CB8AC3E}">
+        <p14:creationId xmlns:p14="http://schemas.microsoft.com/office/powerpoint/2010/main" val="2050161884"/>
+      </p:ext>
+    </p:extLst>
+  </p:cSld>
+  <p:clrMapOvr>
+    <a:masterClrMapping/>
+  </p:clrMapOvr>
+</p:sld>
+</file>
+
+<file path=ppt/slides/slide7.xml><?xml version="1.0" encoding="utf-8"?>
+<p:sld xmlns:a="http://schemas.openxmlformats.org/drawingml/2006/main" xmlns:r="http://schemas.openxmlformats.org/officeDocument/2006/relationships" xmlns:p="http://schemas.openxmlformats.org/presentationml/2006/main">
+  <p:cSld>
+    <p:spTree>
+      <p:nvGrpSpPr>
+        <p:cNvPr id="1" name="">
+          <a:extLst>
+            <a:ext uri="{FF2B5EF4-FFF2-40B4-BE49-F238E27FC236}">
+              <a16:creationId xmlns:a16="http://schemas.microsoft.com/office/drawing/2014/main" id="{82587C4F-BA12-57B6-2180-86E9B6EC89A6}"/>
+            </a:ext>
+          </a:extLst>
+        </p:cNvPr>
+        <p:cNvGrpSpPr/>
+        <p:nvPr/>
+      </p:nvGrpSpPr>
+      <p:grpSpPr>
+        <a:xfrm>
+          <a:off x="0" y="0"/>
+          <a:ext cx="0" cy="0"/>
+          <a:chOff x="0" y="0"/>
+          <a:chExt cx="0" cy="0"/>
+        </a:xfrm>
+      </p:grpSpPr>
+      <p:sp>
+        <p:nvSpPr>
+          <p:cNvPr id="2" name="タイトル 1">
+            <a:extLst>
+              <a:ext uri="{FF2B5EF4-FFF2-40B4-BE49-F238E27FC236}">
+                <a16:creationId xmlns:a16="http://schemas.microsoft.com/office/drawing/2014/main" id="{EB23713D-D6EA-522A-1B39-4BF56F90649A}"/>
+              </a:ext>
+            </a:extLst>
+          </p:cNvPr>
+          <p:cNvSpPr>
+            <a:spLocks noGrp="1"/>
+          </p:cNvSpPr>
+          <p:nvPr>
+            <p:ph type="title"/>
+          </p:nvPr>
+        </p:nvSpPr>
+        <p:spPr/>
+        <p:txBody>
+          <a:bodyPr/>
+          <a:lstStyle/>
+          <a:p>
+            <a:r>
+              <a:rPr kumimoji="1" lang="en-US" altLang="ja-JP" dirty="0"/>
+              <a:t>Adapter</a:t>
+            </a:r>
+            <a:endParaRPr kumimoji="1" lang="ja-JP" altLang="en-US" dirty="0"/>
+          </a:p>
+        </p:txBody>
+      </p:sp>
+      <p:sp>
+        <p:nvSpPr>
+          <p:cNvPr id="3" name="コンテンツ プレースホルダー 2">
+            <a:extLst>
+              <a:ext uri="{FF2B5EF4-FFF2-40B4-BE49-F238E27FC236}">
+                <a16:creationId xmlns:a16="http://schemas.microsoft.com/office/drawing/2014/main" id="{0DB2EA7D-FFC1-3E50-3518-7B3881565EB2}"/>
+              </a:ext>
+            </a:extLst>
+          </p:cNvPr>
+          <p:cNvSpPr>
+            <a:spLocks noGrp="1"/>
+          </p:cNvSpPr>
+          <p:nvPr>
+            <p:ph idx="1"/>
+          </p:nvPr>
+        </p:nvSpPr>
+        <p:spPr>
+          <a:xfrm>
+            <a:off x="164422" y="1355202"/>
+            <a:ext cx="11977456" cy="921273"/>
+          </a:xfrm>
+        </p:spPr>
+        <p:txBody>
+          <a:bodyPr>
+            <a:normAutofit/>
+          </a:bodyPr>
+          <a:lstStyle/>
+          <a:p>
+            <a:r>
+              <a:rPr lang="en-US" altLang="ja-JP" dirty="0"/>
+              <a:t>In reality, the distribution of MC noise </a:t>
+            </a:r>
+            <a:r>
+              <a:rPr lang="en-US" altLang="ja-JP" b="1" dirty="0"/>
+              <a:t>does not follow a Gaussian</a:t>
+            </a:r>
+            <a:br>
+              <a:rPr lang="en-US" altLang="ja-JP" b="1" dirty="0"/>
+            </a:br>
+            <a:r>
+              <a:rPr lang="en-US" altLang="ja-JP" b="1" dirty="0"/>
+              <a:t>→ Adjust the scale and shift of feature maps </a:t>
+            </a:r>
+            <a:r>
+              <a:rPr lang="en-US" altLang="ja-JP" dirty="0"/>
+              <a:t>using lightweight CNNs (</a:t>
+            </a:r>
+            <a:r>
+              <a:rPr lang="en-US" altLang="ja-JP" dirty="0" err="1"/>
+              <a:t>FiLM</a:t>
+            </a:r>
+            <a:r>
+              <a:rPr lang="en-US" altLang="ja-JP" dirty="0"/>
+              <a:t>)</a:t>
+            </a:r>
+            <a:endParaRPr kumimoji="1" lang="ja-JP" altLang="en-US" sz="2400" dirty="0"/>
+          </a:p>
+        </p:txBody>
+      </p:sp>
+      <p:sp>
+        <p:nvSpPr>
+          <p:cNvPr id="4" name="スライド番号プレースホルダー 3">
+            <a:extLst>
+              <a:ext uri="{FF2B5EF4-FFF2-40B4-BE49-F238E27FC236}">
+                <a16:creationId xmlns:a16="http://schemas.microsoft.com/office/drawing/2014/main" id="{5E3F420C-6E91-B054-C638-D2CA61AF915D}"/>
+              </a:ext>
+            </a:extLst>
+          </p:cNvPr>
+          <p:cNvSpPr>
+            <a:spLocks noGrp="1"/>
+          </p:cNvSpPr>
+          <p:nvPr>
+            <p:ph type="sldNum" sz="quarter" idx="12"/>
+          </p:nvPr>
+        </p:nvSpPr>
+        <p:spPr/>
+        <p:txBody>
+          <a:bodyPr/>
+          <a:lstStyle/>
+          <a:p>
+            <a:fld id="{05A07A33-D779-4A79-A49C-E26576C728D8}" type="slidenum">
+              <a:rPr lang="ja-JP" altLang="en-US" smtClean="0"/>
+              <a:pPr/>
+              <a:t>7</a:t>
+            </a:fld>
+            <a:endParaRPr lang="ja-JP" altLang="en-US" dirty="0">
+              <a:latin typeface="Calibri" panose="020F0502020204030204" pitchFamily="34" charset="0"/>
+              <a:cs typeface="Calibri" panose="020F0502020204030204" pitchFamily="34" charset="0"/>
+            </a:endParaRPr>
+          </a:p>
+        </p:txBody>
+      </p:sp>
+      <p:sp>
+        <p:nvSpPr>
+          <p:cNvPr id="5" name="コンテンツ プレースホルダー 2">
+            <a:extLst>
+              <a:ext uri="{FF2B5EF4-FFF2-40B4-BE49-F238E27FC236}">
+                <a16:creationId xmlns:a16="http://schemas.microsoft.com/office/drawing/2014/main" id="{AFE3A315-38E2-0E5B-872C-7DA1003345CE}"/>
+              </a:ext>
+            </a:extLst>
+          </p:cNvPr>
+          <p:cNvSpPr txBox="1">
+            <a:spLocks/>
+          </p:cNvSpPr>
+          <p:nvPr/>
+        </p:nvSpPr>
+        <p:spPr>
+          <a:xfrm>
+            <a:off x="164422" y="2478737"/>
+            <a:ext cx="11977456" cy="1245538"/>
+          </a:xfrm>
+          <a:prstGeom prst="rect">
+            <a:avLst/>
+          </a:prstGeom>
+        </p:spPr>
+        <p:txBody>
+          <a:bodyPr vert="horz" lIns="91440" tIns="45720" rIns="91440" bIns="45720" rtlCol="0">
+            <a:normAutofit/>
+          </a:bodyPr>
+          <a:lstStyle>
+            <a:lvl1pPr marL="228600" indent="-228600" algn="l" defTabSz="914400" rtl="0" eaLnBrk="1" latinLnBrk="0" hangingPunct="1">
+              <a:lnSpc>
+                <a:spcPct val="90000"/>
+              </a:lnSpc>
+              <a:spcBef>
+                <a:spcPts val="1000"/>
+              </a:spcBef>
+              <a:buFont typeface="Arial" panose="020B0604020202020204" pitchFamily="34" charset="0"/>
+              <a:buChar char="•"/>
+              <a:defRPr kumimoji="1" sz="2800" kern="1200">
+                <a:solidFill>
+                  <a:schemeClr val="tx1"/>
+                </a:solidFill>
+                <a:latin typeface="Calibri" panose="020F0502020204030204" pitchFamily="34" charset="0"/>
+                <a:ea typeface="+mn-ea"/>
+                <a:cs typeface="Calibri" panose="020F0502020204030204" pitchFamily="34" charset="0"/>
+              </a:defRPr>
+            </a:lvl1pPr>
+            <a:lvl2pPr marL="685800" indent="-228600" algn="l" defTabSz="914400" rtl="0" eaLnBrk="1" latinLnBrk="0" hangingPunct="1">
+              <a:lnSpc>
+                <a:spcPct val="90000"/>
+              </a:lnSpc>
+              <a:spcBef>
+                <a:spcPts val="500"/>
+              </a:spcBef>
+              <a:buFont typeface="Arial" panose="020B0604020202020204" pitchFamily="34" charset="0"/>
+              <a:buChar char="•"/>
+              <a:defRPr kumimoji="1" sz="2400" kern="1200">
+                <a:solidFill>
+                  <a:schemeClr val="tx1"/>
+                </a:solidFill>
+                <a:latin typeface="Calibri" panose="020F0502020204030204" pitchFamily="34" charset="0"/>
+                <a:ea typeface="+mn-ea"/>
+                <a:cs typeface="Calibri" panose="020F0502020204030204" pitchFamily="34" charset="0"/>
+              </a:defRPr>
+            </a:lvl2pPr>
+            <a:lvl3pPr marL="1143000" indent="-228600" algn="l" defTabSz="914400" rtl="0" eaLnBrk="1" latinLnBrk="0" hangingPunct="1">
+              <a:lnSpc>
+                <a:spcPct val="90000"/>
+              </a:lnSpc>
+              <a:spcBef>
+                <a:spcPts val="500"/>
+              </a:spcBef>
+              <a:buFont typeface="Arial" panose="020B0604020202020204" pitchFamily="34" charset="0"/>
+              <a:buChar char="•"/>
+              <a:defRPr kumimoji="1" sz="2000" kern="1200">
+                <a:solidFill>
+                  <a:schemeClr val="tx1"/>
+                </a:solidFill>
+                <a:latin typeface="Calibri" panose="020F0502020204030204" pitchFamily="34" charset="0"/>
+                <a:ea typeface="+mn-ea"/>
+                <a:cs typeface="Calibri" panose="020F0502020204030204" pitchFamily="34" charset="0"/>
+              </a:defRPr>
+            </a:lvl3pPr>
+            <a:lvl4pPr marL="1600200" indent="-228600" algn="l" defTabSz="914400" rtl="0" eaLnBrk="1" latinLnBrk="0" hangingPunct="1">
+              <a:lnSpc>
+                <a:spcPct val="90000"/>
+              </a:lnSpc>
+              <a:spcBef>
+                <a:spcPts val="500"/>
+              </a:spcBef>
+              <a:buFont typeface="Arial" panose="020B0604020202020204" pitchFamily="34" charset="0"/>
+              <a:buChar char="•"/>
+              <a:defRPr kumimoji="1" sz="1800" kern="1200">
+                <a:solidFill>
+                  <a:schemeClr val="tx1"/>
+                </a:solidFill>
+                <a:latin typeface="Calibri" panose="020F0502020204030204" pitchFamily="34" charset="0"/>
+                <a:ea typeface="+mn-ea"/>
+                <a:cs typeface="Calibri" panose="020F0502020204030204" pitchFamily="34" charset="0"/>
+              </a:defRPr>
+            </a:lvl4pPr>
+            <a:lvl5pPr marL="2057400" indent="-228600" algn="l" defTabSz="914400" rtl="0" eaLnBrk="1" latinLnBrk="0" hangingPunct="1">
+              <a:lnSpc>
+                <a:spcPct val="90000"/>
+              </a:lnSpc>
+              <a:spcBef>
+                <a:spcPts val="500"/>
+              </a:spcBef>
+              <a:buFont typeface="Arial" panose="020B0604020202020204" pitchFamily="34" charset="0"/>
+              <a:buChar char="•"/>
+              <a:defRPr kumimoji="1" sz="1800" kern="1200">
+                <a:solidFill>
+                  <a:schemeClr val="tx1"/>
+                </a:solidFill>
+                <a:latin typeface="Calibri" panose="020F0502020204030204" pitchFamily="34" charset="0"/>
+                <a:ea typeface="+mn-ea"/>
+                <a:cs typeface="Calibri" panose="020F0502020204030204" pitchFamily="34" charset="0"/>
+              </a:defRPr>
+            </a:lvl5pPr>
+            <a:lvl6pPr marL="2514600" indent="-228600" algn="l" defTabSz="914400" rtl="0" eaLnBrk="1" latinLnBrk="0" hangingPunct="1">
+              <a:lnSpc>
+                <a:spcPct val="90000"/>
+              </a:lnSpc>
+              <a:spcBef>
+                <a:spcPts val="500"/>
+              </a:spcBef>
+              <a:buFont typeface="Arial" panose="020B0604020202020204" pitchFamily="34" charset="0"/>
+              <a:buChar char="•"/>
+              <a:defRPr kumimoji="1" sz="1800" kern="1200">
+                <a:solidFill>
+                  <a:schemeClr val="tx1"/>
+                </a:solidFill>
+                <a:latin typeface="+mn-lt"/>
+                <a:ea typeface="+mn-ea"/>
+                <a:cs typeface="+mn-cs"/>
+              </a:defRPr>
+            </a:lvl6pPr>
+            <a:lvl7pPr marL="2971800" indent="-228600" algn="l" defTabSz="914400" rtl="0" eaLnBrk="1" latinLnBrk="0" hangingPunct="1">
+              <a:lnSpc>
+                <a:spcPct val="90000"/>
+              </a:lnSpc>
+              <a:spcBef>
+                <a:spcPts val="500"/>
+              </a:spcBef>
+              <a:buFont typeface="Arial" panose="020B0604020202020204" pitchFamily="34" charset="0"/>
+              <a:buChar char="•"/>
+              <a:defRPr kumimoji="1" sz="1800" kern="1200">
+                <a:solidFill>
+                  <a:schemeClr val="tx1"/>
+                </a:solidFill>
+                <a:latin typeface="+mn-lt"/>
+                <a:ea typeface="+mn-ea"/>
+                <a:cs typeface="+mn-cs"/>
+              </a:defRPr>
+            </a:lvl7pPr>
+            <a:lvl8pPr marL="3429000" indent="-228600" algn="l" defTabSz="914400" rtl="0" eaLnBrk="1" latinLnBrk="0" hangingPunct="1">
+              <a:lnSpc>
+                <a:spcPct val="90000"/>
+              </a:lnSpc>
+              <a:spcBef>
+                <a:spcPts val="500"/>
+              </a:spcBef>
+              <a:buFont typeface="Arial" panose="020B0604020202020204" pitchFamily="34" charset="0"/>
+              <a:buChar char="•"/>
+              <a:defRPr kumimoji="1" sz="1800" kern="1200">
+                <a:solidFill>
+                  <a:schemeClr val="tx1"/>
+                </a:solidFill>
+                <a:latin typeface="+mn-lt"/>
+                <a:ea typeface="+mn-ea"/>
+                <a:cs typeface="+mn-cs"/>
+              </a:defRPr>
+            </a:lvl8pPr>
+            <a:lvl9pPr marL="3886200" indent="-228600" algn="l" defTabSz="914400" rtl="0" eaLnBrk="1" latinLnBrk="0" hangingPunct="1">
+              <a:lnSpc>
+                <a:spcPct val="90000"/>
+              </a:lnSpc>
+              <a:spcBef>
+                <a:spcPts val="500"/>
+              </a:spcBef>
+              <a:buFont typeface="Arial" panose="020B0604020202020204" pitchFamily="34" charset="0"/>
+              <a:buChar char="•"/>
+              <a:defRPr kumimoji="1" sz="1800" kern="1200">
+                <a:solidFill>
+                  <a:schemeClr val="tx1"/>
+                </a:solidFill>
+                <a:latin typeface="+mn-lt"/>
+                <a:ea typeface="+mn-ea"/>
+                <a:cs typeface="+mn-cs"/>
+              </a:defRPr>
+            </a:lvl9pPr>
+          </a:lstStyle>
+          <a:p>
+            <a:r>
+              <a:rPr lang="en-US" altLang="ja-JP" u="sng" dirty="0" err="1"/>
+              <a:t>FiLM</a:t>
+            </a:r>
+            <a:r>
+              <a:rPr lang="en-US" altLang="ja-JP" u="sng" dirty="0"/>
+              <a:t> (Feature-wise Linear Modulation)</a:t>
+            </a:r>
+            <a:r>
+              <a:rPr lang="en-US" altLang="ja-JP" dirty="0"/>
+              <a:t>:</a:t>
+            </a:r>
+            <a:br>
+              <a:rPr lang="en-US" altLang="ja-JP" dirty="0"/>
+            </a:br>
+            <a:r>
+              <a:rPr lang="en-US" altLang="ja-JP" dirty="0"/>
+              <a:t>applies modulation to the output of a neural network </a:t>
+            </a:r>
+            <a:br>
+              <a:rPr lang="en-US" altLang="ja-JP" dirty="0"/>
+            </a:br>
+            <a:r>
+              <a:rPr lang="en-US" altLang="ja-JP" dirty="0"/>
+              <a:t>by performing a </a:t>
+            </a:r>
+            <a:r>
+              <a:rPr lang="en-US" altLang="ja-JP" b="1" dirty="0"/>
+              <a:t>linear transformation on its features </a:t>
+            </a:r>
+            <a:endParaRPr lang="ja-JP" altLang="en-US" sz="2400" b="1" dirty="0"/>
+          </a:p>
+        </p:txBody>
+      </p:sp>
+    </p:spTree>
+    <p:extLst>
+      <p:ext uri="{BB962C8B-B14F-4D97-AF65-F5344CB8AC3E}">
+        <p14:creationId xmlns:p14="http://schemas.microsoft.com/office/powerpoint/2010/main" val="1075290558"/>
       </p:ext>
     </p:extLst>
   </p:cSld>
